--- a/presentation.pptx
+++ b/presentation.pptx
@@ -12,6 +12,9 @@
     <p:sldId id="260" r:id="rId11"/>
     <p:sldId id="261" r:id="rId12"/>
     <p:sldId id="262" r:id="rId13"/>
+    <p:sldId id="263" r:id="rId14"/>
+    <p:sldId id="264" r:id="rId15"/>
+    <p:sldId id="265" r:id="rId16"/>
   </p:sldIdLst>
   <p:sldSz cx="12191695" cy="6858000" type="screen4x3"/>
   <p:notesSz cx="6858000" cy="9144000"/>
@@ -3111,7 +3114,7 @@
         <p:spPr>
           <a:xfrm>
             <a:off x="822960" y="640080"/>
-            <a:ext cx="3657600" cy="320040"/>
+            <a:ext cx="3657600" cy="256032"/>
           </a:xfrm>
           <a:prstGeom prst="rect">
             <a:avLst/>
@@ -3145,42 +3148,38 @@
         <p:spPr>
           <a:xfrm>
             <a:off x="822960" y="1097280"/>
-            <a:ext cx="8229600" cy="1828800"/>
-          </a:xfrm>
-          <a:prstGeom prst="rect">
-            <a:avLst/>
-          </a:prstGeom>
-          <a:noFill/>
-        </p:spPr>
-        <p:txBody>
-          <a:bodyPr wrap="square">
-            <a:spAutoFit/>
-          </a:bodyPr>
-          <a:lstStyle/>
-          <a:p>
-            <a:pPr algn="l"/>
-            <a:r>
-              <a:rPr sz="4400" b="1">
+            <a:ext cx="10241280" cy="1463040"/>
+          </a:xfrm>
+          <a:prstGeom prst="rect">
+            <a:avLst/>
+          </a:prstGeom>
+          <a:noFill/>
+        </p:spPr>
+        <p:txBody>
+          <a:bodyPr wrap="square">
+            <a:spAutoFit/>
+          </a:bodyPr>
+          <a:lstStyle/>
+          <a:p>
+            <a:pPr algn="l"/>
+            <a:r>
+              <a:rPr sz="4200" b="1" i="0">
                 <a:solidFill>
                   <a:srgbClr val="E8E8F0"/>
                 </a:solidFill>
               </a:rPr>
-              <a:t>Adversarial Patch</a:t>
-            </a:r>
-          </a:p>
-          <a:p>
-            <a:pPr algn="l">
-              <a:spcBef>
-                <a:spcPts val="200"/>
-              </a:spcBef>
-            </a:pPr>
-            <a:r>
-              <a:rPr sz="4400" b="1">
+              <a:t>Adversarial Robustness</a:t>
+            </a:r>
+          </a:p>
+          <a:p>
+            <a:pPr algn="l"/>
+            <a:r>
+              <a:rPr sz="4200" b="1" i="0">
                 <a:solidFill>
                   <a:srgbClr val="3EFFA0"/>
                 </a:solidFill>
               </a:rPr>
-              <a:t>Attacks on YOLO</a:t>
+              <a:t>Framework</a:t>
             </a:r>
           </a:p>
         </p:txBody>
@@ -3193,8 +3192,8 @@
         </p:nvSpPr>
         <p:spPr>
           <a:xfrm>
-            <a:off x="822960" y="2743200"/>
-            <a:ext cx="8229600" cy="731520"/>
+            <a:off x="822960" y="2788920"/>
+            <a:ext cx="8778240" cy="731520"/>
           </a:xfrm>
           <a:prstGeom prst="rect">
             <a:avLst/>
@@ -3214,8 +3213,233 @@
                   <a:srgbClr val="888888"/>
                 </a:solidFill>
               </a:rPr>
-              <a:t>Gradient-based person detection suppression across YOLOv8n, YOLO11n, and YOLO26n</a:t>
-            </a:r>
+              <a:t>A two-track pipeline for systematic attack and defense evaluation across YOLO model generations</a:t>
+            </a:r>
+          </a:p>
+        </p:txBody>
+      </p:sp>
+      <p:sp>
+        <p:nvSpPr>
+          <p:cNvPr id="5" name="Rectangle 4"/>
+          <p:cNvSpPr/>
+          <p:nvPr/>
+        </p:nvSpPr>
+        <p:spPr>
+          <a:xfrm>
+            <a:off x="822960" y="3657600"/>
+            <a:ext cx="1097280" cy="18288"/>
+          </a:xfrm>
+          <a:prstGeom prst="rect">
+            <a:avLst/>
+          </a:prstGeom>
+          <a:solidFill>
+            <a:srgbClr val="3EFFA0"/>
+          </a:solidFill>
+          <a:ln>
+            <a:noFill/>
+          </a:ln>
+        </p:spPr>
+        <p:style>
+          <a:lnRef idx="1">
+            <a:schemeClr val="accent1"/>
+          </a:lnRef>
+          <a:fillRef idx="3">
+            <a:schemeClr val="accent1"/>
+          </a:fillRef>
+          <a:effectRef idx="2">
+            <a:schemeClr val="accent1"/>
+          </a:effectRef>
+          <a:fontRef idx="minor">
+            <a:schemeClr val="lt1"/>
+          </a:fontRef>
+        </p:style>
+        <p:txBody>
+          <a:bodyPr rtlCol="0" anchor="ctr"/>
+          <a:lstStyle/>
+          <a:p>
+            <a:pPr algn="ctr"/>
+          </a:p>
+        </p:txBody>
+      </p:sp>
+      <p:sp>
+        <p:nvSpPr>
+          <p:cNvPr id="6" name="TextBox 5"/>
+          <p:cNvSpPr txBox="1"/>
+          <p:nvPr/>
+        </p:nvSpPr>
+        <p:spPr>
+          <a:xfrm>
+            <a:off x="822960" y="3886200"/>
+            <a:ext cx="2743200" cy="365760"/>
+          </a:xfrm>
+          <a:prstGeom prst="rect">
+            <a:avLst/>
+          </a:prstGeom>
+          <a:noFill/>
+        </p:spPr>
+        <p:txBody>
+          <a:bodyPr wrap="square">
+            <a:spAutoFit/>
+          </a:bodyPr>
+          <a:lstStyle/>
+          <a:p>
+            <a:pPr algn="l"/>
+            <a:r>
+              <a:rPr sz="1300" b="0" i="0">
+                <a:solidFill>
+                  <a:srgbClr val="444444"/>
+                </a:solidFill>
+              </a:rPr>
+              <a:t>April 2026</a:t>
+            </a:r>
+          </a:p>
+        </p:txBody>
+      </p:sp>
+    </p:spTree>
+  </p:cSld>
+  <p:clrMapOvr>
+    <a:masterClrMapping/>
+  </p:clrMapOvr>
+</p:sld>
+</file>
+
+<file path=ppt/slides/slide10.xml><?xml version="1.0" encoding="utf-8"?>
+<p:sld xmlns:a="http://schemas.openxmlformats.org/drawingml/2006/main" xmlns:p="http://schemas.openxmlformats.org/presentationml/2006/main" xmlns:r="http://schemas.openxmlformats.org/officeDocument/2006/relationships">
+  <p:cSld>
+    <p:bg>
+      <p:bgPr>
+        <a:solidFill>
+          <a:srgbClr val="0A0A0F"/>
+        </a:solidFill>
+        <a:effectLst/>
+      </p:bgPr>
+    </p:bg>
+    <p:spTree>
+      <p:nvGrpSpPr>
+        <p:cNvPr id="1" name=""/>
+        <p:cNvGrpSpPr/>
+        <p:nvPr/>
+      </p:nvGrpSpPr>
+      <p:grpSpPr/>
+      <p:sp>
+        <p:nvSpPr>
+          <p:cNvPr id="2" name="TextBox 1"/>
+          <p:cNvSpPr txBox="1"/>
+          <p:nvPr/>
+        </p:nvSpPr>
+        <p:spPr>
+          <a:xfrm>
+            <a:off x="822960" y="411480"/>
+            <a:ext cx="3657600" cy="256032"/>
+          </a:xfrm>
+          <a:prstGeom prst="rect">
+            <a:avLst/>
+          </a:prstGeom>
+          <a:noFill/>
+        </p:spPr>
+        <p:txBody>
+          <a:bodyPr wrap="square">
+            <a:spAutoFit/>
+          </a:bodyPr>
+          <a:lstStyle/>
+          <a:p>
+            <a:pPr algn="l"/>
+            <a:r>
+              <a:rPr sz="900" b="1" i="0">
+                <a:solidFill>
+                  <a:srgbClr val="60B8FF"/>
+                </a:solidFill>
+              </a:rPr>
+              <a:t>CONCLUSIONS</a:t>
+            </a:r>
+          </a:p>
+        </p:txBody>
+      </p:sp>
+      <p:sp>
+        <p:nvSpPr>
+          <p:cNvPr id="3" name="TextBox 2"/>
+          <p:cNvSpPr txBox="1"/>
+          <p:nvPr/>
+        </p:nvSpPr>
+        <p:spPr>
+          <a:xfrm>
+            <a:off x="822960" y="777240"/>
+            <a:ext cx="10241280" cy="1463040"/>
+          </a:xfrm>
+          <a:prstGeom prst="rect">
+            <a:avLst/>
+          </a:prstGeom>
+          <a:noFill/>
+        </p:spPr>
+        <p:txBody>
+          <a:bodyPr wrap="square">
+            <a:spAutoFit/>
+          </a:bodyPr>
+          <a:lstStyle/>
+          <a:p>
+            <a:pPr algn="l"/>
+            <a:r>
+              <a:rPr sz="3800" b="1" i="0">
+                <a:solidFill>
+                  <a:srgbClr val="E8E8F0"/>
+                </a:solidFill>
+              </a:rPr>
+              <a:t>What We</a:t>
+            </a:r>
+          </a:p>
+          <a:p>
+            <a:pPr algn="l"/>
+            <a:r>
+              <a:rPr sz="3800" b="1" i="0">
+                <a:solidFill>
+                  <a:srgbClr val="3EFFA0"/>
+                </a:solidFill>
+              </a:rPr>
+              <a:t>Learned</a:t>
+            </a:r>
+          </a:p>
+        </p:txBody>
+      </p:sp>
+      <p:sp>
+        <p:nvSpPr>
+          <p:cNvPr id="4" name="Rectangle 3"/>
+          <p:cNvSpPr/>
+          <p:nvPr/>
+        </p:nvSpPr>
+        <p:spPr>
+          <a:xfrm>
+            <a:off x="822960" y="2148840"/>
+            <a:ext cx="3291840" cy="2240280"/>
+          </a:xfrm>
+          <a:prstGeom prst="rect">
+            <a:avLst/>
+          </a:prstGeom>
+          <a:solidFill>
+            <a:srgbClr val="0D1A12"/>
+          </a:solidFill>
+          <a:ln>
+            <a:noFill/>
+          </a:ln>
+        </p:spPr>
+        <p:style>
+          <a:lnRef idx="1">
+            <a:schemeClr val="accent1"/>
+          </a:lnRef>
+          <a:fillRef idx="3">
+            <a:schemeClr val="accent1"/>
+          </a:fillRef>
+          <a:effectRef idx="2">
+            <a:schemeClr val="accent1"/>
+          </a:effectRef>
+          <a:fontRef idx="minor">
+            <a:schemeClr val="lt1"/>
+          </a:fontRef>
+        </p:style>
+        <p:txBody>
+          <a:bodyPr rtlCol="0" anchor="ctr"/>
+          <a:lstStyle/>
+          <a:p>
+            <a:pPr algn="ctr"/>
           </a:p>
         </p:txBody>
       </p:sp>
@@ -3227,8 +3451,42 @@
         </p:nvSpPr>
         <p:spPr>
           <a:xfrm>
-            <a:off x="822960" y="3840480"/>
-            <a:ext cx="3657600" cy="457200"/>
+            <a:off x="1005840" y="2313432"/>
+            <a:ext cx="3291840" cy="201168"/>
+          </a:xfrm>
+          <a:prstGeom prst="rect">
+            <a:avLst/>
+          </a:prstGeom>
+          <a:noFill/>
+        </p:spPr>
+        <p:txBody>
+          <a:bodyPr wrap="square">
+            <a:spAutoFit/>
+          </a:bodyPr>
+          <a:lstStyle/>
+          <a:p>
+            <a:pPr algn="l"/>
+            <a:r>
+              <a:rPr sz="900" b="1" i="0">
+                <a:solidFill>
+                  <a:srgbClr val="60B8FF"/>
+                </a:solidFill>
+              </a:rPr>
+              <a:t>FRAMEWORK CONTRIBUTION</a:t>
+            </a:r>
+          </a:p>
+        </p:txBody>
+      </p:sp>
+      <p:sp>
+        <p:nvSpPr>
+          <p:cNvPr id="6" name="TextBox 5"/>
+          <p:cNvSpPr txBox="1"/>
+          <p:nvPr/>
+        </p:nvSpPr>
+        <p:spPr>
+          <a:xfrm>
+            <a:off x="1005840" y="2651760"/>
+            <a:ext cx="3017520" cy="1417320"/>
           </a:xfrm>
           <a:prstGeom prst="rect">
             <a:avLst/>
@@ -3245,10 +3503,309 @@
             <a:r>
               <a:rPr sz="1300" b="0" i="0">
                 <a:solidFill>
-                  <a:srgbClr val="444444"/>
-                </a:solidFill>
-              </a:rPr>
-              <a:t>April 2026</a:t>
+                  <a:srgbClr val="CCCCCC"/>
+                </a:solidFill>
+              </a:rPr>
+              <a:t>A reproducible two-track pipeline producing schema-enforced results across 3 YOLO generations, 3 attack types, 4 defense types, and 22 automated cycles.</a:t>
+            </a:r>
+          </a:p>
+        </p:txBody>
+      </p:sp>
+      <p:sp>
+        <p:nvSpPr>
+          <p:cNvPr id="7" name="Rectangle 6"/>
+          <p:cNvSpPr/>
+          <p:nvPr/>
+        </p:nvSpPr>
+        <p:spPr>
+          <a:xfrm>
+            <a:off x="4480560" y="2148840"/>
+            <a:ext cx="3291840" cy="2240280"/>
+          </a:xfrm>
+          <a:prstGeom prst="rect">
+            <a:avLst/>
+          </a:prstGeom>
+          <a:solidFill>
+            <a:srgbClr val="0D1220"/>
+          </a:solidFill>
+          <a:ln>
+            <a:noFill/>
+          </a:ln>
+        </p:spPr>
+        <p:style>
+          <a:lnRef idx="1">
+            <a:schemeClr val="accent1"/>
+          </a:lnRef>
+          <a:fillRef idx="3">
+            <a:schemeClr val="accent1"/>
+          </a:fillRef>
+          <a:effectRef idx="2">
+            <a:schemeClr val="accent1"/>
+          </a:effectRef>
+          <a:fontRef idx="minor">
+            <a:schemeClr val="lt1"/>
+          </a:fontRef>
+        </p:style>
+        <p:txBody>
+          <a:bodyPr rtlCol="0" anchor="ctr"/>
+          <a:lstStyle/>
+          <a:p>
+            <a:pPr algn="ctr"/>
+          </a:p>
+        </p:txBody>
+      </p:sp>
+      <p:sp>
+        <p:nvSpPr>
+          <p:cNvPr id="8" name="TextBox 7"/>
+          <p:cNvSpPr txBox="1"/>
+          <p:nvPr/>
+        </p:nvSpPr>
+        <p:spPr>
+          <a:xfrm>
+            <a:off x="4663440" y="2313432"/>
+            <a:ext cx="3291840" cy="201168"/>
+          </a:xfrm>
+          <a:prstGeom prst="rect">
+            <a:avLst/>
+          </a:prstGeom>
+          <a:noFill/>
+        </p:spPr>
+        <p:txBody>
+          <a:bodyPr wrap="square">
+            <a:spAutoFit/>
+          </a:bodyPr>
+          <a:lstStyle/>
+          <a:p>
+            <a:pPr algn="l"/>
+            <a:r>
+              <a:rPr sz="900" b="1" i="0">
+                <a:solidFill>
+                  <a:srgbClr val="60B8FF"/>
+                </a:solidFill>
+              </a:rPr>
+              <a:t>ARCHITECTURE MATTERS</a:t>
+            </a:r>
+          </a:p>
+        </p:txBody>
+      </p:sp>
+      <p:sp>
+        <p:nvSpPr>
+          <p:cNvPr id="9" name="TextBox 8"/>
+          <p:cNvSpPr txBox="1"/>
+          <p:nvPr/>
+        </p:nvSpPr>
+        <p:spPr>
+          <a:xfrm>
+            <a:off x="4663440" y="2651760"/>
+            <a:ext cx="3017520" cy="1417320"/>
+          </a:xfrm>
+          <a:prstGeom prst="rect">
+            <a:avLst/>
+          </a:prstGeom>
+          <a:noFill/>
+        </p:spPr>
+        <p:txBody>
+          <a:bodyPr wrap="square">
+            <a:spAutoFit/>
+          </a:bodyPr>
+          <a:lstStyle/>
+          <a:p>
+            <a:pPr algn="l"/>
+            <a:r>
+              <a:rPr sz="1300" b="0" i="0">
+                <a:solidFill>
+                  <a:srgbClr val="CCCCCC"/>
+                </a:solidFill>
+              </a:rPr>
+              <a:t>YOLO26n's end-to-end matching breaks the usual assumption that optimizing the attack objective will directly reduce detections.</a:t>
+            </a:r>
+          </a:p>
+        </p:txBody>
+      </p:sp>
+      <p:sp>
+        <p:nvSpPr>
+          <p:cNvPr id="10" name="Rectangle 9"/>
+          <p:cNvSpPr/>
+          <p:nvPr/>
+        </p:nvSpPr>
+        <p:spPr>
+          <a:xfrm>
+            <a:off x="8138160" y="2148840"/>
+            <a:ext cx="3291840" cy="2240280"/>
+          </a:xfrm>
+          <a:prstGeom prst="rect">
+            <a:avLst/>
+          </a:prstGeom>
+          <a:solidFill>
+            <a:srgbClr val="1A180D"/>
+          </a:solidFill>
+          <a:ln>
+            <a:noFill/>
+          </a:ln>
+        </p:spPr>
+        <p:style>
+          <a:lnRef idx="1">
+            <a:schemeClr val="accent1"/>
+          </a:lnRef>
+          <a:fillRef idx="3">
+            <a:schemeClr val="accent1"/>
+          </a:fillRef>
+          <a:effectRef idx="2">
+            <a:schemeClr val="accent1"/>
+          </a:effectRef>
+          <a:fontRef idx="minor">
+            <a:schemeClr val="lt1"/>
+          </a:fontRef>
+        </p:style>
+        <p:txBody>
+          <a:bodyPr rtlCol="0" anchor="ctr"/>
+          <a:lstStyle/>
+          <a:p>
+            <a:pPr algn="ctr"/>
+          </a:p>
+        </p:txBody>
+      </p:sp>
+      <p:sp>
+        <p:nvSpPr>
+          <p:cNvPr id="11" name="TextBox 10"/>
+          <p:cNvSpPr txBox="1"/>
+          <p:nvPr/>
+        </p:nvSpPr>
+        <p:spPr>
+          <a:xfrm>
+            <a:off x="8321040" y="2313432"/>
+            <a:ext cx="3291840" cy="201168"/>
+          </a:xfrm>
+          <a:prstGeom prst="rect">
+            <a:avLst/>
+          </a:prstGeom>
+          <a:noFill/>
+        </p:spPr>
+        <p:txBody>
+          <a:bodyPr wrap="square">
+            <a:spAutoFit/>
+          </a:bodyPr>
+          <a:lstStyle/>
+          <a:p>
+            <a:pPr algn="l"/>
+            <a:r>
+              <a:rPr sz="900" b="1" i="0">
+                <a:solidFill>
+                  <a:srgbClr val="60B8FF"/>
+                </a:solidFill>
+              </a:rPr>
+              <a:t>OPEN QUESTIONS</a:t>
+            </a:r>
+          </a:p>
+        </p:txBody>
+      </p:sp>
+      <p:sp>
+        <p:nvSpPr>
+          <p:cNvPr id="12" name="TextBox 11"/>
+          <p:cNvSpPr txBox="1"/>
+          <p:nvPr/>
+        </p:nvSpPr>
+        <p:spPr>
+          <a:xfrm>
+            <a:off x="8321040" y="2651760"/>
+            <a:ext cx="3017520" cy="1417320"/>
+          </a:xfrm>
+          <a:prstGeom prst="rect">
+            <a:avLst/>
+          </a:prstGeom>
+          <a:noFill/>
+        </p:spPr>
+        <p:txBody>
+          <a:bodyPr wrap="square">
+            <a:spAutoFit/>
+          </a:bodyPr>
+          <a:lstStyle/>
+          <a:p>
+            <a:pPr algn="l"/>
+            <a:r>
+              <a:rPr sz="1300" b="0" i="0">
+                <a:solidFill>
+                  <a:srgbClr val="CCCCCC"/>
+                </a:solidFill>
+              </a:rPr>
+              <a:t>Does the NMS-free shift require a new attack class, or can DETR-style matching-aware attacks port into YOLO26n? Physical robustness at scale remains open.</a:t>
+            </a:r>
+          </a:p>
+        </p:txBody>
+      </p:sp>
+      <p:sp>
+        <p:nvSpPr>
+          <p:cNvPr id="13" name="Rectangle 12"/>
+          <p:cNvSpPr/>
+          <p:nvPr/>
+        </p:nvSpPr>
+        <p:spPr>
+          <a:xfrm>
+            <a:off x="822960" y="5166360"/>
+            <a:ext cx="10515600" cy="18288"/>
+          </a:xfrm>
+          <a:prstGeom prst="rect">
+            <a:avLst/>
+          </a:prstGeom>
+          <a:solidFill>
+            <a:srgbClr val="1E1E28"/>
+          </a:solidFill>
+          <a:ln>
+            <a:noFill/>
+          </a:ln>
+        </p:spPr>
+        <p:style>
+          <a:lnRef idx="1">
+            <a:schemeClr val="accent1"/>
+          </a:lnRef>
+          <a:fillRef idx="3">
+            <a:schemeClr val="accent1"/>
+          </a:fillRef>
+          <a:effectRef idx="2">
+            <a:schemeClr val="accent1"/>
+          </a:effectRef>
+          <a:fontRef idx="minor">
+            <a:schemeClr val="lt1"/>
+          </a:fontRef>
+        </p:style>
+        <p:txBody>
+          <a:bodyPr rtlCol="0" anchor="ctr"/>
+          <a:lstStyle/>
+          <a:p>
+            <a:pPr algn="ctr"/>
+          </a:p>
+        </p:txBody>
+      </p:sp>
+      <p:sp>
+        <p:nvSpPr>
+          <p:cNvPr id="14" name="TextBox 13"/>
+          <p:cNvSpPr txBox="1"/>
+          <p:nvPr/>
+        </p:nvSpPr>
+        <p:spPr>
+          <a:xfrm>
+            <a:off x="822960" y="5440680"/>
+            <a:ext cx="10515600" cy="365760"/>
+          </a:xfrm>
+          <a:prstGeom prst="rect">
+            <a:avLst/>
+          </a:prstGeom>
+          <a:noFill/>
+        </p:spPr>
+        <p:txBody>
+          <a:bodyPr wrap="square">
+            <a:spAutoFit/>
+          </a:bodyPr>
+          <a:lstStyle/>
+          <a:p>
+            <a:pPr algn="l"/>
+            <a:r>
+              <a:rPr sz="1200" b="0" i="0">
+                <a:solidFill>
+                  <a:srgbClr val="60B8FF"/>
+                </a:solidFill>
+              </a:rPr>
+              <a:t>Training script | Colab notebook | Live demo | All results -&gt; github.com/Cmaddock99/Patch_Yolo</a:t>
             </a:r>
           </a:p>
         </p:txBody>
@@ -3287,8 +3844,8 @@
         </p:nvSpPr>
         <p:spPr>
           <a:xfrm>
-            <a:off x="822960" y="365760"/>
-            <a:ext cx="3657600" cy="320040"/>
+            <a:off x="822960" y="411480"/>
+            <a:ext cx="3657600" cy="256032"/>
           </a:xfrm>
           <a:prstGeom prst="rect">
             <a:avLst/>
@@ -3308,7 +3865,7 @@
                   <a:srgbClr val="60B8FF"/>
                 </a:solidFill>
               </a:rPr>
-              <a:t>BACKGROUND</a:t>
+              <a:t>FRAMEWORK OVERVIEW</a:t>
             </a:r>
           </a:p>
         </p:txBody>
@@ -3322,192 +3879,52 @@
         <p:spPr>
           <a:xfrm>
             <a:off x="822960" y="777240"/>
-            <a:ext cx="10058400" cy="1463040"/>
-          </a:xfrm>
-          <a:prstGeom prst="rect">
-            <a:avLst/>
-          </a:prstGeom>
-          <a:noFill/>
-        </p:spPr>
-        <p:txBody>
-          <a:bodyPr wrap="square">
-            <a:spAutoFit/>
-          </a:bodyPr>
-          <a:lstStyle/>
-          <a:p>
-            <a:pPr algn="l"/>
-            <a:r>
-              <a:rPr sz="3600" b="1">
+            <a:ext cx="10241280" cy="1463040"/>
+          </a:xfrm>
+          <a:prstGeom prst="rect">
+            <a:avLst/>
+          </a:prstGeom>
+          <a:noFill/>
+        </p:spPr>
+        <p:txBody>
+          <a:bodyPr wrap="square">
+            <a:spAutoFit/>
+          </a:bodyPr>
+          <a:lstStyle/>
+          <a:p>
+            <a:pPr algn="l"/>
+            <a:r>
+              <a:rPr sz="3800" b="1" i="0">
                 <a:solidFill>
                   <a:srgbClr val="E8E8F0"/>
                 </a:solidFill>
               </a:rPr>
-              <a:t>What Is an</a:t>
-            </a:r>
-          </a:p>
-          <a:p>
-            <a:pPr algn="l">
-              <a:spcBef>
-                <a:spcPts val="200"/>
-              </a:spcBef>
-            </a:pPr>
-            <a:r>
-              <a:rPr sz="3600" b="1">
+              <a:t>Two-Track</a:t>
+            </a:r>
+          </a:p>
+          <a:p>
+            <a:pPr algn="l"/>
+            <a:r>
+              <a:rPr sz="3800" b="1" i="0">
                 <a:solidFill>
                   <a:srgbClr val="60B8FF"/>
                 </a:solidFill>
               </a:rPr>
-              <a:t>Adversarial Patch?</a:t>
-            </a:r>
-          </a:p>
-        </p:txBody>
-      </p:sp>
-      <p:sp>
-        <p:nvSpPr>
-          <p:cNvPr id="4" name="TextBox 3"/>
-          <p:cNvSpPr txBox="1"/>
-          <p:nvPr/>
-        </p:nvSpPr>
-        <p:spPr>
-          <a:xfrm>
-            <a:off x="822960" y="2194560"/>
-            <a:ext cx="5029200" cy="274320"/>
-          </a:xfrm>
-          <a:prstGeom prst="rect">
-            <a:avLst/>
-          </a:prstGeom>
-          <a:noFill/>
-        </p:spPr>
-        <p:txBody>
-          <a:bodyPr wrap="square">
-            <a:spAutoFit/>
-          </a:bodyPr>
-          <a:lstStyle/>
-          <a:p>
-            <a:pPr algn="l"/>
-            <a:r>
-              <a:rPr sz="900" b="1" i="0">
-                <a:solidFill>
-                  <a:srgbClr val="60B8FF"/>
-                </a:solidFill>
-              </a:rPr>
-              <a:t>THE IDEA</a:t>
-            </a:r>
-          </a:p>
-        </p:txBody>
-      </p:sp>
-      <p:sp>
-        <p:nvSpPr>
-          <p:cNvPr id="5" name="TextBox 4"/>
-          <p:cNvSpPr txBox="1"/>
-          <p:nvPr/>
-        </p:nvSpPr>
-        <p:spPr>
-          <a:xfrm>
-            <a:off x="822960" y="2514600"/>
-            <a:ext cx="5029200" cy="914400"/>
-          </a:xfrm>
-          <a:prstGeom prst="rect">
-            <a:avLst/>
-          </a:prstGeom>
-          <a:noFill/>
-        </p:spPr>
-        <p:txBody>
-          <a:bodyPr wrap="square">
-            <a:spAutoFit/>
-          </a:bodyPr>
-          <a:lstStyle/>
-          <a:p>
-            <a:pPr algn="l"/>
-            <a:r>
-              <a:rPr sz="1300" b="0" i="0">
-                <a:solidFill>
-                  <a:srgbClr val="CCCCCC"/>
-                </a:solidFill>
-              </a:rPr>
-              <a:t>A small image region, optimized through gradient descent, that causes a neural network to stop detecting objects — even when the object is fully visible.</a:t>
-            </a:r>
-          </a:p>
-        </p:txBody>
-      </p:sp>
-      <p:sp>
-        <p:nvSpPr>
-          <p:cNvPr id="6" name="TextBox 5"/>
-          <p:cNvSpPr txBox="1"/>
-          <p:nvPr/>
-        </p:nvSpPr>
-        <p:spPr>
-          <a:xfrm>
-            <a:off x="822960" y="3520440"/>
-            <a:ext cx="5029200" cy="274320"/>
-          </a:xfrm>
-          <a:prstGeom prst="rect">
-            <a:avLst/>
-          </a:prstGeom>
-          <a:noFill/>
-        </p:spPr>
-        <p:txBody>
-          <a:bodyPr wrap="square">
-            <a:spAutoFit/>
-          </a:bodyPr>
-          <a:lstStyle/>
-          <a:p>
-            <a:pPr algn="l"/>
-            <a:r>
-              <a:rPr sz="900" b="1" i="0">
-                <a:solidFill>
-                  <a:srgbClr val="60B8FF"/>
-                </a:solidFill>
-              </a:rPr>
-              <a:t>HOW IT'S DIFFERENT FROM OCCLUSION</a:t>
-            </a:r>
-          </a:p>
-        </p:txBody>
-      </p:sp>
-      <p:sp>
-        <p:nvSpPr>
-          <p:cNvPr id="7" name="TextBox 6"/>
-          <p:cNvSpPr txBox="1"/>
-          <p:nvPr/>
-        </p:nvSpPr>
-        <p:spPr>
-          <a:xfrm>
-            <a:off x="822960" y="3840480"/>
-            <a:ext cx="5029200" cy="1005840"/>
-          </a:xfrm>
-          <a:prstGeom prst="rect">
-            <a:avLst/>
-          </a:prstGeom>
-          <a:noFill/>
-        </p:spPr>
-        <p:txBody>
-          <a:bodyPr wrap="square">
-            <a:spAutoFit/>
-          </a:bodyPr>
-          <a:lstStyle/>
-          <a:p>
-            <a:pPr algn="l"/>
-            <a:r>
-              <a:rPr sz="1300" b="0" i="0">
-                <a:solidFill>
-                  <a:srgbClr val="CCCCCC"/>
-                </a:solidFill>
-              </a:rPr>
-              <a:t>Covering a face with any object reduces features. An adversarial patch exploits the model's internal representations — creating activation patterns the detector interprets as 'no person.'</a:t>
-            </a:r>
-          </a:p>
-        </p:txBody>
-      </p:sp>
-      <p:sp>
-        <p:nvSpPr>
-          <p:cNvPr id="8" name="Rectangle 7"/>
+              <a:t>Pipeline</a:t>
+            </a:r>
+          </a:p>
+        </p:txBody>
+      </p:sp>
+      <p:sp>
+        <p:nvSpPr>
+          <p:cNvPr id="4" name="Rectangle 3"/>
           <p:cNvSpPr/>
           <p:nvPr/>
         </p:nvSpPr>
         <p:spPr>
           <a:xfrm>
-            <a:off x="6217920" y="2194560"/>
-            <a:ext cx="5029200" cy="1691640"/>
+            <a:off x="822960" y="1828800"/>
+            <a:ext cx="5212080" cy="2834640"/>
           </a:xfrm>
           <a:prstGeom prst="rect">
             <a:avLst/>
@@ -3543,14 +3960,14 @@
       </p:sp>
       <p:sp>
         <p:nvSpPr>
-          <p:cNvPr id="9" name="TextBox 8"/>
-          <p:cNvSpPr txBox="1"/>
-          <p:nvPr/>
-        </p:nvSpPr>
-        <p:spPr>
-          <a:xfrm>
-            <a:off x="6400800" y="2331720"/>
-            <a:ext cx="4663440" cy="274320"/>
+          <p:cNvPr id="5" name="TextBox 4"/>
+          <p:cNvSpPr txBox="1"/>
+          <p:nvPr/>
+        </p:nvSpPr>
+        <p:spPr>
+          <a:xfrm>
+            <a:off x="1005840" y="1975104"/>
+            <a:ext cx="5212080" cy="201168"/>
           </a:xfrm>
           <a:prstGeom prst="rect">
             <a:avLst/>
@@ -3570,105 +3987,27 @@
                   <a:srgbClr val="60B8FF"/>
                 </a:solidFill>
               </a:rPr>
-              <a:t>TRAINING LOOP</a:t>
-            </a:r>
-          </a:p>
-        </p:txBody>
-      </p:sp>
-      <p:sp>
-        <p:nvSpPr>
-          <p:cNvPr id="10" name="TextBox 9"/>
-          <p:cNvSpPr txBox="1"/>
-          <p:nvPr/>
-        </p:nvSpPr>
-        <p:spPr>
-          <a:xfrm>
-            <a:off x="6400800" y="2651760"/>
-            <a:ext cx="4754880" cy="1097280"/>
-          </a:xfrm>
-          <a:prstGeom prst="rect">
-            <a:avLst/>
-          </a:prstGeom>
-          <a:noFill/>
-        </p:spPr>
-        <p:txBody>
-          <a:bodyPr wrap="square">
-            <a:spAutoFit/>
-          </a:bodyPr>
-          <a:lstStyle/>
-          <a:p>
-            <a:pPr algn="l"/>
-            <a:r>
-              <a:rPr sz="1200" b="0">
-                <a:solidFill>
-                  <a:srgbClr val="CCCCCC"/>
-                </a:solidFill>
-              </a:rPr>
-              <a:t>• Freeze model weights</a:t>
-            </a:r>
-          </a:p>
-          <a:p>
-            <a:pPr algn="l"/>
-            <a:r>
-              <a:rPr sz="1200" b="0">
-                <a:solidFill>
-                  <a:srgbClr val="CCCCCC"/>
-                </a:solidFill>
-              </a:rPr>
-              <a:t>• Overlay patch on person's torso</a:t>
-            </a:r>
-          </a:p>
-          <a:p>
-            <a:pPr algn="l"/>
-            <a:r>
-              <a:rPr sz="1200" b="0">
-                <a:solidFill>
-                  <a:srgbClr val="CCCCCC"/>
-                </a:solidFill>
-              </a:rPr>
-              <a:t>• Forward pass → detection confidence</a:t>
-            </a:r>
-          </a:p>
-          <a:p>
-            <a:pPr algn="l"/>
-            <a:r>
-              <a:rPr sz="1200" b="0">
-                <a:solidFill>
-                  <a:srgbClr val="3EFFA0"/>
-                </a:solidFill>
-              </a:rPr>
-              <a:t>• Backpropagate to patch pixels only</a:t>
-            </a:r>
-          </a:p>
-          <a:p>
-            <a:pPr algn="l"/>
-            <a:r>
-              <a:rPr sz="1200" b="0">
-                <a:solidFill>
-                  <a:srgbClr val="CCCCCC"/>
-                </a:solidFill>
-              </a:rPr>
-              <a:t>• Repeat until detections suppress</a:t>
-            </a:r>
-          </a:p>
-        </p:txBody>
-      </p:sp>
-      <p:sp>
-        <p:nvSpPr>
-          <p:cNvPr id="11" name="Rectangle 10"/>
+              <a:t>ATTACK TRACK    Adversarial_Patch</a:t>
+            </a:r>
+          </a:p>
+        </p:txBody>
+      </p:sp>
+      <p:sp>
+        <p:nvSpPr>
+          <p:cNvPr id="6" name="Rectangle 5"/>
           <p:cNvSpPr/>
           <p:nvPr/>
         </p:nvSpPr>
         <p:spPr>
           <a:xfrm>
-            <a:off x="6217920" y="4023360"/>
-            <a:ext cx="5029200" cy="1463040"/>
+            <a:off x="1005840" y="2267712"/>
+            <a:ext cx="4846320" cy="18288"/>
           </a:xfrm>
           <a:prstGeom prst="rect">
             <a:avLst/>
           </a:prstGeom>
           <a:solidFill>
-            <a:srgbClr val="12121A"/>
+            <a:srgbClr val="1E1E28"/>
           </a:solidFill>
           <a:ln>
             <a:noFill/>
@@ -3698,101 +4037,310 @@
       </p:sp>
       <p:sp>
         <p:nvSpPr>
+          <p:cNvPr id="7" name="TextBox 6"/>
+          <p:cNvSpPr txBox="1"/>
+          <p:nvPr/>
+        </p:nvSpPr>
+        <p:spPr>
+          <a:xfrm>
+            <a:off x="1005840" y="2395728"/>
+            <a:ext cx="4892040" cy="2103120"/>
+          </a:xfrm>
+          <a:prstGeom prst="rect">
+            <a:avLst/>
+          </a:prstGeom>
+          <a:noFill/>
+        </p:spPr>
+        <p:txBody>
+          <a:bodyPr wrap="square">
+            <a:spAutoFit/>
+          </a:bodyPr>
+          <a:lstStyle/>
+          <a:p>
+            <a:pPr algn="l"/>
+            <a:r>
+              <a:rPr sz="1200" b="0" i="0">
+                <a:solidFill>
+                  <a:srgbClr val="CCCCCC"/>
+                </a:solidFill>
+              </a:rPr>
+              <a:t>- Gradient-based patch training against any Ultralytics YOLO model</a:t>
+            </a:r>
+          </a:p>
+          <a:p>
+            <a:pPr algn="l"/>
+            <a:r>
+              <a:rPr sz="1200" b="0" i="0">
+                <a:solidFill>
+                  <a:srgbClr val="CCCCCC"/>
+                </a:solidFill>
+              </a:rPr>
+              <a:t>- Multi-model and joint ensemble attack modes</a:t>
+            </a:r>
+          </a:p>
+          <a:p>
+            <a:pPr algn="l"/>
+            <a:r>
+              <a:rPr sz="1200" b="0" i="0">
+                <a:solidFill>
+                  <a:srgbClr val="CCCCCC"/>
+                </a:solidFill>
+              </a:rPr>
+              <a:t>- Cross-architecture transfer evaluation</a:t>
+            </a:r>
+          </a:p>
+          <a:p>
+            <a:pPr algn="l"/>
+            <a:r>
+              <a:rPr sz="1200" b="0" i="0">
+                <a:solidFill>
+                  <a:srgbClr val="CCCCCC"/>
+                </a:solidFill>
+              </a:rPr>
+              <a:t>- Defense robustness benchmarking (JPEG, blur, crop-resize)</a:t>
+            </a:r>
+          </a:p>
+          <a:p>
+            <a:pPr algn="l"/>
+            <a:r>
+              <a:rPr sz="1200" b="0" i="0">
+                <a:solidFill>
+                  <a:srgbClr val="CCCCCC"/>
+                </a:solidFill>
+              </a:rPr>
+              <a:t>- Live demo plus 300 DPI physical print export</a:t>
+            </a:r>
+          </a:p>
+        </p:txBody>
+      </p:sp>
+      <p:sp>
+        <p:nvSpPr>
+          <p:cNvPr id="8" name="Rectangle 7"/>
+          <p:cNvSpPr/>
+          <p:nvPr/>
+        </p:nvSpPr>
+        <p:spPr>
+          <a:xfrm>
+            <a:off x="6446520" y="1828800"/>
+            <a:ext cx="5212080" cy="2834640"/>
+          </a:xfrm>
+          <a:prstGeom prst="rect">
+            <a:avLst/>
+          </a:prstGeom>
+          <a:solidFill>
+            <a:srgbClr val="0D1A12"/>
+          </a:solidFill>
+          <a:ln>
+            <a:noFill/>
+          </a:ln>
+        </p:spPr>
+        <p:style>
+          <a:lnRef idx="1">
+            <a:schemeClr val="accent1"/>
+          </a:lnRef>
+          <a:fillRef idx="3">
+            <a:schemeClr val="accent1"/>
+          </a:fillRef>
+          <a:effectRef idx="2">
+            <a:schemeClr val="accent1"/>
+          </a:effectRef>
+          <a:fontRef idx="minor">
+            <a:schemeClr val="lt1"/>
+          </a:fontRef>
+        </p:style>
+        <p:txBody>
+          <a:bodyPr rtlCol="0" anchor="ctr"/>
+          <a:lstStyle/>
+          <a:p>
+            <a:pPr algn="ctr"/>
+          </a:p>
+        </p:txBody>
+      </p:sp>
+      <p:sp>
+        <p:nvSpPr>
+          <p:cNvPr id="9" name="TextBox 8"/>
+          <p:cNvSpPr txBox="1"/>
+          <p:nvPr/>
+        </p:nvSpPr>
+        <p:spPr>
+          <a:xfrm>
+            <a:off x="6629400" y="1975104"/>
+            <a:ext cx="5212080" cy="201168"/>
+          </a:xfrm>
+          <a:prstGeom prst="rect">
+            <a:avLst/>
+          </a:prstGeom>
+          <a:noFill/>
+        </p:spPr>
+        <p:txBody>
+          <a:bodyPr wrap="square">
+            <a:spAutoFit/>
+          </a:bodyPr>
+          <a:lstStyle/>
+          <a:p>
+            <a:pPr algn="l"/>
+            <a:r>
+              <a:rPr sz="900" b="1" i="0">
+                <a:solidFill>
+                  <a:srgbClr val="60B8FF"/>
+                </a:solidFill>
+              </a:rPr>
+              <a:t>DEFENSE TRACK    YOLO-Bad-Triangle</a:t>
+            </a:r>
+          </a:p>
+        </p:txBody>
+      </p:sp>
+      <p:sp>
+        <p:nvSpPr>
+          <p:cNvPr id="10" name="Rectangle 9"/>
+          <p:cNvSpPr/>
+          <p:nvPr/>
+        </p:nvSpPr>
+        <p:spPr>
+          <a:xfrm>
+            <a:off x="6629400" y="2267712"/>
+            <a:ext cx="4846320" cy="18288"/>
+          </a:xfrm>
+          <a:prstGeom prst="rect">
+            <a:avLst/>
+          </a:prstGeom>
+          <a:solidFill>
+            <a:srgbClr val="1E1E28"/>
+          </a:solidFill>
+          <a:ln>
+            <a:noFill/>
+          </a:ln>
+        </p:spPr>
+        <p:style>
+          <a:lnRef idx="1">
+            <a:schemeClr val="accent1"/>
+          </a:lnRef>
+          <a:fillRef idx="3">
+            <a:schemeClr val="accent1"/>
+          </a:fillRef>
+          <a:effectRef idx="2">
+            <a:schemeClr val="accent1"/>
+          </a:effectRef>
+          <a:fontRef idx="minor">
+            <a:schemeClr val="lt1"/>
+          </a:fontRef>
+        </p:style>
+        <p:txBody>
+          <a:bodyPr rtlCol="0" anchor="ctr"/>
+          <a:lstStyle/>
+          <a:p>
+            <a:pPr algn="ctr"/>
+          </a:p>
+        </p:txBody>
+      </p:sp>
+      <p:sp>
+        <p:nvSpPr>
+          <p:cNvPr id="11" name="TextBox 10"/>
+          <p:cNvSpPr txBox="1"/>
+          <p:nvPr/>
+        </p:nvSpPr>
+        <p:spPr>
+          <a:xfrm>
+            <a:off x="6629400" y="2395728"/>
+            <a:ext cx="4892040" cy="2103120"/>
+          </a:xfrm>
+          <a:prstGeom prst="rect">
+            <a:avLst/>
+          </a:prstGeom>
+          <a:noFill/>
+        </p:spPr>
+        <p:txBody>
+          <a:bodyPr wrap="square">
+            <a:spAutoFit/>
+          </a:bodyPr>
+          <a:lstStyle/>
+          <a:p>
+            <a:pPr algn="l"/>
+            <a:r>
+              <a:rPr sz="1200" b="0" i="0">
+                <a:solidFill>
+                  <a:srgbClr val="CCCCCC"/>
+                </a:solidFill>
+              </a:rPr>
+              <a:t>- Plugin-based attack and defense registry</a:t>
+            </a:r>
+          </a:p>
+          <a:p>
+            <a:pPr algn="l"/>
+            <a:r>
+              <a:rPr sz="1200" b="0" i="0">
+                <a:solidFill>
+                  <a:srgbClr val="CCCCCC"/>
+                </a:solidFill>
+              </a:rPr>
+              <a:t>- 22 automated hyperparameter-optimization cycles</a:t>
+            </a:r>
+          </a:p>
+          <a:p>
+            <a:pPr algn="l"/>
+            <a:r>
+              <a:rPr sz="1200" b="0" i="0">
+                <a:solidFill>
+                  <a:srgbClr val="CCCCCC"/>
+                </a:solidFill>
+              </a:rPr>
+              <a:t>- Adversarial finetuning with a clean A/B deployment gate</a:t>
+            </a:r>
+          </a:p>
+          <a:p>
+            <a:pPr algn="l"/>
+            <a:r>
+              <a:rPr sz="1200" b="0" i="0">
+                <a:solidFill>
+                  <a:srgbClr val="CCCCCC"/>
+                </a:solidFill>
+              </a:rPr>
+              <a:t>- Schema-enforced artifact contracts and provenance tracking</a:t>
+            </a:r>
+          </a:p>
+          <a:p>
+            <a:pPr algn="l"/>
+            <a:r>
+              <a:rPr sz="1200" b="0" i="0">
+                <a:solidFill>
+                  <a:srgbClr val="CCCCCC"/>
+                </a:solidFill>
+              </a:rPr>
+              <a:t>- Automated reporting pipeline</a:t>
+            </a:r>
+          </a:p>
+        </p:txBody>
+      </p:sp>
+      <p:sp>
+        <p:nvSpPr>
           <p:cNvPr id="12" name="TextBox 11"/>
           <p:cNvSpPr txBox="1"/>
           <p:nvPr/>
         </p:nvSpPr>
         <p:spPr>
           <a:xfrm>
-            <a:off x="6400800" y="4160520"/>
-            <a:ext cx="5029200" cy="274320"/>
-          </a:xfrm>
-          <a:prstGeom prst="rect">
-            <a:avLst/>
-          </a:prstGeom>
-          <a:noFill/>
-        </p:spPr>
-        <p:txBody>
-          <a:bodyPr wrap="square">
-            <a:spAutoFit/>
-          </a:bodyPr>
-          <a:lstStyle/>
-          <a:p>
-            <a:pPr algn="l"/>
-            <a:r>
-              <a:rPr sz="900" b="1" i="0">
-                <a:solidFill>
-                  <a:srgbClr val="60B8FF"/>
-                </a:solidFill>
-              </a:rPr>
-              <a:t>ROBUSTNESS AUGMENTATIONS</a:t>
-            </a:r>
-          </a:p>
-        </p:txBody>
-      </p:sp>
-      <p:sp>
-        <p:nvSpPr>
-          <p:cNvPr id="13" name="TextBox 12"/>
-          <p:cNvSpPr txBox="1"/>
-          <p:nvPr/>
-        </p:nvSpPr>
-        <p:spPr>
-          <a:xfrm>
-            <a:off x="6400800" y="4480560"/>
-            <a:ext cx="4754880" cy="914400"/>
-          </a:xfrm>
-          <a:prstGeom prst="rect">
-            <a:avLst/>
-          </a:prstGeom>
-          <a:noFill/>
-        </p:spPr>
-        <p:txBody>
-          <a:bodyPr wrap="square">
-            <a:spAutoFit/>
-          </a:bodyPr>
-          <a:lstStyle/>
-          <a:p>
-            <a:pPr algn="l"/>
-            <a:r>
-              <a:rPr sz="1200" b="0">
-                <a:solidFill>
-                  <a:srgbClr val="CCCCCC"/>
-                </a:solidFill>
-              </a:rPr>
-              <a:t>• Random rotation ±15°</a:t>
-            </a:r>
-          </a:p>
-          <a:p>
-            <a:pPr algn="l"/>
-            <a:r>
-              <a:rPr sz="1200" b="0">
-                <a:solidFill>
-                  <a:srgbClr val="CCCCCC"/>
-                </a:solidFill>
-              </a:rPr>
-              <a:t>• Cutout masking (T-SEA)</a:t>
-            </a:r>
-          </a:p>
-          <a:p>
-            <a:pPr algn="l"/>
-            <a:r>
-              <a:rPr sz="1200" b="0">
-                <a:solidFill>
-                  <a:srgbClr val="CCCCCC"/>
-                </a:solidFill>
-              </a:rPr>
-              <a:t>• Block erasing (DePatch)</a:t>
-            </a:r>
-          </a:p>
-          <a:p>
-            <a:pPr algn="l"/>
-            <a:r>
-              <a:rPr sz="1200" b="0">
-                <a:solidFill>
-                  <a:srgbClr val="CCCCCC"/>
-                </a:solidFill>
-              </a:rPr>
-              <a:t>• Non-Printability Score loss</a:t>
+            <a:off x="822960" y="4983480"/>
+            <a:ext cx="10424160" cy="548640"/>
+          </a:xfrm>
+          <a:prstGeom prst="rect">
+            <a:avLst/>
+          </a:prstGeom>
+          <a:noFill/>
+        </p:spPr>
+        <p:txBody>
+          <a:bodyPr wrap="square">
+            <a:spAutoFit/>
+          </a:bodyPr>
+          <a:lstStyle/>
+          <a:p>
+            <a:pPr algn="l"/>
+            <a:r>
+              <a:rPr sz="1300" b="0" i="0">
+                <a:solidFill>
+                  <a:srgbClr val="888888"/>
+                </a:solidFill>
+              </a:rPr>
+              <a:t>Both tracks share a common image set and produce structured artifacts. Findings from each cycle inform the next.</a:t>
             </a:r>
           </a:p>
         </p:txBody>
@@ -3831,8 +4379,8 @@
         </p:nvSpPr>
         <p:spPr>
           <a:xfrm>
-            <a:off x="822960" y="365760"/>
-            <a:ext cx="3657600" cy="320040"/>
+            <a:off x="822960" y="411480"/>
+            <a:ext cx="3657600" cy="256032"/>
           </a:xfrm>
           <a:prstGeom prst="rect">
             <a:avLst/>
@@ -3852,7 +4400,7 @@
                   <a:srgbClr val="60B8FF"/>
                 </a:solidFill>
               </a:rPr>
-              <a:t>RESULTS</a:t>
+              <a:t>ATTACK TRACK - FINDINGS</a:t>
             </a:r>
           </a:p>
         </p:txBody>
@@ -3866,22 +4414,22 @@
         <p:spPr>
           <a:xfrm>
             <a:off x="822960" y="777240"/>
-            <a:ext cx="10058400" cy="1463040"/>
-          </a:xfrm>
-          <a:prstGeom prst="rect">
-            <a:avLst/>
-          </a:prstGeom>
-          <a:noFill/>
-        </p:spPr>
-        <p:txBody>
-          <a:bodyPr wrap="square">
-            <a:spAutoFit/>
-          </a:bodyPr>
-          <a:lstStyle/>
-          <a:p>
-            <a:pPr algn="l"/>
-            <a:r>
-              <a:rPr sz="3800" b="1">
+            <a:ext cx="10241280" cy="1463040"/>
+          </a:xfrm>
+          <a:prstGeom prst="rect">
+            <a:avLst/>
+          </a:prstGeom>
+          <a:noFill/>
+        </p:spPr>
+        <p:txBody>
+          <a:bodyPr wrap="square">
+            <a:spAutoFit/>
+          </a:bodyPr>
+          <a:lstStyle/>
+          <a:p>
+            <a:pPr algn="l"/>
+            <a:r>
+              <a:rPr sz="3800" b="1" i="0">
                 <a:solidFill>
                   <a:srgbClr val="E8E8F0"/>
                 </a:solidFill>
@@ -3890,13 +4438,9 @@
             </a:r>
           </a:p>
           <a:p>
-            <a:pPr algn="l">
-              <a:spcBef>
-                <a:spcPts val="200"/>
-              </a:spcBef>
-            </a:pPr>
-            <a:r>
-              <a:rPr sz="3800" b="1">
+            <a:pPr algn="l"/>
+            <a:r>
+              <a:rPr sz="3800" b="1" i="0">
                 <a:solidFill>
                   <a:srgbClr val="3EFFA0"/>
                 </a:solidFill>
@@ -3914,7 +4458,7 @@
         </p:nvSpPr>
         <p:spPr>
           <a:xfrm>
-            <a:off x="822960" y="2286000"/>
+            <a:off x="822960" y="2057400"/>
             <a:ext cx="3291840" cy="2926080"/>
           </a:xfrm>
           <a:prstGeom prst="rect">
@@ -3957,7 +4501,7 @@
         </p:nvSpPr>
         <p:spPr>
           <a:xfrm>
-            <a:off x="822960" y="2560320"/>
+            <a:off x="822960" y="2313432"/>
             <a:ext cx="3291840" cy="822960"/>
           </a:xfrm>
           <a:prstGeom prst="rect">
@@ -3991,8 +4535,8 @@
         </p:nvSpPr>
         <p:spPr>
           <a:xfrm>
-            <a:off x="822960" y="3429000"/>
-            <a:ext cx="3291840" cy="365760"/>
+            <a:off x="822960" y="3172968"/>
+            <a:ext cx="3291840" cy="320040"/>
           </a:xfrm>
           <a:prstGeom prst="rect">
             <a:avLst/>
@@ -4025,8 +4569,8 @@
         </p:nvSpPr>
         <p:spPr>
           <a:xfrm>
-            <a:off x="822960" y="3794760"/>
-            <a:ext cx="3291840" cy="320040"/>
+            <a:off x="822960" y="3538728"/>
+            <a:ext cx="3291840" cy="256032"/>
           </a:xfrm>
           <a:prstGeom prst="rect">
             <a:avLst/>
@@ -4046,7 +4590,7 @@
                   <a:srgbClr val="888888"/>
                 </a:solidFill>
               </a:rPr>
-              <a:t>20 → 2 detections</a:t>
+              <a:t>20 -&gt; 2 detections</a:t>
             </a:r>
           </a:p>
         </p:txBody>
@@ -4059,8 +4603,8 @@
         </p:nvSpPr>
         <p:spPr>
           <a:xfrm>
-            <a:off x="822960" y="4160519"/>
-            <a:ext cx="3291840" cy="274320"/>
+            <a:off x="822960" y="3904488"/>
+            <a:ext cx="3291840" cy="228600"/>
           </a:xfrm>
           <a:prstGeom prst="rect">
             <a:avLst/>
@@ -4080,7 +4624,7 @@
                   <a:srgbClr val="888888"/>
                 </a:solidFill>
               </a:rPr>
-              <a:t>1000 epochs · loss 0.543</a:t>
+              <a:t>1000 epochs - loss 0.543</a:t>
             </a:r>
           </a:p>
         </p:txBody>
@@ -4093,7 +4637,7 @@
         </p:nvSpPr>
         <p:spPr>
           <a:xfrm>
-            <a:off x="4480560" y="2286000"/>
+            <a:off x="4480560" y="2057400"/>
             <a:ext cx="3291840" cy="2926080"/>
           </a:xfrm>
           <a:prstGeom prst="rect">
@@ -4136,7 +4680,7 @@
         </p:nvSpPr>
         <p:spPr>
           <a:xfrm>
-            <a:off x="4480560" y="2560320"/>
+            <a:off x="4480560" y="2313432"/>
             <a:ext cx="3291840" cy="822960"/>
           </a:xfrm>
           <a:prstGeom prst="rect">
@@ -4170,8 +4714,8 @@
         </p:nvSpPr>
         <p:spPr>
           <a:xfrm>
-            <a:off x="4480560" y="3429000"/>
-            <a:ext cx="3291840" cy="365760"/>
+            <a:off x="4480560" y="3172968"/>
+            <a:ext cx="3291840" cy="320040"/>
           </a:xfrm>
           <a:prstGeom prst="rect">
             <a:avLst/>
@@ -4204,8 +4748,8 @@
         </p:nvSpPr>
         <p:spPr>
           <a:xfrm>
-            <a:off x="4480560" y="3794760"/>
-            <a:ext cx="3291840" cy="320040"/>
+            <a:off x="4480560" y="3538728"/>
+            <a:ext cx="3291840" cy="256032"/>
           </a:xfrm>
           <a:prstGeom prst="rect">
             <a:avLst/>
@@ -4225,7 +4769,7 @@
                   <a:srgbClr val="888888"/>
                 </a:solidFill>
               </a:rPr>
-              <a:t>33 → 9 detections</a:t>
+              <a:t>33 -&gt; 9 detections</a:t>
             </a:r>
           </a:p>
         </p:txBody>
@@ -4238,8 +4782,8 @@
         </p:nvSpPr>
         <p:spPr>
           <a:xfrm>
-            <a:off x="4480560" y="4160519"/>
-            <a:ext cx="3291840" cy="274320"/>
+            <a:off x="4480560" y="3904488"/>
+            <a:ext cx="3291840" cy="228600"/>
           </a:xfrm>
           <a:prstGeom prst="rect">
             <a:avLst/>
@@ -4259,7 +4803,7 @@
                   <a:srgbClr val="888888"/>
                 </a:solidFill>
               </a:rPr>
-              <a:t>1000 epochs · loss 0.597</a:t>
+              <a:t>1000 epochs - loss 0.597</a:t>
             </a:r>
           </a:p>
         </p:txBody>
@@ -4272,7 +4816,7 @@
         </p:nvSpPr>
         <p:spPr>
           <a:xfrm>
-            <a:off x="8138160" y="2286000"/>
+            <a:off x="8138160" y="2057400"/>
             <a:ext cx="3291840" cy="2926080"/>
           </a:xfrm>
           <a:prstGeom prst="rect">
@@ -4315,7 +4859,7 @@
         </p:nvSpPr>
         <p:spPr>
           <a:xfrm>
-            <a:off x="8138160" y="2560320"/>
+            <a:off x="8138160" y="2313432"/>
             <a:ext cx="3291840" cy="822960"/>
           </a:xfrm>
           <a:prstGeom prst="rect">
@@ -4349,8 +4893,8 @@
         </p:nvSpPr>
         <p:spPr>
           <a:xfrm>
-            <a:off x="8138160" y="3429000"/>
-            <a:ext cx="3291840" cy="365760"/>
+            <a:off x="8138160" y="3172968"/>
+            <a:ext cx="3291840" cy="320040"/>
           </a:xfrm>
           <a:prstGeom prst="rect">
             <a:avLst/>
@@ -4383,8 +4927,8 @@
         </p:nvSpPr>
         <p:spPr>
           <a:xfrm>
-            <a:off x="8138160" y="3794760"/>
-            <a:ext cx="3291840" cy="320040"/>
+            <a:off x="8138160" y="3538728"/>
+            <a:ext cx="3291840" cy="256032"/>
           </a:xfrm>
           <a:prstGeom prst="rect">
             <a:avLst/>
@@ -4404,7 +4948,7 @@
                   <a:srgbClr val="888888"/>
                 </a:solidFill>
               </a:rPr>
-              <a:t>43 → 36 detections</a:t>
+              <a:t>43 -&gt; 36 detections</a:t>
             </a:r>
           </a:p>
         </p:txBody>
@@ -4417,8 +4961,8 @@
         </p:nvSpPr>
         <p:spPr>
           <a:xfrm>
-            <a:off x="8138160" y="4160519"/>
-            <a:ext cx="3291840" cy="274320"/>
+            <a:off x="8138160" y="3904488"/>
+            <a:ext cx="3291840" cy="228600"/>
           </a:xfrm>
           <a:prstGeom prst="rect">
             <a:avLst/>
@@ -4438,7 +4982,7 @@
                   <a:srgbClr val="888888"/>
                 </a:solidFill>
               </a:rPr>
-              <a:t>1000 epochs · loss 0.108 ⚠</a:t>
+              <a:t>1000 epochs - loss 0.108</a:t>
             </a:r>
           </a:p>
         </p:txBody>
@@ -4451,43 +4995,62 @@
         </p:nvSpPr>
         <p:spPr>
           <a:xfrm>
-            <a:off x="822960" y="5349240"/>
-            <a:ext cx="10515600" cy="822960"/>
-          </a:xfrm>
-          <a:prstGeom prst="rect">
-            <a:avLst/>
-          </a:prstGeom>
-          <a:noFill/>
-        </p:spPr>
-        <p:txBody>
-          <a:bodyPr wrap="square">
-            <a:spAutoFit/>
-          </a:bodyPr>
-          <a:lstStyle/>
-          <a:p>
-            <a:pPr algn="l"/>
-            <a:r>
-              <a:rPr sz="1300" b="0">
+            <a:off x="822960" y="5230368"/>
+            <a:ext cx="10424160" cy="274320"/>
+          </a:xfrm>
+          <a:prstGeom prst="rect">
+            <a:avLst/>
+          </a:prstGeom>
+          <a:noFill/>
+        </p:spPr>
+        <p:txBody>
+          <a:bodyPr wrap="square">
+            <a:spAutoFit/>
+          </a:bodyPr>
+          <a:lstStyle/>
+          <a:p>
+            <a:pPr algn="l"/>
+            <a:r>
+              <a:rPr sz="1300" b="0" i="0">
                 <a:solidFill>
                   <a:srgbClr val="CCCCCC"/>
                 </a:solidFill>
               </a:rPr>
-              <a:t>Patch size: 100×100 px  ·  Image size: 640×640  ·  2.4% of total pixels</a:t>
-            </a:r>
-          </a:p>
-          <a:p>
-            <a:pPr algn="l">
-              <a:spcBef>
-                <a:spcPts val="600"/>
-              </a:spcBef>
-            </a:pPr>
-            <a:r>
-              <a:rPr sz="1000" b="0">
+              <a:t>Patch size: 100 x 100 px  |  Image size: 640 x 640  |  2.4% of total pixels</a:t>
+            </a:r>
+          </a:p>
+        </p:txBody>
+      </p:sp>
+      <p:sp>
+        <p:nvSpPr>
+          <p:cNvPr id="20" name="TextBox 19"/>
+          <p:cNvSpPr txBox="1"/>
+          <p:nvPr/>
+        </p:nvSpPr>
+        <p:spPr>
+          <a:xfrm>
+            <a:off x="822960" y="5504688"/>
+            <a:ext cx="10424160" cy="274320"/>
+          </a:xfrm>
+          <a:prstGeom prst="rect">
+            <a:avLst/>
+          </a:prstGeom>
+          <a:noFill/>
+        </p:spPr>
+        <p:txBody>
+          <a:bodyPr wrap="square">
+            <a:spAutoFit/>
+          </a:bodyPr>
+          <a:lstStyle/>
+          <a:p>
+            <a:pPr algn="l"/>
+            <a:r>
+              <a:rPr sz="1000" b="0" i="0">
                 <a:solidFill>
                   <a:srgbClr val="444444"/>
                 </a:solidFill>
               </a:rPr>
-              <a:t>⚠ v26n loss converged lower than v8n/v11n yet suppression failed — see next slide</a:t>
+              <a:t>Within v26n runs, better objective convergence did not yield better suppression - see The v26n Paradox</a:t>
             </a:r>
           </a:p>
         </p:txBody>
@@ -4526,8 +5089,8 @@
         </p:nvSpPr>
         <p:spPr>
           <a:xfrm>
-            <a:off x="822960" y="365760"/>
-            <a:ext cx="3657600" cy="320040"/>
+            <a:off x="822960" y="411480"/>
+            <a:ext cx="3657600" cy="256032"/>
           </a:xfrm>
           <a:prstGeom prst="rect">
             <a:avLst/>
@@ -4547,7 +5110,7 @@
                   <a:srgbClr val="60B8FF"/>
                 </a:solidFill>
               </a:rPr>
-              <a:t>KEY RESEARCH FINDING</a:t>
+              <a:t>ATTACK TRACK - TRANSFER ANALYSIS</a:t>
             </a:r>
           </a:p>
         </p:txBody>
@@ -4561,52 +5124,1016 @@
         <p:spPr>
           <a:xfrm>
             <a:off x="822960" y="777240"/>
-            <a:ext cx="10058400" cy="1097280"/>
-          </a:xfrm>
-          <a:prstGeom prst="rect">
-            <a:avLst/>
-          </a:prstGeom>
-          <a:noFill/>
-        </p:spPr>
-        <p:txBody>
-          <a:bodyPr wrap="square">
-            <a:spAutoFit/>
-          </a:bodyPr>
-          <a:lstStyle/>
-          <a:p>
-            <a:pPr algn="l"/>
-            <a:r>
-              <a:rPr sz="3600" b="1">
+            <a:ext cx="10241280" cy="1463040"/>
+          </a:xfrm>
+          <a:prstGeom prst="rect">
+            <a:avLst/>
+          </a:prstGeom>
+          <a:noFill/>
+        </p:spPr>
+        <p:txBody>
+          <a:bodyPr wrap="square">
+            <a:spAutoFit/>
+          </a:bodyPr>
+          <a:lstStyle/>
+          <a:p>
+            <a:pPr algn="l"/>
+            <a:r>
+              <a:rPr sz="3600" b="1" i="0">
                 <a:solidFill>
                   <a:srgbClr val="E8E8F0"/>
                 </a:solidFill>
               </a:rPr>
-              <a:t>The </a:t>
-            </a:r>
-          </a:p>
-          <a:p>
-            <a:pPr algn="l"/>
-            <a:r>
-              <a:rPr sz="3600" b="1">
+              <a:t>The</a:t>
+            </a:r>
+          </a:p>
+          <a:p>
+            <a:pPr algn="l"/>
+            <a:r>
+              <a:rPr sz="3600" b="1" i="0">
+                <a:solidFill>
+                  <a:srgbClr val="60B8FF"/>
+                </a:solidFill>
+              </a:rPr>
+              <a:t>Bad Triangle</a:t>
+            </a:r>
+          </a:p>
+        </p:txBody>
+      </p:sp>
+      <p:sp>
+        <p:nvSpPr>
+          <p:cNvPr id="4" name="TextBox 3"/>
+          <p:cNvSpPr txBox="1"/>
+          <p:nvPr/>
+        </p:nvSpPr>
+        <p:spPr>
+          <a:xfrm>
+            <a:off x="822960" y="1828800"/>
+            <a:ext cx="6309360" cy="274320"/>
+          </a:xfrm>
+          <a:prstGeom prst="rect">
+            <a:avLst/>
+          </a:prstGeom>
+          <a:noFill/>
+        </p:spPr>
+        <p:txBody>
+          <a:bodyPr wrap="square">
+            <a:spAutoFit/>
+          </a:bodyPr>
+          <a:lstStyle/>
+          <a:p>
+            <a:pPr algn="l"/>
+            <a:r>
+              <a:rPr sz="900" b="1" i="0">
+                <a:solidFill>
+                  <a:srgbClr val="60B8FF"/>
+                </a:solidFill>
+              </a:rPr>
+              <a:t>Cross-model suppression matrix  |  row = patch trained on  |  column = model tested against</a:t>
+            </a:r>
+          </a:p>
+        </p:txBody>
+      </p:sp>
+      <p:sp>
+        <p:nvSpPr>
+          <p:cNvPr id="5" name="TextBox 4"/>
+          <p:cNvSpPr txBox="1"/>
+          <p:nvPr/>
+        </p:nvSpPr>
+        <p:spPr>
+          <a:xfrm>
+            <a:off x="822960" y="2212848"/>
+            <a:ext cx="1463040" cy="219456"/>
+          </a:xfrm>
+          <a:prstGeom prst="rect">
+            <a:avLst/>
+          </a:prstGeom>
+          <a:noFill/>
+        </p:spPr>
+        <p:txBody>
+          <a:bodyPr wrap="square">
+            <a:spAutoFit/>
+          </a:bodyPr>
+          <a:lstStyle/>
+          <a:p>
+            <a:pPr algn="l"/>
+            <a:r>
+              <a:rPr sz="900" b="0" i="0">
+                <a:solidFill>
+                  <a:srgbClr val="888888"/>
+                </a:solidFill>
+              </a:rPr>
+              <a:t>Patch source</a:t>
+            </a:r>
+          </a:p>
+        </p:txBody>
+      </p:sp>
+      <p:sp>
+        <p:nvSpPr>
+          <p:cNvPr id="6" name="TextBox 5"/>
+          <p:cNvSpPr txBox="1"/>
+          <p:nvPr/>
+        </p:nvSpPr>
+        <p:spPr>
+          <a:xfrm>
+            <a:off x="2286000" y="2212848"/>
+            <a:ext cx="1463040" cy="219456"/>
+          </a:xfrm>
+          <a:prstGeom prst="rect">
+            <a:avLst/>
+          </a:prstGeom>
+          <a:noFill/>
+        </p:spPr>
+        <p:txBody>
+          <a:bodyPr wrap="square">
+            <a:spAutoFit/>
+          </a:bodyPr>
+          <a:lstStyle/>
+          <a:p>
+            <a:pPr algn="l"/>
+            <a:r>
+              <a:rPr sz="900" b="0" i="0">
+                <a:solidFill>
+                  <a:srgbClr val="888888"/>
+                </a:solidFill>
+              </a:rPr>
+              <a:t>-&gt; v8n</a:t>
+            </a:r>
+          </a:p>
+        </p:txBody>
+      </p:sp>
+      <p:sp>
+        <p:nvSpPr>
+          <p:cNvPr id="7" name="TextBox 6"/>
+          <p:cNvSpPr txBox="1"/>
+          <p:nvPr/>
+        </p:nvSpPr>
+        <p:spPr>
+          <a:xfrm>
+            <a:off x="3749040" y="2212848"/>
+            <a:ext cx="1463040" cy="219456"/>
+          </a:xfrm>
+          <a:prstGeom prst="rect">
+            <a:avLst/>
+          </a:prstGeom>
+          <a:noFill/>
+        </p:spPr>
+        <p:txBody>
+          <a:bodyPr wrap="square">
+            <a:spAutoFit/>
+          </a:bodyPr>
+          <a:lstStyle/>
+          <a:p>
+            <a:pPr algn="l"/>
+            <a:r>
+              <a:rPr sz="900" b="0" i="0">
+                <a:solidFill>
+                  <a:srgbClr val="888888"/>
+                </a:solidFill>
+              </a:rPr>
+              <a:t>-&gt; v11n</a:t>
+            </a:r>
+          </a:p>
+        </p:txBody>
+      </p:sp>
+      <p:sp>
+        <p:nvSpPr>
+          <p:cNvPr id="8" name="TextBox 7"/>
+          <p:cNvSpPr txBox="1"/>
+          <p:nvPr/>
+        </p:nvSpPr>
+        <p:spPr>
+          <a:xfrm>
+            <a:off x="5212080" y="2212848"/>
+            <a:ext cx="1463040" cy="219456"/>
+          </a:xfrm>
+          <a:prstGeom prst="rect">
+            <a:avLst/>
+          </a:prstGeom>
+          <a:noFill/>
+        </p:spPr>
+        <p:txBody>
+          <a:bodyPr wrap="square">
+            <a:spAutoFit/>
+          </a:bodyPr>
+          <a:lstStyle/>
+          <a:p>
+            <a:pPr algn="l"/>
+            <a:r>
+              <a:rPr sz="900" b="0" i="0">
+                <a:solidFill>
+                  <a:srgbClr val="888888"/>
+                </a:solidFill>
+              </a:rPr>
+              <a:t>-&gt; v26n</a:t>
+            </a:r>
+          </a:p>
+        </p:txBody>
+      </p:sp>
+      <p:sp>
+        <p:nvSpPr>
+          <p:cNvPr id="9" name="Rectangle 8"/>
+          <p:cNvSpPr/>
+          <p:nvPr/>
+        </p:nvSpPr>
+        <p:spPr>
+          <a:xfrm>
+            <a:off x="749808" y="2487168"/>
+            <a:ext cx="6080760" cy="384048"/>
+          </a:xfrm>
+          <a:prstGeom prst="rect">
+            <a:avLst/>
+          </a:prstGeom>
+          <a:solidFill>
+            <a:srgbClr val="12121A"/>
+          </a:solidFill>
+          <a:ln>
+            <a:noFill/>
+          </a:ln>
+        </p:spPr>
+        <p:style>
+          <a:lnRef idx="1">
+            <a:schemeClr val="accent1"/>
+          </a:lnRef>
+          <a:fillRef idx="3">
+            <a:schemeClr val="accent1"/>
+          </a:fillRef>
+          <a:effectRef idx="2">
+            <a:schemeClr val="accent1"/>
+          </a:effectRef>
+          <a:fontRef idx="minor">
+            <a:schemeClr val="lt1"/>
+          </a:fontRef>
+        </p:style>
+        <p:txBody>
+          <a:bodyPr rtlCol="0" anchor="ctr"/>
+          <a:lstStyle/>
+          <a:p>
+            <a:pPr algn="ctr"/>
+          </a:p>
+        </p:txBody>
+      </p:sp>
+      <p:sp>
+        <p:nvSpPr>
+          <p:cNvPr id="10" name="TextBox 9"/>
+          <p:cNvSpPr txBox="1"/>
+          <p:nvPr/>
+        </p:nvSpPr>
+        <p:spPr>
+          <a:xfrm>
+            <a:off x="822960" y="2523744"/>
+            <a:ext cx="1463040" cy="219456"/>
+          </a:xfrm>
+          <a:prstGeom prst="rect">
+            <a:avLst/>
+          </a:prstGeom>
+          <a:noFill/>
+        </p:spPr>
+        <p:txBody>
+          <a:bodyPr wrap="square">
+            <a:spAutoFit/>
+          </a:bodyPr>
+          <a:lstStyle/>
+          <a:p>
+            <a:pPr algn="l"/>
+            <a:r>
+              <a:rPr sz="1200" b="0" i="0">
+                <a:solidFill>
+                  <a:srgbClr val="888888"/>
+                </a:solidFill>
+              </a:rPr>
+              <a:t>v8n</a:t>
+            </a:r>
+          </a:p>
+        </p:txBody>
+      </p:sp>
+      <p:sp>
+        <p:nvSpPr>
+          <p:cNvPr id="11" name="TextBox 10"/>
+          <p:cNvSpPr txBox="1"/>
+          <p:nvPr/>
+        </p:nvSpPr>
+        <p:spPr>
+          <a:xfrm>
+            <a:off x="2286000" y="2523744"/>
+            <a:ext cx="1463040" cy="219456"/>
+          </a:xfrm>
+          <a:prstGeom prst="rect">
+            <a:avLst/>
+          </a:prstGeom>
+          <a:noFill/>
+        </p:spPr>
+        <p:txBody>
+          <a:bodyPr wrap="square">
+            <a:spAutoFit/>
+          </a:bodyPr>
+          <a:lstStyle/>
+          <a:p>
+            <a:pPr algn="l"/>
+            <a:r>
+              <a:rPr sz="1200" b="1" i="0">
+                <a:solidFill>
+                  <a:srgbClr val="3EFFA0"/>
+                </a:solidFill>
+              </a:rPr>
+              <a:t>90% *</a:t>
+            </a:r>
+          </a:p>
+        </p:txBody>
+      </p:sp>
+      <p:sp>
+        <p:nvSpPr>
+          <p:cNvPr id="12" name="TextBox 11"/>
+          <p:cNvSpPr txBox="1"/>
+          <p:nvPr/>
+        </p:nvSpPr>
+        <p:spPr>
+          <a:xfrm>
+            <a:off x="3749040" y="2523744"/>
+            <a:ext cx="1463040" cy="219456"/>
+          </a:xfrm>
+          <a:prstGeom prst="rect">
+            <a:avLst/>
+          </a:prstGeom>
+          <a:noFill/>
+        </p:spPr>
+        <p:txBody>
+          <a:bodyPr wrap="square">
+            <a:spAutoFit/>
+          </a:bodyPr>
+          <a:lstStyle/>
+          <a:p>
+            <a:pPr algn="l"/>
+            <a:r>
+              <a:rPr sz="1200" b="1" i="0">
+                <a:solidFill>
+                  <a:srgbClr val="FFE066"/>
+                </a:solidFill>
+              </a:rPr>
+              <a:t>36.4%</a:t>
+            </a:r>
+          </a:p>
+        </p:txBody>
+      </p:sp>
+      <p:sp>
+        <p:nvSpPr>
+          <p:cNvPr id="13" name="TextBox 12"/>
+          <p:cNvSpPr txBox="1"/>
+          <p:nvPr/>
+        </p:nvSpPr>
+        <p:spPr>
+          <a:xfrm>
+            <a:off x="5212080" y="2523744"/>
+            <a:ext cx="1463040" cy="219456"/>
+          </a:xfrm>
+          <a:prstGeom prst="rect">
+            <a:avLst/>
+          </a:prstGeom>
+          <a:noFill/>
+        </p:spPr>
+        <p:txBody>
+          <a:bodyPr wrap="square">
+            <a:spAutoFit/>
+          </a:bodyPr>
+          <a:lstStyle/>
+          <a:p>
+            <a:pPr algn="l"/>
+            <a:r>
+              <a:rPr sz="1200" b="1" i="0">
                 <a:solidFill>
                   <a:srgbClr val="FF6060"/>
                 </a:solidFill>
               </a:rPr>
-              <a:t>v26n Paradox</a:t>
-            </a:r>
-          </a:p>
-        </p:txBody>
-      </p:sp>
-      <p:sp>
-        <p:nvSpPr>
-          <p:cNvPr id="4" name="Rectangle 3"/>
+              <a:t>11.6%</a:t>
+            </a:r>
+          </a:p>
+        </p:txBody>
+      </p:sp>
+      <p:sp>
+        <p:nvSpPr>
+          <p:cNvPr id="14" name="Rectangle 13"/>
           <p:cNvSpPr/>
           <p:nvPr/>
         </p:nvSpPr>
         <p:spPr>
           <a:xfrm>
-            <a:off x="822960" y="1828800"/>
-            <a:ext cx="5212080" cy="1417320"/>
+            <a:off x="749808" y="2962656"/>
+            <a:ext cx="6080760" cy="384048"/>
+          </a:xfrm>
+          <a:prstGeom prst="rect">
+            <a:avLst/>
+          </a:prstGeom>
+          <a:solidFill>
+            <a:srgbClr val="0A0A0F"/>
+          </a:solidFill>
+          <a:ln>
+            <a:noFill/>
+          </a:ln>
+        </p:spPr>
+        <p:style>
+          <a:lnRef idx="1">
+            <a:schemeClr val="accent1"/>
+          </a:lnRef>
+          <a:fillRef idx="3">
+            <a:schemeClr val="accent1"/>
+          </a:fillRef>
+          <a:effectRef idx="2">
+            <a:schemeClr val="accent1"/>
+          </a:effectRef>
+          <a:fontRef idx="minor">
+            <a:schemeClr val="lt1"/>
+          </a:fontRef>
+        </p:style>
+        <p:txBody>
+          <a:bodyPr rtlCol="0" anchor="ctr"/>
+          <a:lstStyle/>
+          <a:p>
+            <a:pPr algn="ctr"/>
+          </a:p>
+        </p:txBody>
+      </p:sp>
+      <p:sp>
+        <p:nvSpPr>
+          <p:cNvPr id="15" name="TextBox 14"/>
+          <p:cNvSpPr txBox="1"/>
+          <p:nvPr/>
+        </p:nvSpPr>
+        <p:spPr>
+          <a:xfrm>
+            <a:off x="822960" y="2999232"/>
+            <a:ext cx="1463040" cy="219456"/>
+          </a:xfrm>
+          <a:prstGeom prst="rect">
+            <a:avLst/>
+          </a:prstGeom>
+          <a:noFill/>
+        </p:spPr>
+        <p:txBody>
+          <a:bodyPr wrap="square">
+            <a:spAutoFit/>
+          </a:bodyPr>
+          <a:lstStyle/>
+          <a:p>
+            <a:pPr algn="l"/>
+            <a:r>
+              <a:rPr sz="1200" b="0" i="0">
+                <a:solidFill>
+                  <a:srgbClr val="888888"/>
+                </a:solidFill>
+              </a:rPr>
+              <a:t>v11n</a:t>
+            </a:r>
+          </a:p>
+        </p:txBody>
+      </p:sp>
+      <p:sp>
+        <p:nvSpPr>
+          <p:cNvPr id="16" name="TextBox 15"/>
+          <p:cNvSpPr txBox="1"/>
+          <p:nvPr/>
+        </p:nvSpPr>
+        <p:spPr>
+          <a:xfrm>
+            <a:off x="2286000" y="2999232"/>
+            <a:ext cx="1463040" cy="219456"/>
+          </a:xfrm>
+          <a:prstGeom prst="rect">
+            <a:avLst/>
+          </a:prstGeom>
+          <a:noFill/>
+        </p:spPr>
+        <p:txBody>
+          <a:bodyPr wrap="square">
+            <a:spAutoFit/>
+          </a:bodyPr>
+          <a:lstStyle/>
+          <a:p>
+            <a:pPr algn="l"/>
+            <a:r>
+              <a:rPr sz="1200" b="1" i="0">
+                <a:solidFill>
+                  <a:srgbClr val="FFE066"/>
+                </a:solidFill>
+              </a:rPr>
+              <a:t>50.0%</a:t>
+            </a:r>
+          </a:p>
+        </p:txBody>
+      </p:sp>
+      <p:sp>
+        <p:nvSpPr>
+          <p:cNvPr id="17" name="TextBox 16"/>
+          <p:cNvSpPr txBox="1"/>
+          <p:nvPr/>
+        </p:nvSpPr>
+        <p:spPr>
+          <a:xfrm>
+            <a:off x="3749040" y="2999232"/>
+            <a:ext cx="1463040" cy="219456"/>
+          </a:xfrm>
+          <a:prstGeom prst="rect">
+            <a:avLst/>
+          </a:prstGeom>
+          <a:noFill/>
+        </p:spPr>
+        <p:txBody>
+          <a:bodyPr wrap="square">
+            <a:spAutoFit/>
+          </a:bodyPr>
+          <a:lstStyle/>
+          <a:p>
+            <a:pPr algn="l"/>
+            <a:r>
+              <a:rPr sz="1200" b="1" i="0">
+                <a:solidFill>
+                  <a:srgbClr val="3EFFA0"/>
+                </a:solidFill>
+              </a:rPr>
+              <a:t>72.7% *</a:t>
+            </a:r>
+          </a:p>
+        </p:txBody>
+      </p:sp>
+      <p:sp>
+        <p:nvSpPr>
+          <p:cNvPr id="18" name="TextBox 17"/>
+          <p:cNvSpPr txBox="1"/>
+          <p:nvPr/>
+        </p:nvSpPr>
+        <p:spPr>
+          <a:xfrm>
+            <a:off x="5212080" y="2999232"/>
+            <a:ext cx="1463040" cy="219456"/>
+          </a:xfrm>
+          <a:prstGeom prst="rect">
+            <a:avLst/>
+          </a:prstGeom>
+          <a:noFill/>
+        </p:spPr>
+        <p:txBody>
+          <a:bodyPr wrap="square">
+            <a:spAutoFit/>
+          </a:bodyPr>
+          <a:lstStyle/>
+          <a:p>
+            <a:pPr algn="l"/>
+            <a:r>
+              <a:rPr sz="1200" b="1" i="0">
+                <a:solidFill>
+                  <a:srgbClr val="FF6060"/>
+                </a:solidFill>
+              </a:rPr>
+              <a:t>9.3%</a:t>
+            </a:r>
+          </a:p>
+        </p:txBody>
+      </p:sp>
+      <p:sp>
+        <p:nvSpPr>
+          <p:cNvPr id="19" name="Rectangle 18"/>
+          <p:cNvSpPr/>
+          <p:nvPr/>
+        </p:nvSpPr>
+        <p:spPr>
+          <a:xfrm>
+            <a:off x="749808" y="3438144"/>
+            <a:ext cx="6080760" cy="384048"/>
+          </a:xfrm>
+          <a:prstGeom prst="rect">
+            <a:avLst/>
+          </a:prstGeom>
+          <a:solidFill>
+            <a:srgbClr val="12121A"/>
+          </a:solidFill>
+          <a:ln>
+            <a:noFill/>
+          </a:ln>
+        </p:spPr>
+        <p:style>
+          <a:lnRef idx="1">
+            <a:schemeClr val="accent1"/>
+          </a:lnRef>
+          <a:fillRef idx="3">
+            <a:schemeClr val="accent1"/>
+          </a:fillRef>
+          <a:effectRef idx="2">
+            <a:schemeClr val="accent1"/>
+          </a:effectRef>
+          <a:fontRef idx="minor">
+            <a:schemeClr val="lt1"/>
+          </a:fontRef>
+        </p:style>
+        <p:txBody>
+          <a:bodyPr rtlCol="0" anchor="ctr"/>
+          <a:lstStyle/>
+          <a:p>
+            <a:pPr algn="ctr"/>
+          </a:p>
+        </p:txBody>
+      </p:sp>
+      <p:sp>
+        <p:nvSpPr>
+          <p:cNvPr id="20" name="TextBox 19"/>
+          <p:cNvSpPr txBox="1"/>
+          <p:nvPr/>
+        </p:nvSpPr>
+        <p:spPr>
+          <a:xfrm>
+            <a:off x="822960" y="3474720"/>
+            <a:ext cx="1463040" cy="219456"/>
+          </a:xfrm>
+          <a:prstGeom prst="rect">
+            <a:avLst/>
+          </a:prstGeom>
+          <a:noFill/>
+        </p:spPr>
+        <p:txBody>
+          <a:bodyPr wrap="square">
+            <a:spAutoFit/>
+          </a:bodyPr>
+          <a:lstStyle/>
+          <a:p>
+            <a:pPr algn="l"/>
+            <a:r>
+              <a:rPr sz="1200" b="0" i="0">
+                <a:solidFill>
+                  <a:srgbClr val="888888"/>
+                </a:solidFill>
+              </a:rPr>
+              <a:t>v26n</a:t>
+            </a:r>
+          </a:p>
+        </p:txBody>
+      </p:sp>
+      <p:sp>
+        <p:nvSpPr>
+          <p:cNvPr id="21" name="TextBox 20"/>
+          <p:cNvSpPr txBox="1"/>
+          <p:nvPr/>
+        </p:nvSpPr>
+        <p:spPr>
+          <a:xfrm>
+            <a:off x="2286000" y="3474720"/>
+            <a:ext cx="1463040" cy="219456"/>
+          </a:xfrm>
+          <a:prstGeom prst="rect">
+            <a:avLst/>
+          </a:prstGeom>
+          <a:noFill/>
+        </p:spPr>
+        <p:txBody>
+          <a:bodyPr wrap="square">
+            <a:spAutoFit/>
+          </a:bodyPr>
+          <a:lstStyle/>
+          <a:p>
+            <a:pPr algn="l"/>
+            <a:r>
+              <a:rPr sz="1200" b="1" i="0">
+                <a:solidFill>
+                  <a:srgbClr val="FFE066"/>
+                </a:solidFill>
+              </a:rPr>
+              <a:t>45.0%</a:t>
+            </a:r>
+          </a:p>
+        </p:txBody>
+      </p:sp>
+      <p:sp>
+        <p:nvSpPr>
+          <p:cNvPr id="22" name="TextBox 21"/>
+          <p:cNvSpPr txBox="1"/>
+          <p:nvPr/>
+        </p:nvSpPr>
+        <p:spPr>
+          <a:xfrm>
+            <a:off x="3749040" y="3474720"/>
+            <a:ext cx="1463040" cy="219456"/>
+          </a:xfrm>
+          <a:prstGeom prst="rect">
+            <a:avLst/>
+          </a:prstGeom>
+          <a:noFill/>
+        </p:spPr>
+        <p:txBody>
+          <a:bodyPr wrap="square">
+            <a:spAutoFit/>
+          </a:bodyPr>
+          <a:lstStyle/>
+          <a:p>
+            <a:pPr algn="l"/>
+            <a:r>
+              <a:rPr sz="1200" b="1" i="0">
+                <a:solidFill>
+                  <a:srgbClr val="FFE066"/>
+                </a:solidFill>
+              </a:rPr>
+              <a:t>24.2%</a:t>
+            </a:r>
+          </a:p>
+        </p:txBody>
+      </p:sp>
+      <p:sp>
+        <p:nvSpPr>
+          <p:cNvPr id="23" name="TextBox 22"/>
+          <p:cNvSpPr txBox="1"/>
+          <p:nvPr/>
+        </p:nvSpPr>
+        <p:spPr>
+          <a:xfrm>
+            <a:off x="5212080" y="3474720"/>
+            <a:ext cx="1463040" cy="219456"/>
+          </a:xfrm>
+          <a:prstGeom prst="rect">
+            <a:avLst/>
+          </a:prstGeom>
+          <a:noFill/>
+        </p:spPr>
+        <p:txBody>
+          <a:bodyPr wrap="square">
+            <a:spAutoFit/>
+          </a:bodyPr>
+          <a:lstStyle/>
+          <a:p>
+            <a:pPr algn="l"/>
+            <a:r>
+              <a:rPr sz="1200" b="1" i="0">
+                <a:solidFill>
+                  <a:srgbClr val="FF6060"/>
+                </a:solidFill>
+              </a:rPr>
+              <a:t>16.3% *</a:t>
+            </a:r>
+          </a:p>
+        </p:txBody>
+      </p:sp>
+      <p:sp>
+        <p:nvSpPr>
+          <p:cNvPr id="24" name="TextBox 23"/>
+          <p:cNvSpPr txBox="1"/>
+          <p:nvPr/>
+        </p:nvSpPr>
+        <p:spPr>
+          <a:xfrm>
+            <a:off x="822960" y="3703320"/>
+            <a:ext cx="6309360" cy="274320"/>
+          </a:xfrm>
+          <a:prstGeom prst="rect">
+            <a:avLst/>
+          </a:prstGeom>
+          <a:noFill/>
+        </p:spPr>
+        <p:txBody>
+          <a:bodyPr wrap="square">
+            <a:spAutoFit/>
+          </a:bodyPr>
+          <a:lstStyle/>
+          <a:p>
+            <a:pPr algn="l"/>
+            <a:r>
+              <a:rPr sz="1000" b="0" i="0">
+                <a:solidFill>
+                  <a:srgbClr val="888888"/>
+                </a:solidFill>
+              </a:rPr>
+              <a:t>* = white-box  |  off-diagonal = black-box transfer</a:t>
+            </a:r>
+          </a:p>
+        </p:txBody>
+      </p:sp>
+      <p:sp>
+        <p:nvSpPr>
+          <p:cNvPr id="25" name="Rectangle 24"/>
+          <p:cNvSpPr/>
+          <p:nvPr/>
+        </p:nvSpPr>
+        <p:spPr>
+          <a:xfrm>
+            <a:off x="822960" y="4069080"/>
+            <a:ext cx="6309360" cy="1051560"/>
+          </a:xfrm>
+          <a:prstGeom prst="rect">
+            <a:avLst/>
+          </a:prstGeom>
+          <a:solidFill>
+            <a:srgbClr val="0D1220"/>
+          </a:solidFill>
+          <a:ln>
+            <a:noFill/>
+          </a:ln>
+        </p:spPr>
+        <p:style>
+          <a:lnRef idx="1">
+            <a:schemeClr val="accent1"/>
+          </a:lnRef>
+          <a:fillRef idx="3">
+            <a:schemeClr val="accent1"/>
+          </a:fillRef>
+          <a:effectRef idx="2">
+            <a:schemeClr val="accent1"/>
+          </a:effectRef>
+          <a:fontRef idx="minor">
+            <a:schemeClr val="lt1"/>
+          </a:fontRef>
+        </p:style>
+        <p:txBody>
+          <a:bodyPr rtlCol="0" anchor="ctr"/>
+          <a:lstStyle/>
+          <a:p>
+            <a:pPr algn="ctr"/>
+          </a:p>
+        </p:txBody>
+      </p:sp>
+      <p:sp>
+        <p:nvSpPr>
+          <p:cNvPr id="26" name="TextBox 25"/>
+          <p:cNvSpPr txBox="1"/>
+          <p:nvPr/>
+        </p:nvSpPr>
+        <p:spPr>
+          <a:xfrm>
+            <a:off x="1005840" y="4206240"/>
+            <a:ext cx="5943600" cy="201168"/>
+          </a:xfrm>
+          <a:prstGeom prst="rect">
+            <a:avLst/>
+          </a:prstGeom>
+          <a:noFill/>
+        </p:spPr>
+        <p:txBody>
+          <a:bodyPr wrap="square">
+            <a:spAutoFit/>
+          </a:bodyPr>
+          <a:lstStyle/>
+          <a:p>
+            <a:pPr algn="l"/>
+            <a:r>
+              <a:rPr sz="900" b="1" i="0">
+                <a:solidFill>
+                  <a:srgbClr val="60B8FF"/>
+                </a:solidFill>
+              </a:rPr>
+              <a:t>JOINT PATCHES</a:t>
+            </a:r>
+          </a:p>
+        </p:txBody>
+      </p:sp>
+      <p:sp>
+        <p:nvSpPr>
+          <p:cNvPr id="27" name="TextBox 26"/>
+          <p:cNvSpPr txBox="1"/>
+          <p:nvPr/>
+        </p:nvSpPr>
+        <p:spPr>
+          <a:xfrm>
+            <a:off x="1005840" y="4526280"/>
+            <a:ext cx="5897880" cy="411480"/>
+          </a:xfrm>
+          <a:prstGeom prst="rect">
+            <a:avLst/>
+          </a:prstGeom>
+          <a:noFill/>
+        </p:spPr>
+        <p:txBody>
+          <a:bodyPr wrap="square">
+            <a:spAutoFit/>
+          </a:bodyPr>
+          <a:lstStyle/>
+          <a:p>
+            <a:pPr algn="l"/>
+            <a:r>
+              <a:rPr sz="1200" b="0" i="0">
+                <a:solidFill>
+                  <a:srgbClr val="CCCCCC"/>
+                </a:solidFill>
+              </a:rPr>
+              <a:t>v8n+v11n -&gt; v8n  85%   |   v8n+v11n -&gt; v11n  66.7%   |   v8n+v26n -&gt; v26n  18.6% (best v26n result)</a:t>
+            </a:r>
+          </a:p>
+        </p:txBody>
+      </p:sp>
+      <p:sp>
+        <p:nvSpPr>
+          <p:cNvPr id="28" name="Rectangle 27"/>
+          <p:cNvSpPr/>
+          <p:nvPr/>
+        </p:nvSpPr>
+        <p:spPr>
+          <a:xfrm>
+            <a:off x="7452360" y="2148840"/>
+            <a:ext cx="3886200" cy="1325880"/>
+          </a:xfrm>
+          <a:prstGeom prst="rect">
+            <a:avLst/>
+          </a:prstGeom>
+          <a:solidFill>
+            <a:srgbClr val="1A180D"/>
+          </a:solidFill>
+          <a:ln>
+            <a:noFill/>
+          </a:ln>
+        </p:spPr>
+        <p:style>
+          <a:lnRef idx="1">
+            <a:schemeClr val="accent1"/>
+          </a:lnRef>
+          <a:fillRef idx="3">
+            <a:schemeClr val="accent1"/>
+          </a:fillRef>
+          <a:effectRef idx="2">
+            <a:schemeClr val="accent1"/>
+          </a:effectRef>
+          <a:fontRef idx="minor">
+            <a:schemeClr val="lt1"/>
+          </a:fontRef>
+        </p:style>
+        <p:txBody>
+          <a:bodyPr rtlCol="0" anchor="ctr"/>
+          <a:lstStyle/>
+          <a:p>
+            <a:pPr algn="ctr"/>
+          </a:p>
+        </p:txBody>
+      </p:sp>
+      <p:sp>
+        <p:nvSpPr>
+          <p:cNvPr id="29" name="TextBox 28"/>
+          <p:cNvSpPr txBox="1"/>
+          <p:nvPr/>
+        </p:nvSpPr>
+        <p:spPr>
+          <a:xfrm>
+            <a:off x="7635240" y="2286000"/>
+            <a:ext cx="3566160" cy="201168"/>
+          </a:xfrm>
+          <a:prstGeom prst="rect">
+            <a:avLst/>
+          </a:prstGeom>
+          <a:noFill/>
+        </p:spPr>
+        <p:txBody>
+          <a:bodyPr wrap="square">
+            <a:spAutoFit/>
+          </a:bodyPr>
+          <a:lstStyle/>
+          <a:p>
+            <a:pPr algn="l"/>
+            <a:r>
+              <a:rPr sz="900" b="1" i="0">
+                <a:solidFill>
+                  <a:srgbClr val="60B8FF"/>
+                </a:solidFill>
+              </a:rPr>
+              <a:t>ASYMMETRY</a:t>
+            </a:r>
+          </a:p>
+        </p:txBody>
+      </p:sp>
+      <p:sp>
+        <p:nvSpPr>
+          <p:cNvPr id="30" name="TextBox 29"/>
+          <p:cNvSpPr txBox="1"/>
+          <p:nvPr/>
+        </p:nvSpPr>
+        <p:spPr>
+          <a:xfrm>
+            <a:off x="7635240" y="2578608"/>
+            <a:ext cx="3520440" cy="822960"/>
+          </a:xfrm>
+          <a:prstGeom prst="rect">
+            <a:avLst/>
+          </a:prstGeom>
+          <a:noFill/>
+        </p:spPr>
+        <p:txBody>
+          <a:bodyPr wrap="square">
+            <a:spAutoFit/>
+          </a:bodyPr>
+          <a:lstStyle/>
+          <a:p>
+            <a:pPr algn="l"/>
+            <a:r>
+              <a:rPr sz="1200" b="0" i="0">
+                <a:solidFill>
+                  <a:srgbClr val="CCCCCC"/>
+                </a:solidFill>
+              </a:rPr>
+              <a:t>v11n -&gt; v8n = 50%  &gt;  v8n -&gt; v11n = 36.4%
+Newer-generation patches reach backward better than older patches reach forward.</a:t>
+            </a:r>
+          </a:p>
+        </p:txBody>
+      </p:sp>
+      <p:sp>
+        <p:nvSpPr>
+          <p:cNvPr id="31" name="Rectangle 30"/>
+          <p:cNvSpPr/>
+          <p:nvPr/>
+        </p:nvSpPr>
+        <p:spPr>
+          <a:xfrm>
+            <a:off x="7452360" y="3657600"/>
+            <a:ext cx="3886200" cy="1828800"/>
           </a:xfrm>
           <a:prstGeom prst="rect">
             <a:avLst/>
@@ -4642,14 +6169,14 @@
       </p:sp>
       <p:sp>
         <p:nvSpPr>
-          <p:cNvPr id="5" name="TextBox 4"/>
-          <p:cNvSpPr txBox="1"/>
-          <p:nvPr/>
-        </p:nvSpPr>
-        <p:spPr>
-          <a:xfrm>
-            <a:off x="1005840" y="1965960"/>
-            <a:ext cx="5212080" cy="228600"/>
+          <p:cNvPr id="32" name="TextBox 31"/>
+          <p:cNvSpPr txBox="1"/>
+          <p:nvPr/>
+        </p:nvSpPr>
+        <p:spPr>
+          <a:xfrm>
+            <a:off x="7635240" y="3794760"/>
+            <a:ext cx="3566160" cy="201168"/>
           </a:xfrm>
           <a:prstGeom prst="rect">
             <a:avLst/>
@@ -4669,520 +6196,43 @@
                   <a:srgbClr val="60B8FF"/>
                 </a:solidFill>
               </a:rPr>
-              <a:t>WHAT HAPPENED</a:t>
-            </a:r>
-          </a:p>
-        </p:txBody>
-      </p:sp>
-      <p:sp>
-        <p:nvSpPr>
-          <p:cNvPr id="6" name="TextBox 5"/>
-          <p:cNvSpPr txBox="1"/>
-          <p:nvPr/>
-        </p:nvSpPr>
-        <p:spPr>
-          <a:xfrm>
-            <a:off x="1005840" y="2286000"/>
-            <a:ext cx="4937760" cy="868680"/>
-          </a:xfrm>
-          <a:prstGeom prst="rect">
-            <a:avLst/>
-          </a:prstGeom>
-          <a:noFill/>
-        </p:spPr>
-        <p:txBody>
-          <a:bodyPr wrap="square">
-            <a:spAutoFit/>
-          </a:bodyPr>
-          <a:lstStyle/>
-          <a:p>
-            <a:pPr algn="l"/>
-            <a:r>
-              <a:rPr sz="1200" b="0">
+              <a:t>THE v26n FIREWALL</a:t>
+            </a:r>
+          </a:p>
+        </p:txBody>
+      </p:sp>
+      <p:sp>
+        <p:nvSpPr>
+          <p:cNvPr id="33" name="TextBox 32"/>
+          <p:cNvSpPr txBox="1"/>
+          <p:nvPr/>
+        </p:nvSpPr>
+        <p:spPr>
+          <a:xfrm>
+            <a:off x="7635240" y="4087368"/>
+            <a:ext cx="3520440" cy="1280160"/>
+          </a:xfrm>
+          <a:prstGeom prst="rect">
+            <a:avLst/>
+          </a:prstGeom>
+          <a:noFill/>
+        </p:spPr>
+        <p:txBody>
+          <a:bodyPr wrap="square">
+            <a:spAutoFit/>
+          </a:bodyPr>
+          <a:lstStyle/>
+          <a:p>
+            <a:pPr algn="l"/>
+            <a:r>
+              <a:rPr sz="1200" b="0" i="0">
                 <a:solidFill>
                   <a:srgbClr val="CCCCCC"/>
                 </a:solidFill>
               </a:rPr>
-              <a:t>Optimizer fully converged.</a:t>
-            </a:r>
-          </a:p>
-          <a:p>
-            <a:pPr algn="l"/>
-            <a:r>
-              <a:rPr sz="1200" b="0">
-                <a:solidFill>
-                  <a:srgbClr val="FF6060"/>
-                </a:solidFill>
-              </a:rPr>
-              <a:t>final_det_loss = 0.108  — lower than v8n (0.543) and v11n (0.597).</a:t>
-            </a:r>
-          </a:p>
-          <a:p>
-            <a:pPr algn="l"/>
-            <a:r>
-              <a:rPr sz="1200" b="0">
-                <a:solidFill>
-                  <a:srgbClr val="CCCCCC"/>
-                </a:solidFill>
-              </a:rPr>
-              <a:t>Suppression: only 16.3%.</a:t>
-            </a:r>
-          </a:p>
-        </p:txBody>
-      </p:sp>
-      <p:sp>
-        <p:nvSpPr>
-          <p:cNvPr id="7" name="Rectangle 6"/>
-          <p:cNvSpPr/>
-          <p:nvPr/>
-        </p:nvSpPr>
-        <p:spPr>
-          <a:xfrm>
-            <a:off x="822960" y="3337560"/>
-            <a:ext cx="5212080" cy="2194560"/>
-          </a:xfrm>
-          <a:prstGeom prst="rect">
-            <a:avLst/>
-          </a:prstGeom>
-          <a:solidFill>
-            <a:srgbClr val="0D1220"/>
-          </a:solidFill>
-          <a:ln>
-            <a:noFill/>
-          </a:ln>
-        </p:spPr>
-        <p:style>
-          <a:lnRef idx="1">
-            <a:schemeClr val="accent1"/>
-          </a:lnRef>
-          <a:fillRef idx="3">
-            <a:schemeClr val="accent1"/>
-          </a:fillRef>
-          <a:effectRef idx="2">
-            <a:schemeClr val="accent1"/>
-          </a:effectRef>
-          <a:fontRef idx="minor">
-            <a:schemeClr val="lt1"/>
-          </a:fontRef>
-        </p:style>
-        <p:txBody>
-          <a:bodyPr rtlCol="0" anchor="ctr"/>
-          <a:lstStyle/>
-          <a:p>
-            <a:pPr algn="ctr"/>
-          </a:p>
-        </p:txBody>
-      </p:sp>
-      <p:sp>
-        <p:nvSpPr>
-          <p:cNvPr id="8" name="TextBox 7"/>
-          <p:cNvSpPr txBox="1"/>
-          <p:nvPr/>
-        </p:nvSpPr>
-        <p:spPr>
-          <a:xfrm>
-            <a:off x="1005840" y="3474720"/>
-            <a:ext cx="5212080" cy="228600"/>
-          </a:xfrm>
-          <a:prstGeom prst="rect">
-            <a:avLst/>
-          </a:prstGeom>
-          <a:noFill/>
-        </p:spPr>
-        <p:txBody>
-          <a:bodyPr wrap="square">
-            <a:spAutoFit/>
-          </a:bodyPr>
-          <a:lstStyle/>
-          <a:p>
-            <a:pPr algn="l"/>
-            <a:r>
-              <a:rPr sz="900" b="1" i="0">
-                <a:solidFill>
-                  <a:srgbClr val="60B8FF"/>
-                </a:solidFill>
-              </a:rPr>
-              <a:t>ROOT CAUSE</a:t>
-            </a:r>
-          </a:p>
-        </p:txBody>
-      </p:sp>
-      <p:sp>
-        <p:nvSpPr>
-          <p:cNvPr id="9" name="TextBox 8"/>
-          <p:cNvSpPr txBox="1"/>
-          <p:nvPr/>
-        </p:nvSpPr>
-        <p:spPr>
-          <a:xfrm>
-            <a:off x="1005840" y="3749039"/>
-            <a:ext cx="4937760" cy="457200"/>
-          </a:xfrm>
-          <a:prstGeom prst="rect">
-            <a:avLst/>
-          </a:prstGeom>
-          <a:noFill/>
-        </p:spPr>
-        <p:txBody>
-          <a:bodyPr wrap="square">
-            <a:spAutoFit/>
-          </a:bodyPr>
-          <a:lstStyle/>
-          <a:p>
-            <a:pPr algn="l"/>
-            <a:r>
-              <a:rPr sz="1200" b="0" i="0">
-                <a:solidFill>
-                  <a:srgbClr val="CCCCCC"/>
-                </a:solidFill>
-              </a:rPr>
-              <a:t>YOLO26n uses end-to-end Hungarian matching (head_end2end: true).</a:t>
-            </a:r>
-          </a:p>
-        </p:txBody>
-      </p:sp>
-      <p:sp>
-        <p:nvSpPr>
-          <p:cNvPr id="10" name="TextBox 9"/>
-          <p:cNvSpPr txBox="1"/>
-          <p:nvPr/>
-        </p:nvSpPr>
-        <p:spPr>
-          <a:xfrm>
-            <a:off x="1005840" y="4251960"/>
-            <a:ext cx="4937760" cy="1005840"/>
-          </a:xfrm>
-          <a:prstGeom prst="rect">
-            <a:avLst/>
-          </a:prstGeom>
-          <a:noFill/>
-        </p:spPr>
-        <p:txBody>
-          <a:bodyPr wrap="square">
-            <a:spAutoFit/>
-          </a:bodyPr>
-          <a:lstStyle/>
-          <a:p>
-            <a:pPr algn="l"/>
-            <a:r>
-              <a:rPr sz="1200" b="0">
-                <a:solidFill>
-                  <a:srgbClr val="FFE066"/>
-                </a:solidFill>
-              </a:rPr>
-              <a:t>• Training  optimizes the one2many auxiliary head</a:t>
-            </a:r>
-          </a:p>
-          <a:p>
-            <a:pPr algn="l"/>
-            <a:r>
-              <a:rPr sz="1200" b="0">
-                <a:solidFill>
-                  <a:srgbClr val="3EFFA0"/>
-                </a:solidFill>
-              </a:rPr>
-              <a:t>• Inference uses the one2one head for final detections</a:t>
-            </a:r>
-          </a:p>
-          <a:p>
-            <a:pPr algn="l"/>
-            <a:r>
-              <a:rPr sz="1200" b="1">
-                <a:solidFill>
-                  <a:srgbClr val="CCCCCC"/>
-                </a:solidFill>
-              </a:rPr>
-              <a:t>• These heads are architecturally separate</a:t>
-            </a:r>
-          </a:p>
-        </p:txBody>
-      </p:sp>
-      <p:sp>
-        <p:nvSpPr>
-          <p:cNvPr id="11" name="Rectangle 10"/>
-          <p:cNvSpPr/>
-          <p:nvPr/>
-        </p:nvSpPr>
-        <p:spPr>
-          <a:xfrm>
-            <a:off x="6400800" y="1828800"/>
-            <a:ext cx="5212080" cy="1737360"/>
-          </a:xfrm>
-          <a:prstGeom prst="rect">
-            <a:avLst/>
-          </a:prstGeom>
-          <a:solidFill>
-            <a:srgbClr val="12121A"/>
-          </a:solidFill>
-          <a:ln>
-            <a:noFill/>
-          </a:ln>
-        </p:spPr>
-        <p:style>
-          <a:lnRef idx="1">
-            <a:schemeClr val="accent1"/>
-          </a:lnRef>
-          <a:fillRef idx="3">
-            <a:schemeClr val="accent1"/>
-          </a:fillRef>
-          <a:effectRef idx="2">
-            <a:schemeClr val="accent1"/>
-          </a:effectRef>
-          <a:fontRef idx="minor">
-            <a:schemeClr val="lt1"/>
-          </a:fontRef>
-        </p:style>
-        <p:txBody>
-          <a:bodyPr rtlCol="0" anchor="ctr"/>
-          <a:lstStyle/>
-          <a:p>
-            <a:pPr algn="ctr"/>
-          </a:p>
-        </p:txBody>
-      </p:sp>
-      <p:sp>
-        <p:nvSpPr>
-          <p:cNvPr id="12" name="TextBox 11"/>
-          <p:cNvSpPr txBox="1"/>
-          <p:nvPr/>
-        </p:nvSpPr>
-        <p:spPr>
-          <a:xfrm>
-            <a:off x="6583680" y="1965960"/>
-            <a:ext cx="5212080" cy="228600"/>
-          </a:xfrm>
-          <a:prstGeom prst="rect">
-            <a:avLst/>
-          </a:prstGeom>
-          <a:noFill/>
-        </p:spPr>
-        <p:txBody>
-          <a:bodyPr wrap="square">
-            <a:spAutoFit/>
-          </a:bodyPr>
-          <a:lstStyle/>
-          <a:p>
-            <a:pPr algn="l"/>
-            <a:r>
-              <a:rPr sz="900" b="1" i="0">
-                <a:solidFill>
-                  <a:srgbClr val="60B8FF"/>
-                </a:solidFill>
-              </a:rPr>
-              <a:t>WARM-START EXPERIMENT</a:t>
-            </a:r>
-          </a:p>
-        </p:txBody>
-      </p:sp>
-      <p:sp>
-        <p:nvSpPr>
-          <p:cNvPr id="13" name="TextBox 12"/>
-          <p:cNvSpPr txBox="1"/>
-          <p:nvPr/>
-        </p:nvSpPr>
-        <p:spPr>
-          <a:xfrm>
-            <a:off x="6583680" y="2286000"/>
-            <a:ext cx="4937760" cy="457200"/>
-          </a:xfrm>
-          <a:prstGeom prst="rect">
-            <a:avLst/>
-          </a:prstGeom>
-          <a:noFill/>
-        </p:spPr>
-        <p:txBody>
-          <a:bodyPr wrap="square">
-            <a:spAutoFit/>
-          </a:bodyPr>
-          <a:lstStyle/>
-          <a:p>
-            <a:pPr algn="l"/>
-            <a:r>
-              <a:rPr sz="1200" b="0" i="0">
-                <a:solidFill>
-                  <a:srgbClr val="CCCCCC"/>
-                </a:solidFill>
-              </a:rPr>
-              <a:t>Initialized v26n training from the v8n 90% patch. Trained 2000 epochs.</a:t>
-            </a:r>
-          </a:p>
-        </p:txBody>
-      </p:sp>
-      <p:sp>
-        <p:nvSpPr>
-          <p:cNvPr id="14" name="TextBox 13"/>
-          <p:cNvSpPr txBox="1"/>
-          <p:nvPr/>
-        </p:nvSpPr>
-        <p:spPr>
-          <a:xfrm>
-            <a:off x="6583680" y="2788920"/>
-            <a:ext cx="4937760" cy="320040"/>
-          </a:xfrm>
-          <a:prstGeom prst="rect">
-            <a:avLst/>
-          </a:prstGeom>
-          <a:noFill/>
-        </p:spPr>
-        <p:txBody>
-          <a:bodyPr wrap="square">
-            <a:spAutoFit/>
-          </a:bodyPr>
-          <a:lstStyle/>
-          <a:p>
-            <a:pPr algn="l"/>
-            <a:r>
-              <a:rPr sz="1300" b="1" i="0">
-                <a:solidFill>
-                  <a:srgbClr val="E8E8F0"/>
-                </a:solidFill>
-              </a:rPr>
-              <a:t>Result: 14.0%</a:t>
-            </a:r>
-          </a:p>
-        </p:txBody>
-      </p:sp>
-      <p:sp>
-        <p:nvSpPr>
-          <p:cNvPr id="15" name="TextBox 14"/>
-          <p:cNvSpPr txBox="1"/>
-          <p:nvPr/>
-        </p:nvSpPr>
-        <p:spPr>
-          <a:xfrm>
-            <a:off x="6583680" y="3127248"/>
-            <a:ext cx="4937760" cy="365760"/>
-          </a:xfrm>
-          <a:prstGeom prst="rect">
-            <a:avLst/>
-          </a:prstGeom>
-          <a:noFill/>
-        </p:spPr>
-        <p:txBody>
-          <a:bodyPr wrap="square">
-            <a:spAutoFit/>
-          </a:bodyPr>
-          <a:lstStyle/>
-          <a:p>
-            <a:pPr algn="l"/>
-            <a:r>
-              <a:rPr sz="1100" b="0" i="0">
-                <a:solidFill>
-                  <a:srgbClr val="888888"/>
-                </a:solidFill>
-              </a:rPr>
-              <a:t>The barrier is structural, not a local minimum you can escape from.</a:t>
-            </a:r>
-          </a:p>
-        </p:txBody>
-      </p:sp>
-      <p:sp>
-        <p:nvSpPr>
-          <p:cNvPr id="16" name="Rectangle 15"/>
-          <p:cNvSpPr/>
-          <p:nvPr/>
-        </p:nvSpPr>
-        <p:spPr>
-          <a:xfrm>
-            <a:off x="6400800" y="3703320"/>
-            <a:ext cx="5212080" cy="1783080"/>
-          </a:xfrm>
-          <a:prstGeom prst="rect">
-            <a:avLst/>
-          </a:prstGeom>
-          <a:solidFill>
-            <a:srgbClr val="0D1A12"/>
-          </a:solidFill>
-          <a:ln>
-            <a:noFill/>
-          </a:ln>
-        </p:spPr>
-        <p:style>
-          <a:lnRef idx="1">
-            <a:schemeClr val="accent1"/>
-          </a:lnRef>
-          <a:fillRef idx="3">
-            <a:schemeClr val="accent1"/>
-          </a:fillRef>
-          <a:effectRef idx="2">
-            <a:schemeClr val="accent1"/>
-          </a:effectRef>
-          <a:fontRef idx="minor">
-            <a:schemeClr val="lt1"/>
-          </a:fontRef>
-        </p:style>
-        <p:txBody>
-          <a:bodyPr rtlCol="0" anchor="ctr"/>
-          <a:lstStyle/>
-          <a:p>
-            <a:pPr algn="ctr"/>
-          </a:p>
-        </p:txBody>
-      </p:sp>
-      <p:sp>
-        <p:nvSpPr>
-          <p:cNvPr id="17" name="TextBox 16"/>
-          <p:cNvSpPr txBox="1"/>
-          <p:nvPr/>
-        </p:nvSpPr>
-        <p:spPr>
-          <a:xfrm>
-            <a:off x="6583680" y="3840480"/>
-            <a:ext cx="5212080" cy="228600"/>
-          </a:xfrm>
-          <a:prstGeom prst="rect">
-            <a:avLst/>
-          </a:prstGeom>
-          <a:noFill/>
-        </p:spPr>
-        <p:txBody>
-          <a:bodyPr wrap="square">
-            <a:spAutoFit/>
-          </a:bodyPr>
-          <a:lstStyle/>
-          <a:p>
-            <a:pPr algn="l"/>
-            <a:r>
-              <a:rPr sz="900" b="1" i="0">
-                <a:solidFill>
-                  <a:srgbClr val="60B8FF"/>
-                </a:solidFill>
-              </a:rPr>
-              <a:t>WHAT THIS MEANS</a:t>
-            </a:r>
-          </a:p>
-        </p:txBody>
-      </p:sp>
-      <p:sp>
-        <p:nvSpPr>
-          <p:cNvPr id="18" name="TextBox 17"/>
-          <p:cNvSpPr txBox="1"/>
-          <p:nvPr/>
-        </p:nvSpPr>
-        <p:spPr>
-          <a:xfrm>
-            <a:off x="6583680" y="4160520"/>
-            <a:ext cx="4937760" cy="1097280"/>
-          </a:xfrm>
-          <a:prstGeom prst="rect">
-            <a:avLst/>
-          </a:prstGeom>
-          <a:noFill/>
-        </p:spPr>
-        <p:txBody>
-          <a:bodyPr wrap="square">
-            <a:spAutoFit/>
-          </a:bodyPr>
-          <a:lstStyle/>
-          <a:p>
-            <a:pPr algn="l"/>
-            <a:r>
-              <a:rPr sz="1200" b="0" i="0">
-                <a:solidFill>
-                  <a:srgbClr val="CCCCCC"/>
-                </a:solidFill>
-              </a:rPr>
-              <a:t>YOLO26n's architecture is a natural defense against this class of attack. The correct follow-up is to route gradients through the one2one head directly during training.</a:t>
+              <a:t>v26n is the hardest target in this matrix - nothing exceeds 18.6% against it.
+Its own patch still transfers out at 45% and 24.2%.
+In this setup, resistance as a target did not stop it from producing transferable adversarial structure.</a:t>
             </a:r>
           </a:p>
         </p:txBody>
@@ -5221,8 +6271,8 @@
         </p:nvSpPr>
         <p:spPr>
           <a:xfrm>
-            <a:off x="822960" y="365760"/>
-            <a:ext cx="3657600" cy="320040"/>
+            <a:off x="822960" y="411480"/>
+            <a:ext cx="3657600" cy="256032"/>
           </a:xfrm>
           <a:prstGeom prst="rect">
             <a:avLst/>
@@ -5242,7 +6292,7 @@
                   <a:srgbClr val="60B8FF"/>
                 </a:solidFill>
               </a:rPr>
-              <a:t>CROSS-MODEL GENERALIZATION</a:t>
+              <a:t>ATTACK TRACK - DEFENSE BENCHMARK</a:t>
             </a:r>
           </a:p>
         </p:txBody>
@@ -5256,188 +6306,52 @@
         <p:spPr>
           <a:xfrm>
             <a:off x="822960" y="777240"/>
-            <a:ext cx="10058400" cy="1097280"/>
-          </a:xfrm>
-          <a:prstGeom prst="rect">
-            <a:avLst/>
-          </a:prstGeom>
-          <a:noFill/>
-        </p:spPr>
-        <p:txBody>
-          <a:bodyPr wrap="square">
-            <a:spAutoFit/>
-          </a:bodyPr>
-          <a:lstStyle/>
-          <a:p>
-            <a:pPr algn="l"/>
-            <a:r>
-              <a:rPr sz="3600" b="1">
+            <a:ext cx="10241280" cy="1463040"/>
+          </a:xfrm>
+          <a:prstGeom prst="rect">
+            <a:avLst/>
+          </a:prstGeom>
+          <a:noFill/>
+        </p:spPr>
+        <p:txBody>
+          <a:bodyPr wrap="square">
+            <a:spAutoFit/>
+          </a:bodyPr>
+          <a:lstStyle/>
+          <a:p>
+            <a:pPr algn="l"/>
+            <a:r>
+              <a:rPr sz="3600" b="1" i="0">
                 <a:solidFill>
                   <a:srgbClr val="E8E8F0"/>
                 </a:solidFill>
               </a:rPr>
-              <a:t>Transfer </a:t>
-            </a:r>
-          </a:p>
-          <a:p>
-            <a:pPr algn="l"/>
-            <a:r>
-              <a:rPr sz="3600" b="1">
-                <a:solidFill>
-                  <a:srgbClr val="60B8FF"/>
-                </a:solidFill>
-              </a:rPr>
-              <a:t>Matrix</a:t>
-            </a:r>
-          </a:p>
-        </p:txBody>
-      </p:sp>
-      <p:sp>
-        <p:nvSpPr>
-          <p:cNvPr id="4" name="TextBox 3"/>
-          <p:cNvSpPr txBox="1"/>
-          <p:nvPr/>
-        </p:nvSpPr>
-        <p:spPr>
-          <a:xfrm>
-            <a:off x="822960" y="1920240"/>
-            <a:ext cx="5303520" cy="274320"/>
-          </a:xfrm>
-          <a:prstGeom prst="rect">
-            <a:avLst/>
-          </a:prstGeom>
-          <a:noFill/>
-        </p:spPr>
-        <p:txBody>
-          <a:bodyPr wrap="square">
-            <a:spAutoFit/>
-          </a:bodyPr>
-          <a:lstStyle/>
-          <a:p>
-            <a:pPr algn="l"/>
-            <a:r>
-              <a:rPr sz="900" b="1" i="0">
-                <a:solidFill>
-                  <a:srgbClr val="60B8FF"/>
-                </a:solidFill>
-              </a:rPr>
-              <a:t>SINGLE-SOURCE TRANSFERS</a:t>
-            </a:r>
-          </a:p>
-        </p:txBody>
-      </p:sp>
-      <p:sp>
-        <p:nvSpPr>
-          <p:cNvPr id="5" name="TextBox 4"/>
-          <p:cNvSpPr txBox="1"/>
-          <p:nvPr/>
-        </p:nvSpPr>
-        <p:spPr>
-          <a:xfrm>
-            <a:off x="822960" y="2240280"/>
-            <a:ext cx="1554480" cy="274320"/>
-          </a:xfrm>
-          <a:prstGeom prst="rect">
-            <a:avLst/>
-          </a:prstGeom>
-          <a:noFill/>
-        </p:spPr>
-        <p:txBody>
-          <a:bodyPr wrap="square">
-            <a:spAutoFit/>
-          </a:bodyPr>
-          <a:lstStyle/>
-          <a:p>
-            <a:pPr algn="l"/>
-            <a:r>
-              <a:rPr sz="900" b="0" i="0">
-                <a:solidFill>
-                  <a:srgbClr val="888888"/>
-                </a:solidFill>
-              </a:rPr>
-              <a:t>Patch source</a:t>
-            </a:r>
-          </a:p>
-        </p:txBody>
-      </p:sp>
-      <p:sp>
-        <p:nvSpPr>
-          <p:cNvPr id="6" name="TextBox 5"/>
-          <p:cNvSpPr txBox="1"/>
-          <p:nvPr/>
-        </p:nvSpPr>
-        <p:spPr>
-          <a:xfrm>
-            <a:off x="2468880" y="2240280"/>
-            <a:ext cx="1371600" cy="274320"/>
-          </a:xfrm>
-          <a:prstGeom prst="rect">
-            <a:avLst/>
-          </a:prstGeom>
-          <a:noFill/>
-        </p:spPr>
-        <p:txBody>
-          <a:bodyPr wrap="square">
-            <a:spAutoFit/>
-          </a:bodyPr>
-          <a:lstStyle/>
-          <a:p>
-            <a:pPr algn="l"/>
-            <a:r>
-              <a:rPr sz="900" b="0" i="0">
-                <a:solidFill>
-                  <a:srgbClr val="888888"/>
-                </a:solidFill>
-              </a:rPr>
-              <a:t>Eval model</a:t>
-            </a:r>
-          </a:p>
-        </p:txBody>
-      </p:sp>
-      <p:sp>
-        <p:nvSpPr>
-          <p:cNvPr id="7" name="TextBox 6"/>
-          <p:cNvSpPr txBox="1"/>
-          <p:nvPr/>
-        </p:nvSpPr>
-        <p:spPr>
-          <a:xfrm>
-            <a:off x="3931920" y="2240280"/>
-            <a:ext cx="2286000" cy="274320"/>
-          </a:xfrm>
-          <a:prstGeom prst="rect">
-            <a:avLst/>
-          </a:prstGeom>
-          <a:noFill/>
-        </p:spPr>
-        <p:txBody>
-          <a:bodyPr wrap="square">
-            <a:spAutoFit/>
-          </a:bodyPr>
-          <a:lstStyle/>
-          <a:p>
-            <a:pPr algn="l"/>
-            <a:r>
-              <a:rPr sz="900" b="0" i="0">
-                <a:solidFill>
-                  <a:srgbClr val="888888"/>
-                </a:solidFill>
-              </a:rPr>
-              <a:t>Suppression</a:t>
-            </a:r>
-          </a:p>
-        </p:txBody>
-      </p:sp>
-      <p:sp>
-        <p:nvSpPr>
-          <p:cNvPr id="8" name="Rectangle 7"/>
+              <a:t>Preprocessing</a:t>
+            </a:r>
+          </a:p>
+          <a:p>
+            <a:pPr algn="l"/>
+            <a:r>
+              <a:rPr sz="3600" b="1" i="0">
+                <a:solidFill>
+                  <a:srgbClr val="FF6060"/>
+                </a:solidFill>
+              </a:rPr>
+              <a:t>Makes It Worse</a:t>
+            </a:r>
+          </a:p>
+        </p:txBody>
+      </p:sp>
+      <p:sp>
+        <p:nvSpPr>
+          <p:cNvPr id="4" name="Rectangle 3"/>
           <p:cNvSpPr/>
           <p:nvPr/>
         </p:nvSpPr>
         <p:spPr>
           <a:xfrm>
-            <a:off x="731520" y="2487168"/>
-            <a:ext cx="5394960" cy="384048"/>
+            <a:off x="822960" y="1828800"/>
+            <a:ext cx="5303520" cy="2971800"/>
           </a:xfrm>
           <a:prstGeom prst="rect">
             <a:avLst/>
@@ -5473,25 +6387,70 @@
       </p:sp>
       <p:sp>
         <p:nvSpPr>
-          <p:cNvPr id="9" name="TextBox 8"/>
-          <p:cNvSpPr txBox="1"/>
-          <p:nvPr/>
-        </p:nvSpPr>
-        <p:spPr>
-          <a:xfrm>
-            <a:off x="822960" y="2532888"/>
-            <a:ext cx="1554480" cy="384048"/>
-          </a:xfrm>
-          <a:prstGeom prst="rect">
-            <a:avLst/>
-          </a:prstGeom>
-          <a:noFill/>
-        </p:spPr>
-        <p:txBody>
-          <a:bodyPr wrap="square">
-            <a:spAutoFit/>
-          </a:bodyPr>
-          <a:lstStyle/>
+          <p:cNvPr id="5" name="TextBox 4"/>
+          <p:cNvSpPr txBox="1"/>
+          <p:nvPr/>
+        </p:nvSpPr>
+        <p:spPr>
+          <a:xfrm>
+            <a:off x="1005840" y="1975104"/>
+            <a:ext cx="5303520" cy="201168"/>
+          </a:xfrm>
+          <a:prstGeom prst="rect">
+            <a:avLst/>
+          </a:prstGeom>
+          <a:noFill/>
+        </p:spPr>
+        <p:txBody>
+          <a:bodyPr wrap="square">
+            <a:spAutoFit/>
+          </a:bodyPr>
+          <a:lstStyle/>
+          <a:p>
+            <a:pPr algn="l"/>
+            <a:r>
+              <a:rPr sz="900" b="1" i="0">
+                <a:solidFill>
+                  <a:srgbClr val="60B8FF"/>
+                </a:solidFill>
+              </a:rPr>
+              <a:t>JPEG COMPRESSION   YOLOv8n patch - 48 images</a:t>
+            </a:r>
+          </a:p>
+        </p:txBody>
+      </p:sp>
+      <p:sp>
+        <p:nvSpPr>
+          <p:cNvPr id="6" name="TextBox 5"/>
+          <p:cNvSpPr txBox="1"/>
+          <p:nvPr/>
+        </p:nvSpPr>
+        <p:spPr>
+          <a:xfrm>
+            <a:off x="1005840" y="2267712"/>
+            <a:ext cx="4983480" cy="1691640"/>
+          </a:xfrm>
+          <a:prstGeom prst="rect">
+            <a:avLst/>
+          </a:prstGeom>
+          <a:noFill/>
+        </p:spPr>
+        <p:txBody>
+          <a:bodyPr wrap="square">
+            <a:spAutoFit/>
+          </a:bodyPr>
+          <a:lstStyle/>
+          <a:p>
+            <a:pPr algn="l"/>
+            <a:r>
+              <a:rPr sz="1000" b="0" i="0">
+                <a:solidFill>
+                  <a:srgbClr val="888888"/>
+                </a:solidFill>
+              </a:rPr>
+              <a:t>Quality        Suppression      vs. undefended</a:t>
+            </a:r>
+          </a:p>
           <a:p>
             <a:pPr algn="l"/>
             <a:r>
@@ -5500,191 +6459,65 @@
                   <a:srgbClr val="CCCCCC"/>
                 </a:solidFill>
               </a:rPr>
-              <a:t>v8n</a:t>
-            </a:r>
-          </a:p>
-        </p:txBody>
-      </p:sp>
-      <p:sp>
-        <p:nvSpPr>
-          <p:cNvPr id="10" name="TextBox 9"/>
-          <p:cNvSpPr txBox="1"/>
-          <p:nvPr/>
-        </p:nvSpPr>
-        <p:spPr>
-          <a:xfrm>
-            <a:off x="2468880" y="2532888"/>
-            <a:ext cx="1371600" cy="384048"/>
-          </a:xfrm>
-          <a:prstGeom prst="rect">
-            <a:avLst/>
-          </a:prstGeom>
-          <a:noFill/>
-        </p:spPr>
-        <p:txBody>
-          <a:bodyPr wrap="square">
-            <a:spAutoFit/>
-          </a:bodyPr>
-          <a:lstStyle/>
+              <a:t>none           85%              baseline</a:t>
+            </a:r>
+          </a:p>
           <a:p>
             <a:pPr algn="l"/>
             <a:r>
               <a:rPr sz="1200" b="0" i="0">
                 <a:solidFill>
-                  <a:srgbClr val="CCCCCC"/>
-                </a:solidFill>
-              </a:rPr>
-              <a:t>v11n</a:t>
-            </a:r>
-          </a:p>
-        </p:txBody>
-      </p:sp>
-      <p:sp>
-        <p:nvSpPr>
-          <p:cNvPr id="11" name="TextBox 10"/>
-          <p:cNvSpPr txBox="1"/>
-          <p:nvPr/>
-        </p:nvSpPr>
-        <p:spPr>
-          <a:xfrm>
-            <a:off x="3931920" y="2532888"/>
-            <a:ext cx="2286000" cy="384048"/>
-          </a:xfrm>
-          <a:prstGeom prst="rect">
-            <a:avLst/>
-          </a:prstGeom>
-          <a:noFill/>
-        </p:spPr>
-        <p:txBody>
-          <a:bodyPr wrap="square">
-            <a:spAutoFit/>
-          </a:bodyPr>
-          <a:lstStyle/>
-          <a:p>
-            <a:pPr algn="l"/>
-            <a:r>
-              <a:rPr sz="1200" b="1" i="0">
-                <a:solidFill>
-                  <a:srgbClr val="FFE066"/>
-                </a:solidFill>
-              </a:rPr>
-              <a:t>36.4%</a:t>
-            </a:r>
-          </a:p>
-        </p:txBody>
-      </p:sp>
-      <p:sp>
-        <p:nvSpPr>
-          <p:cNvPr id="12" name="TextBox 11"/>
-          <p:cNvSpPr txBox="1"/>
-          <p:nvPr/>
-        </p:nvSpPr>
-        <p:spPr>
-          <a:xfrm>
-            <a:off x="822960" y="2916936"/>
-            <a:ext cx="1554480" cy="384048"/>
-          </a:xfrm>
-          <a:prstGeom prst="rect">
-            <a:avLst/>
-          </a:prstGeom>
-          <a:noFill/>
-        </p:spPr>
-        <p:txBody>
-          <a:bodyPr wrap="square">
-            <a:spAutoFit/>
-          </a:bodyPr>
-          <a:lstStyle/>
+                  <a:srgbClr val="FF6060"/>
+                </a:solidFill>
+              </a:rPr>
+              <a:t>95             95%              +10 pp</a:t>
+            </a:r>
+          </a:p>
           <a:p>
             <a:pPr algn="l"/>
             <a:r>
               <a:rPr sz="1200" b="0" i="0">
                 <a:solidFill>
-                  <a:srgbClr val="CCCCCC"/>
-                </a:solidFill>
-              </a:rPr>
-              <a:t>v11n</a:t>
-            </a:r>
-          </a:p>
-        </p:txBody>
-      </p:sp>
-      <p:sp>
-        <p:nvSpPr>
-          <p:cNvPr id="13" name="TextBox 12"/>
-          <p:cNvSpPr txBox="1"/>
-          <p:nvPr/>
-        </p:nvSpPr>
-        <p:spPr>
-          <a:xfrm>
-            <a:off x="2468880" y="2916936"/>
-            <a:ext cx="1371600" cy="384048"/>
-          </a:xfrm>
-          <a:prstGeom prst="rect">
-            <a:avLst/>
-          </a:prstGeom>
-          <a:noFill/>
-        </p:spPr>
-        <p:txBody>
-          <a:bodyPr wrap="square">
-            <a:spAutoFit/>
-          </a:bodyPr>
-          <a:lstStyle/>
+                  <a:srgbClr val="FF6060"/>
+                </a:solidFill>
+              </a:rPr>
+              <a:t>85             90%              +5 pp</a:t>
+            </a:r>
+          </a:p>
           <a:p>
             <a:pPr algn="l"/>
             <a:r>
               <a:rPr sz="1200" b="0" i="0">
                 <a:solidFill>
-                  <a:srgbClr val="CCCCCC"/>
-                </a:solidFill>
-              </a:rPr>
-              <a:t>v8n</a:t>
-            </a:r>
-          </a:p>
-        </p:txBody>
-      </p:sp>
-      <p:sp>
-        <p:nvSpPr>
-          <p:cNvPr id="14" name="TextBox 13"/>
-          <p:cNvSpPr txBox="1"/>
-          <p:nvPr/>
-        </p:nvSpPr>
-        <p:spPr>
-          <a:xfrm>
-            <a:off x="3931920" y="2916936"/>
-            <a:ext cx="2286000" cy="384048"/>
-          </a:xfrm>
-          <a:prstGeom prst="rect">
-            <a:avLst/>
-          </a:prstGeom>
-          <a:noFill/>
-        </p:spPr>
-        <p:txBody>
-          <a:bodyPr wrap="square">
-            <a:spAutoFit/>
-          </a:bodyPr>
-          <a:lstStyle/>
-          <a:p>
-            <a:pPr algn="l"/>
-            <a:r>
-              <a:rPr sz="1200" b="1" i="0">
-                <a:solidFill>
-                  <a:srgbClr val="3EFFA0"/>
-                </a:solidFill>
-              </a:rPr>
-              <a:t>50.0%</a:t>
-            </a:r>
-          </a:p>
-        </p:txBody>
-      </p:sp>
-      <p:sp>
-        <p:nvSpPr>
-          <p:cNvPr id="15" name="Rectangle 14"/>
+                  <a:srgbClr val="FF6060"/>
+                </a:solidFill>
+              </a:rPr>
+              <a:t>75             90%              +5 pp</a:t>
+            </a:r>
+          </a:p>
+          <a:p>
+            <a:pPr algn="l"/>
+            <a:r>
+              <a:rPr sz="1200" b="0" i="0">
+                <a:solidFill>
+                  <a:srgbClr val="888888"/>
+                </a:solidFill>
+              </a:rPr>
+              <a:t>50             80%              -5 pp (clean -29 pp)</a:t>
+            </a:r>
+          </a:p>
+        </p:txBody>
+      </p:sp>
+      <p:sp>
+        <p:nvSpPr>
+          <p:cNvPr id="7" name="Rectangle 6"/>
           <p:cNvSpPr/>
           <p:nvPr/>
         </p:nvSpPr>
         <p:spPr>
           <a:xfrm>
-            <a:off x="731520" y="3255264"/>
-            <a:ext cx="5394960" cy="384048"/>
+            <a:off x="822960" y="4983480"/>
+            <a:ext cx="5303520" cy="822960"/>
           </a:xfrm>
           <a:prstGeom prst="rect">
             <a:avLst/>
@@ -5720,218 +6553,82 @@
       </p:sp>
       <p:sp>
         <p:nvSpPr>
-          <p:cNvPr id="16" name="TextBox 15"/>
-          <p:cNvSpPr txBox="1"/>
-          <p:nvPr/>
-        </p:nvSpPr>
-        <p:spPr>
-          <a:xfrm>
-            <a:off x="822960" y="3300984"/>
-            <a:ext cx="1554480" cy="384048"/>
-          </a:xfrm>
-          <a:prstGeom prst="rect">
-            <a:avLst/>
-          </a:prstGeom>
-          <a:noFill/>
-        </p:spPr>
-        <p:txBody>
-          <a:bodyPr wrap="square">
-            <a:spAutoFit/>
-          </a:bodyPr>
-          <a:lstStyle/>
-          <a:p>
-            <a:pPr algn="l"/>
-            <a:r>
-              <a:rPr sz="1200" b="0" i="0">
+          <p:cNvPr id="8" name="TextBox 7"/>
+          <p:cNvSpPr txBox="1"/>
+          <p:nvPr/>
+        </p:nvSpPr>
+        <p:spPr>
+          <a:xfrm>
+            <a:off x="1005840" y="5102352"/>
+            <a:ext cx="5303520" cy="201168"/>
+          </a:xfrm>
+          <a:prstGeom prst="rect">
+            <a:avLst/>
+          </a:prstGeom>
+          <a:noFill/>
+        </p:spPr>
+        <p:txBody>
+          <a:bodyPr wrap="square">
+            <a:spAutoFit/>
+          </a:bodyPr>
+          <a:lstStyle/>
+          <a:p>
+            <a:pPr algn="l"/>
+            <a:r>
+              <a:rPr sz="900" b="1" i="0">
+                <a:solidFill>
+                  <a:srgbClr val="60B8FF"/>
+                </a:solidFill>
+              </a:rPr>
+              <a:t>CROP-RESIZE</a:t>
+            </a:r>
+          </a:p>
+        </p:txBody>
+      </p:sp>
+      <p:sp>
+        <p:nvSpPr>
+          <p:cNvPr id="9" name="TextBox 8"/>
+          <p:cNvSpPr txBox="1"/>
+          <p:nvPr/>
+        </p:nvSpPr>
+        <p:spPr>
+          <a:xfrm>
+            <a:off x="1005840" y="5321808"/>
+            <a:ext cx="4983480" cy="411480"/>
+          </a:xfrm>
+          <a:prstGeom prst="rect">
+            <a:avLst/>
+          </a:prstGeom>
+          <a:noFill/>
+        </p:spPr>
+        <p:txBody>
+          <a:bodyPr wrap="square">
+            <a:spAutoFit/>
+          </a:bodyPr>
+          <a:lstStyle/>
+          <a:p>
+            <a:pPr algn="l"/>
+            <a:r>
+              <a:rPr sz="1100" b="0" i="0">
                 <a:solidFill>
                   <a:srgbClr val="CCCCCC"/>
                 </a:solidFill>
               </a:rPr>
-              <a:t>v26n</a:t>
-            </a:r>
-          </a:p>
-        </p:txBody>
-      </p:sp>
-      <p:sp>
-        <p:nvSpPr>
-          <p:cNvPr id="17" name="TextBox 16"/>
-          <p:cNvSpPr txBox="1"/>
-          <p:nvPr/>
-        </p:nvSpPr>
-        <p:spPr>
-          <a:xfrm>
-            <a:off x="2468880" y="3300984"/>
-            <a:ext cx="1371600" cy="384048"/>
-          </a:xfrm>
-          <a:prstGeom prst="rect">
-            <a:avLst/>
-          </a:prstGeom>
-          <a:noFill/>
-        </p:spPr>
-        <p:txBody>
-          <a:bodyPr wrap="square">
-            <a:spAutoFit/>
-          </a:bodyPr>
-          <a:lstStyle/>
-          <a:p>
-            <a:pPr algn="l"/>
-            <a:r>
-              <a:rPr sz="1200" b="0" i="0">
-                <a:solidFill>
-                  <a:srgbClr val="CCCCCC"/>
-                </a:solidFill>
-              </a:rPr>
-              <a:t>v8n</a:t>
-            </a:r>
-          </a:p>
-        </p:txBody>
-      </p:sp>
-      <p:sp>
-        <p:nvSpPr>
-          <p:cNvPr id="18" name="TextBox 17"/>
-          <p:cNvSpPr txBox="1"/>
-          <p:nvPr/>
-        </p:nvSpPr>
-        <p:spPr>
-          <a:xfrm>
-            <a:off x="3931920" y="3300984"/>
-            <a:ext cx="2286000" cy="384048"/>
-          </a:xfrm>
-          <a:prstGeom prst="rect">
-            <a:avLst/>
-          </a:prstGeom>
-          <a:noFill/>
-        </p:spPr>
-        <p:txBody>
-          <a:bodyPr wrap="square">
-            <a:spAutoFit/>
-          </a:bodyPr>
-          <a:lstStyle/>
-          <a:p>
-            <a:pPr algn="l"/>
-            <a:r>
-              <a:rPr sz="1200" b="1" i="0">
-                <a:solidFill>
-                  <a:srgbClr val="3EFFA0"/>
-                </a:solidFill>
-              </a:rPr>
-              <a:t>45.0%</a:t>
-            </a:r>
-          </a:p>
-        </p:txBody>
-      </p:sp>
-      <p:sp>
-        <p:nvSpPr>
-          <p:cNvPr id="19" name="TextBox 18"/>
-          <p:cNvSpPr txBox="1"/>
-          <p:nvPr/>
-        </p:nvSpPr>
-        <p:spPr>
-          <a:xfrm>
-            <a:off x="822960" y="3685032"/>
-            <a:ext cx="1554480" cy="384048"/>
-          </a:xfrm>
-          <a:prstGeom prst="rect">
-            <a:avLst/>
-          </a:prstGeom>
-          <a:noFill/>
-        </p:spPr>
-        <p:txBody>
-          <a:bodyPr wrap="square">
-            <a:spAutoFit/>
-          </a:bodyPr>
-          <a:lstStyle/>
-          <a:p>
-            <a:pPr algn="l"/>
-            <a:r>
-              <a:rPr sz="1200" b="0" i="0">
-                <a:solidFill>
-                  <a:srgbClr val="CCCCCC"/>
-                </a:solidFill>
-              </a:rPr>
-              <a:t>v26n</a:t>
-            </a:r>
-          </a:p>
-        </p:txBody>
-      </p:sp>
-      <p:sp>
-        <p:nvSpPr>
-          <p:cNvPr id="20" name="TextBox 19"/>
-          <p:cNvSpPr txBox="1"/>
-          <p:nvPr/>
-        </p:nvSpPr>
-        <p:spPr>
-          <a:xfrm>
-            <a:off x="2468880" y="3685032"/>
-            <a:ext cx="1371600" cy="384048"/>
-          </a:xfrm>
-          <a:prstGeom prst="rect">
-            <a:avLst/>
-          </a:prstGeom>
-          <a:noFill/>
-        </p:spPr>
-        <p:txBody>
-          <a:bodyPr wrap="square">
-            <a:spAutoFit/>
-          </a:bodyPr>
-          <a:lstStyle/>
-          <a:p>
-            <a:pPr algn="l"/>
-            <a:r>
-              <a:rPr sz="1200" b="0" i="0">
-                <a:solidFill>
-                  <a:srgbClr val="CCCCCC"/>
-                </a:solidFill>
-              </a:rPr>
-              <a:t>v11n</a:t>
-            </a:r>
-          </a:p>
-        </p:txBody>
-      </p:sp>
-      <p:sp>
-        <p:nvSpPr>
-          <p:cNvPr id="21" name="TextBox 20"/>
-          <p:cNvSpPr txBox="1"/>
-          <p:nvPr/>
-        </p:nvSpPr>
-        <p:spPr>
-          <a:xfrm>
-            <a:off x="3931920" y="3685032"/>
-            <a:ext cx="2286000" cy="384048"/>
-          </a:xfrm>
-          <a:prstGeom prst="rect">
-            <a:avLst/>
-          </a:prstGeom>
-          <a:noFill/>
-        </p:spPr>
-        <p:txBody>
-          <a:bodyPr wrap="square">
-            <a:spAutoFit/>
-          </a:bodyPr>
-          <a:lstStyle/>
-          <a:p>
-            <a:pPr algn="l"/>
-            <a:r>
-              <a:rPr sz="1200" b="1" i="0">
-                <a:solidFill>
-                  <a:srgbClr val="FFE066"/>
-                </a:solidFill>
-              </a:rPr>
-              <a:t>24.2%</a:t>
-            </a:r>
-          </a:p>
-        </p:txBody>
-      </p:sp>
-      <p:sp>
-        <p:nvSpPr>
-          <p:cNvPr id="22" name="Rectangle 21"/>
+              <a:t>High variance across seeds. No consistent reduction at 95% or 90% retention. Occasional reductions at 85% retention were unreliable and costly to clean detection rate.</a:t>
+            </a:r>
+          </a:p>
+        </p:txBody>
+      </p:sp>
+      <p:sp>
+        <p:nvSpPr>
+          <p:cNvPr id="10" name="Rectangle 9"/>
           <p:cNvSpPr/>
           <p:nvPr/>
         </p:nvSpPr>
         <p:spPr>
           <a:xfrm>
-            <a:off x="731520" y="4023360"/>
-            <a:ext cx="5394960" cy="384048"/>
+            <a:off x="6537960" y="1828800"/>
+            <a:ext cx="5303520" cy="2971800"/>
           </a:xfrm>
           <a:prstGeom prst="rect">
             <a:avLst/>
@@ -5967,25 +6664,70 @@
       </p:sp>
       <p:sp>
         <p:nvSpPr>
-          <p:cNvPr id="23" name="TextBox 22"/>
-          <p:cNvSpPr txBox="1"/>
-          <p:nvPr/>
-        </p:nvSpPr>
-        <p:spPr>
-          <a:xfrm>
-            <a:off x="822960" y="4069080"/>
-            <a:ext cx="1554480" cy="384048"/>
-          </a:xfrm>
-          <a:prstGeom prst="rect">
-            <a:avLst/>
-          </a:prstGeom>
-          <a:noFill/>
-        </p:spPr>
-        <p:txBody>
-          <a:bodyPr wrap="square">
-            <a:spAutoFit/>
-          </a:bodyPr>
-          <a:lstStyle/>
+          <p:cNvPr id="11" name="TextBox 10"/>
+          <p:cNvSpPr txBox="1"/>
+          <p:nvPr/>
+        </p:nvSpPr>
+        <p:spPr>
+          <a:xfrm>
+            <a:off x="6720840" y="1975104"/>
+            <a:ext cx="5303520" cy="201168"/>
+          </a:xfrm>
+          <a:prstGeom prst="rect">
+            <a:avLst/>
+          </a:prstGeom>
+          <a:noFill/>
+        </p:spPr>
+        <p:txBody>
+          <a:bodyPr wrap="square">
+            <a:spAutoFit/>
+          </a:bodyPr>
+          <a:lstStyle/>
+          <a:p>
+            <a:pPr algn="l"/>
+            <a:r>
+              <a:rPr sz="900" b="1" i="0">
+                <a:solidFill>
+                  <a:srgbClr val="60B8FF"/>
+                </a:solidFill>
+              </a:rPr>
+              <a:t>GAUSSIAN BLUR</a:t>
+            </a:r>
+          </a:p>
+        </p:txBody>
+      </p:sp>
+      <p:sp>
+        <p:nvSpPr>
+          <p:cNvPr id="12" name="TextBox 11"/>
+          <p:cNvSpPr txBox="1"/>
+          <p:nvPr/>
+        </p:nvSpPr>
+        <p:spPr>
+          <a:xfrm>
+            <a:off x="6720840" y="2267712"/>
+            <a:ext cx="4983480" cy="1371600"/>
+          </a:xfrm>
+          <a:prstGeom prst="rect">
+            <a:avLst/>
+          </a:prstGeom>
+          <a:noFill/>
+        </p:spPr>
+        <p:txBody>
+          <a:bodyPr wrap="square">
+            <a:spAutoFit/>
+          </a:bodyPr>
+          <a:lstStyle/>
+          <a:p>
+            <a:pPr algn="l"/>
+            <a:r>
+              <a:rPr sz="1000" b="0" i="0">
+                <a:solidFill>
+                  <a:srgbClr val="888888"/>
+                </a:solidFill>
+              </a:rPr>
+              <a:t>Sigma          Suppression      vs. undefended</a:t>
+            </a:r>
+          </a:p>
           <a:p>
             <a:pPr algn="l"/>
             <a:r>
@@ -5994,333 +6736,60 @@
                   <a:srgbClr val="CCCCCC"/>
                 </a:solidFill>
               </a:rPr>
-              <a:t>v8n</a:t>
-            </a:r>
-          </a:p>
-        </p:txBody>
-      </p:sp>
-      <p:sp>
-        <p:nvSpPr>
-          <p:cNvPr id="24" name="TextBox 23"/>
-          <p:cNvSpPr txBox="1"/>
-          <p:nvPr/>
-        </p:nvSpPr>
-        <p:spPr>
-          <a:xfrm>
-            <a:off x="2468880" y="4069080"/>
-            <a:ext cx="1371600" cy="384048"/>
-          </a:xfrm>
-          <a:prstGeom prst="rect">
-            <a:avLst/>
-          </a:prstGeom>
-          <a:noFill/>
-        </p:spPr>
-        <p:txBody>
-          <a:bodyPr wrap="square">
-            <a:spAutoFit/>
-          </a:bodyPr>
-          <a:lstStyle/>
+              <a:t>none           85%              baseline</a:t>
+            </a:r>
+          </a:p>
           <a:p>
             <a:pPr algn="l"/>
             <a:r>
               <a:rPr sz="1200" b="0" i="0">
                 <a:solidFill>
-                  <a:srgbClr val="CCCCCC"/>
-                </a:solidFill>
-              </a:rPr>
-              <a:t>v26n</a:t>
-            </a:r>
-          </a:p>
-        </p:txBody>
-      </p:sp>
-      <p:sp>
-        <p:nvSpPr>
-          <p:cNvPr id="25" name="TextBox 24"/>
-          <p:cNvSpPr txBox="1"/>
-          <p:nvPr/>
-        </p:nvSpPr>
-        <p:spPr>
-          <a:xfrm>
-            <a:off x="3931920" y="4069080"/>
-            <a:ext cx="2286000" cy="384048"/>
-          </a:xfrm>
-          <a:prstGeom prst="rect">
-            <a:avLst/>
-          </a:prstGeom>
-          <a:noFill/>
-        </p:spPr>
-        <p:txBody>
-          <a:bodyPr wrap="square">
-            <a:spAutoFit/>
-          </a:bodyPr>
-          <a:lstStyle/>
-          <a:p>
-            <a:pPr algn="l"/>
-            <a:r>
-              <a:rPr sz="1200" b="1" i="0">
-                <a:solidFill>
                   <a:srgbClr val="FF6060"/>
                 </a:solidFill>
               </a:rPr>
-              <a:t>11.6%</a:t>
-            </a:r>
-          </a:p>
-        </p:txBody>
-      </p:sp>
-      <p:sp>
-        <p:nvSpPr>
-          <p:cNvPr id="26" name="TextBox 25"/>
-          <p:cNvSpPr txBox="1"/>
-          <p:nvPr/>
-        </p:nvSpPr>
-        <p:spPr>
-          <a:xfrm>
-            <a:off x="822960" y="4453128"/>
-            <a:ext cx="1554480" cy="384048"/>
-          </a:xfrm>
-          <a:prstGeom prst="rect">
-            <a:avLst/>
-          </a:prstGeom>
-          <a:noFill/>
-        </p:spPr>
-        <p:txBody>
-          <a:bodyPr wrap="square">
-            <a:spAutoFit/>
-          </a:bodyPr>
-          <a:lstStyle/>
+              <a:t>1.0            90%              +5 pp</a:t>
+            </a:r>
+          </a:p>
           <a:p>
             <a:pPr algn="l"/>
             <a:r>
               <a:rPr sz="1200" b="0" i="0">
                 <a:solidFill>
-                  <a:srgbClr val="CCCCCC"/>
-                </a:solidFill>
-              </a:rPr>
-              <a:t>v11n</a:t>
-            </a:r>
-          </a:p>
-        </p:txBody>
-      </p:sp>
-      <p:sp>
-        <p:nvSpPr>
-          <p:cNvPr id="27" name="TextBox 26"/>
-          <p:cNvSpPr txBox="1"/>
-          <p:nvPr/>
-        </p:nvSpPr>
-        <p:spPr>
-          <a:xfrm>
-            <a:off x="2468880" y="4453128"/>
-            <a:ext cx="1371600" cy="384048"/>
-          </a:xfrm>
-          <a:prstGeom prst="rect">
-            <a:avLst/>
-          </a:prstGeom>
-          <a:noFill/>
-        </p:spPr>
-        <p:txBody>
-          <a:bodyPr wrap="square">
-            <a:spAutoFit/>
-          </a:bodyPr>
-          <a:lstStyle/>
+                  <a:srgbClr val="FF6060"/>
+                </a:solidFill>
+              </a:rPr>
+              <a:t>2.0            100%             +15 pp</a:t>
+            </a:r>
+          </a:p>
           <a:p>
             <a:pPr algn="l"/>
             <a:r>
               <a:rPr sz="1200" b="0" i="0">
                 <a:solidFill>
-                  <a:srgbClr val="CCCCCC"/>
-                </a:solidFill>
-              </a:rPr>
-              <a:t>v26n</a:t>
-            </a:r>
-          </a:p>
-        </p:txBody>
-      </p:sp>
-      <p:sp>
-        <p:nvSpPr>
-          <p:cNvPr id="28" name="TextBox 27"/>
-          <p:cNvSpPr txBox="1"/>
-          <p:nvPr/>
-        </p:nvSpPr>
-        <p:spPr>
-          <a:xfrm>
-            <a:off x="3931920" y="4453128"/>
-            <a:ext cx="2286000" cy="384048"/>
-          </a:xfrm>
-          <a:prstGeom prst="rect">
-            <a:avLst/>
-          </a:prstGeom>
-          <a:noFill/>
-        </p:spPr>
-        <p:txBody>
-          <a:bodyPr wrap="square">
-            <a:spAutoFit/>
-          </a:bodyPr>
-          <a:lstStyle/>
-          <a:p>
-            <a:pPr algn="l"/>
-            <a:r>
-              <a:rPr sz="1200" b="1" i="0">
-                <a:solidFill>
                   <a:srgbClr val="FF6060"/>
                 </a:solidFill>
               </a:rPr>
-              <a:t>9.3%</a:t>
-            </a:r>
-          </a:p>
-        </p:txBody>
-      </p:sp>
-      <p:sp>
-        <p:nvSpPr>
-          <p:cNvPr id="29" name="TextBox 28"/>
-          <p:cNvSpPr txBox="1"/>
-          <p:nvPr/>
-        </p:nvSpPr>
-        <p:spPr>
-          <a:xfrm>
-            <a:off x="6400800" y="1920240"/>
-            <a:ext cx="5212080" cy="274320"/>
-          </a:xfrm>
-          <a:prstGeom prst="rect">
-            <a:avLst/>
-          </a:prstGeom>
-          <a:noFill/>
-        </p:spPr>
-        <p:txBody>
-          <a:bodyPr wrap="square">
-            <a:spAutoFit/>
-          </a:bodyPr>
-          <a:lstStyle/>
-          <a:p>
-            <a:pPr algn="l"/>
-            <a:r>
-              <a:rPr sz="900" b="1" i="0">
-                <a:solidFill>
-                  <a:srgbClr val="60B8FF"/>
-                </a:solidFill>
-              </a:rPr>
-              <a:t>JOINT PATCHES</a:t>
-            </a:r>
-          </a:p>
-        </p:txBody>
-      </p:sp>
-      <p:sp>
-        <p:nvSpPr>
-          <p:cNvPr id="30" name="TextBox 29"/>
-          <p:cNvSpPr txBox="1"/>
-          <p:nvPr/>
-        </p:nvSpPr>
-        <p:spPr>
-          <a:xfrm>
-            <a:off x="6400800" y="2240280"/>
-            <a:ext cx="1828800" cy="274320"/>
-          </a:xfrm>
-          <a:prstGeom prst="rect">
-            <a:avLst/>
-          </a:prstGeom>
-          <a:noFill/>
-        </p:spPr>
-        <p:txBody>
-          <a:bodyPr wrap="square">
-            <a:spAutoFit/>
-          </a:bodyPr>
-          <a:lstStyle/>
-          <a:p>
-            <a:pPr algn="l"/>
-            <a:r>
-              <a:rPr sz="900" b="0" i="0">
-                <a:solidFill>
-                  <a:srgbClr val="888888"/>
-                </a:solidFill>
-              </a:rPr>
-              <a:t>Joint source</a:t>
-            </a:r>
-          </a:p>
-        </p:txBody>
-      </p:sp>
-      <p:sp>
-        <p:nvSpPr>
-          <p:cNvPr id="31" name="TextBox 30"/>
-          <p:cNvSpPr txBox="1"/>
-          <p:nvPr/>
-        </p:nvSpPr>
-        <p:spPr>
-          <a:xfrm>
-            <a:off x="8321040" y="2240280"/>
-            <a:ext cx="1188720" cy="274320"/>
-          </a:xfrm>
-          <a:prstGeom prst="rect">
-            <a:avLst/>
-          </a:prstGeom>
-          <a:noFill/>
-        </p:spPr>
-        <p:txBody>
-          <a:bodyPr wrap="square">
-            <a:spAutoFit/>
-          </a:bodyPr>
-          <a:lstStyle/>
-          <a:p>
-            <a:pPr algn="l"/>
-            <a:r>
-              <a:rPr sz="900" b="0" i="0">
-                <a:solidFill>
-                  <a:srgbClr val="888888"/>
-                </a:solidFill>
-              </a:rPr>
-              <a:t>Eval</a:t>
-            </a:r>
-          </a:p>
-        </p:txBody>
-      </p:sp>
-      <p:sp>
-        <p:nvSpPr>
-          <p:cNvPr id="32" name="TextBox 31"/>
-          <p:cNvSpPr txBox="1"/>
-          <p:nvPr/>
-        </p:nvSpPr>
-        <p:spPr>
-          <a:xfrm>
-            <a:off x="9601200" y="2240280"/>
-            <a:ext cx="1371600" cy="274320"/>
-          </a:xfrm>
-          <a:prstGeom prst="rect">
-            <a:avLst/>
-          </a:prstGeom>
-          <a:noFill/>
-        </p:spPr>
-        <p:txBody>
-          <a:bodyPr wrap="square">
-            <a:spAutoFit/>
-          </a:bodyPr>
-          <a:lstStyle/>
-          <a:p>
-            <a:pPr algn="l"/>
-            <a:r>
-              <a:rPr sz="900" b="0" i="0">
-                <a:solidFill>
-                  <a:srgbClr val="888888"/>
-                </a:solidFill>
-              </a:rPr>
-              <a:t>Suppression</a:t>
-            </a:r>
-          </a:p>
-        </p:txBody>
-      </p:sp>
-      <p:sp>
-        <p:nvSpPr>
-          <p:cNvPr id="33" name="Rectangle 32"/>
+              <a:t>3.0            95%              +10 pp</a:t>
+            </a:r>
+          </a:p>
+        </p:txBody>
+      </p:sp>
+      <p:sp>
+        <p:nvSpPr>
+          <p:cNvPr id="13" name="Rectangle 12"/>
           <p:cNvSpPr/>
           <p:nvPr/>
         </p:nvSpPr>
         <p:spPr>
           <a:xfrm>
-            <a:off x="6309360" y="2487168"/>
-            <a:ext cx="5212080" cy="384048"/>
+            <a:off x="6537960" y="4572000"/>
+            <a:ext cx="5303520" cy="1234440"/>
           </a:xfrm>
           <a:prstGeom prst="rect">
             <a:avLst/>
           </a:prstGeom>
           <a:solidFill>
-            <a:srgbClr val="12121A"/>
+            <a:srgbClr val="0D1A12"/>
           </a:solidFill>
           <a:ln>
             <a:noFill/>
@@ -6350,460 +6819,68 @@
       </p:sp>
       <p:sp>
         <p:nvSpPr>
-          <p:cNvPr id="34" name="TextBox 33"/>
-          <p:cNvSpPr txBox="1"/>
-          <p:nvPr/>
-        </p:nvSpPr>
-        <p:spPr>
-          <a:xfrm>
-            <a:off x="6400800" y="2532888"/>
-            <a:ext cx="1828800" cy="384048"/>
-          </a:xfrm>
-          <a:prstGeom prst="rect">
-            <a:avLst/>
-          </a:prstGeom>
-          <a:noFill/>
-        </p:spPr>
-        <p:txBody>
-          <a:bodyPr wrap="square">
-            <a:spAutoFit/>
-          </a:bodyPr>
-          <a:lstStyle/>
-          <a:p>
-            <a:pPr algn="l"/>
-            <a:r>
-              <a:rPr sz="1200" b="0" i="0">
+          <p:cNvPr id="14" name="TextBox 13"/>
+          <p:cNvSpPr txBox="1"/>
+          <p:nvPr/>
+        </p:nvSpPr>
+        <p:spPr>
+          <a:xfrm>
+            <a:off x="6720840" y="4709160"/>
+            <a:ext cx="5303520" cy="201168"/>
+          </a:xfrm>
+          <a:prstGeom prst="rect">
+            <a:avLst/>
+          </a:prstGeom>
+          <a:noFill/>
+        </p:spPr>
+        <p:txBody>
+          <a:bodyPr wrap="square">
+            <a:spAutoFit/>
+          </a:bodyPr>
+          <a:lstStyle/>
+          <a:p>
+            <a:pPr algn="l"/>
+            <a:r>
+              <a:rPr sz="900" b="1" i="0">
+                <a:solidFill>
+                  <a:srgbClr val="60B8FF"/>
+                </a:solidFill>
+              </a:rPr>
+              <a:t>WHY</a:t>
+            </a:r>
+          </a:p>
+        </p:txBody>
+      </p:sp>
+      <p:sp>
+        <p:nvSpPr>
+          <p:cNvPr id="15" name="TextBox 14"/>
+          <p:cNvSpPr txBox="1"/>
+          <p:nvPr/>
+        </p:nvSpPr>
+        <p:spPr>
+          <a:xfrm>
+            <a:off x="6720840" y="4937760"/>
+            <a:ext cx="4983480" cy="640080"/>
+          </a:xfrm>
+          <a:prstGeom prst="rect">
+            <a:avLst/>
+          </a:prstGeom>
+          <a:noFill/>
+        </p:spPr>
+        <p:txBody>
+          <a:bodyPr wrap="square">
+            <a:spAutoFit/>
+          </a:bodyPr>
+          <a:lstStyle/>
+          <a:p>
+            <a:pPr algn="l"/>
+            <a:r>
+              <a:rPr sz="1100" b="0" i="0">
                 <a:solidFill>
                   <a:srgbClr val="CCCCCC"/>
                 </a:solidFill>
               </a:rPr>
-              <a:t>v8n + v11n</a:t>
-            </a:r>
-          </a:p>
-        </p:txBody>
-      </p:sp>
-      <p:sp>
-        <p:nvSpPr>
-          <p:cNvPr id="35" name="TextBox 34"/>
-          <p:cNvSpPr txBox="1"/>
-          <p:nvPr/>
-        </p:nvSpPr>
-        <p:spPr>
-          <a:xfrm>
-            <a:off x="8321040" y="2532888"/>
-            <a:ext cx="1188720" cy="384048"/>
-          </a:xfrm>
-          <a:prstGeom prst="rect">
-            <a:avLst/>
-          </a:prstGeom>
-          <a:noFill/>
-        </p:spPr>
-        <p:txBody>
-          <a:bodyPr wrap="square">
-            <a:spAutoFit/>
-          </a:bodyPr>
-          <a:lstStyle/>
-          <a:p>
-            <a:pPr algn="l"/>
-            <a:r>
-              <a:rPr sz="1200" b="0" i="0">
-                <a:solidFill>
-                  <a:srgbClr val="CCCCCC"/>
-                </a:solidFill>
-              </a:rPr>
-              <a:t>v8n</a:t>
-            </a:r>
-          </a:p>
-        </p:txBody>
-      </p:sp>
-      <p:sp>
-        <p:nvSpPr>
-          <p:cNvPr id="36" name="TextBox 35"/>
-          <p:cNvSpPr txBox="1"/>
-          <p:nvPr/>
-        </p:nvSpPr>
-        <p:spPr>
-          <a:xfrm>
-            <a:off x="9601200" y="2532888"/>
-            <a:ext cx="1371600" cy="384048"/>
-          </a:xfrm>
-          <a:prstGeom prst="rect">
-            <a:avLst/>
-          </a:prstGeom>
-          <a:noFill/>
-        </p:spPr>
-        <p:txBody>
-          <a:bodyPr wrap="square">
-            <a:spAutoFit/>
-          </a:bodyPr>
-          <a:lstStyle/>
-          <a:p>
-            <a:pPr algn="l"/>
-            <a:r>
-              <a:rPr sz="1200" b="1" i="0">
-                <a:solidFill>
-                  <a:srgbClr val="3EFFA0"/>
-                </a:solidFill>
-              </a:rPr>
-              <a:t>85%</a:t>
-            </a:r>
-          </a:p>
-        </p:txBody>
-      </p:sp>
-      <p:sp>
-        <p:nvSpPr>
-          <p:cNvPr id="37" name="TextBox 36"/>
-          <p:cNvSpPr txBox="1"/>
-          <p:nvPr/>
-        </p:nvSpPr>
-        <p:spPr>
-          <a:xfrm>
-            <a:off x="6400800" y="2916936"/>
-            <a:ext cx="1828800" cy="384048"/>
-          </a:xfrm>
-          <a:prstGeom prst="rect">
-            <a:avLst/>
-          </a:prstGeom>
-          <a:noFill/>
-        </p:spPr>
-        <p:txBody>
-          <a:bodyPr wrap="square">
-            <a:spAutoFit/>
-          </a:bodyPr>
-          <a:lstStyle/>
-          <a:p>
-            <a:pPr algn="l"/>
-            <a:r>
-              <a:rPr sz="1200" b="0" i="0">
-                <a:solidFill>
-                  <a:srgbClr val="CCCCCC"/>
-                </a:solidFill>
-              </a:rPr>
-              <a:t>v8n + v11n</a:t>
-            </a:r>
-          </a:p>
-        </p:txBody>
-      </p:sp>
-      <p:sp>
-        <p:nvSpPr>
-          <p:cNvPr id="38" name="TextBox 37"/>
-          <p:cNvSpPr txBox="1"/>
-          <p:nvPr/>
-        </p:nvSpPr>
-        <p:spPr>
-          <a:xfrm>
-            <a:off x="8321040" y="2916936"/>
-            <a:ext cx="1188720" cy="384048"/>
-          </a:xfrm>
-          <a:prstGeom prst="rect">
-            <a:avLst/>
-          </a:prstGeom>
-          <a:noFill/>
-        </p:spPr>
-        <p:txBody>
-          <a:bodyPr wrap="square">
-            <a:spAutoFit/>
-          </a:bodyPr>
-          <a:lstStyle/>
-          <a:p>
-            <a:pPr algn="l"/>
-            <a:r>
-              <a:rPr sz="1200" b="0" i="0">
-                <a:solidFill>
-                  <a:srgbClr val="CCCCCC"/>
-                </a:solidFill>
-              </a:rPr>
-              <a:t>v11n</a:t>
-            </a:r>
-          </a:p>
-        </p:txBody>
-      </p:sp>
-      <p:sp>
-        <p:nvSpPr>
-          <p:cNvPr id="39" name="TextBox 38"/>
-          <p:cNvSpPr txBox="1"/>
-          <p:nvPr/>
-        </p:nvSpPr>
-        <p:spPr>
-          <a:xfrm>
-            <a:off x="9601200" y="2916936"/>
-            <a:ext cx="1371600" cy="384048"/>
-          </a:xfrm>
-          <a:prstGeom prst="rect">
-            <a:avLst/>
-          </a:prstGeom>
-          <a:noFill/>
-        </p:spPr>
-        <p:txBody>
-          <a:bodyPr wrap="square">
-            <a:spAutoFit/>
-          </a:bodyPr>
-          <a:lstStyle/>
-          <a:p>
-            <a:pPr algn="l"/>
-            <a:r>
-              <a:rPr sz="1200" b="1" i="0">
-                <a:solidFill>
-                  <a:srgbClr val="3EFFA0"/>
-                </a:solidFill>
-              </a:rPr>
-              <a:t>66.7%</a:t>
-            </a:r>
-          </a:p>
-        </p:txBody>
-      </p:sp>
-      <p:sp>
-        <p:nvSpPr>
-          <p:cNvPr id="40" name="Rectangle 39"/>
-          <p:cNvSpPr/>
-          <p:nvPr/>
-        </p:nvSpPr>
-        <p:spPr>
-          <a:xfrm>
-            <a:off x="6309360" y="3255264"/>
-            <a:ext cx="5212080" cy="384048"/>
-          </a:xfrm>
-          <a:prstGeom prst="rect">
-            <a:avLst/>
-          </a:prstGeom>
-          <a:solidFill>
-            <a:srgbClr val="12121A"/>
-          </a:solidFill>
-          <a:ln>
-            <a:noFill/>
-          </a:ln>
-        </p:spPr>
-        <p:style>
-          <a:lnRef idx="1">
-            <a:schemeClr val="accent1"/>
-          </a:lnRef>
-          <a:fillRef idx="3">
-            <a:schemeClr val="accent1"/>
-          </a:fillRef>
-          <a:effectRef idx="2">
-            <a:schemeClr val="accent1"/>
-          </a:effectRef>
-          <a:fontRef idx="minor">
-            <a:schemeClr val="lt1"/>
-          </a:fontRef>
-        </p:style>
-        <p:txBody>
-          <a:bodyPr rtlCol="0" anchor="ctr"/>
-          <a:lstStyle/>
-          <a:p>
-            <a:pPr algn="ctr"/>
-          </a:p>
-        </p:txBody>
-      </p:sp>
-      <p:sp>
-        <p:nvSpPr>
-          <p:cNvPr id="41" name="TextBox 40"/>
-          <p:cNvSpPr txBox="1"/>
-          <p:nvPr/>
-        </p:nvSpPr>
-        <p:spPr>
-          <a:xfrm>
-            <a:off x="6400800" y="3300984"/>
-            <a:ext cx="1828800" cy="384048"/>
-          </a:xfrm>
-          <a:prstGeom prst="rect">
-            <a:avLst/>
-          </a:prstGeom>
-          <a:noFill/>
-        </p:spPr>
-        <p:txBody>
-          <a:bodyPr wrap="square">
-            <a:spAutoFit/>
-          </a:bodyPr>
-          <a:lstStyle/>
-          <a:p>
-            <a:pPr algn="l"/>
-            <a:r>
-              <a:rPr sz="1200" b="0" i="0">
-                <a:solidFill>
-                  <a:srgbClr val="CCCCCC"/>
-                </a:solidFill>
-              </a:rPr>
-              <a:t>v8n + v26n</a:t>
-            </a:r>
-          </a:p>
-        </p:txBody>
-      </p:sp>
-      <p:sp>
-        <p:nvSpPr>
-          <p:cNvPr id="42" name="TextBox 41"/>
-          <p:cNvSpPr txBox="1"/>
-          <p:nvPr/>
-        </p:nvSpPr>
-        <p:spPr>
-          <a:xfrm>
-            <a:off x="8321040" y="3300984"/>
-            <a:ext cx="1188720" cy="384048"/>
-          </a:xfrm>
-          <a:prstGeom prst="rect">
-            <a:avLst/>
-          </a:prstGeom>
-          <a:noFill/>
-        </p:spPr>
-        <p:txBody>
-          <a:bodyPr wrap="square">
-            <a:spAutoFit/>
-          </a:bodyPr>
-          <a:lstStyle/>
-          <a:p>
-            <a:pPr algn="l"/>
-            <a:r>
-              <a:rPr sz="1200" b="0" i="0">
-                <a:solidFill>
-                  <a:srgbClr val="CCCCCC"/>
-                </a:solidFill>
-              </a:rPr>
-              <a:t>v26n</a:t>
-            </a:r>
-          </a:p>
-        </p:txBody>
-      </p:sp>
-      <p:sp>
-        <p:nvSpPr>
-          <p:cNvPr id="43" name="TextBox 42"/>
-          <p:cNvSpPr txBox="1"/>
-          <p:nvPr/>
-        </p:nvSpPr>
-        <p:spPr>
-          <a:xfrm>
-            <a:off x="9601200" y="3300984"/>
-            <a:ext cx="1371600" cy="384048"/>
-          </a:xfrm>
-          <a:prstGeom prst="rect">
-            <a:avLst/>
-          </a:prstGeom>
-          <a:noFill/>
-        </p:spPr>
-        <p:txBody>
-          <a:bodyPr wrap="square">
-            <a:spAutoFit/>
-          </a:bodyPr>
-          <a:lstStyle/>
-          <a:p>
-            <a:pPr algn="l"/>
-            <a:r>
-              <a:rPr sz="1200" b="1" i="0">
-                <a:solidFill>
-                  <a:srgbClr val="FF6060"/>
-                </a:solidFill>
-              </a:rPr>
-              <a:t>18.6%</a:t>
-            </a:r>
-          </a:p>
-        </p:txBody>
-      </p:sp>
-      <p:sp>
-        <p:nvSpPr>
-          <p:cNvPr id="44" name="Rectangle 43"/>
-          <p:cNvSpPr/>
-          <p:nvPr/>
-        </p:nvSpPr>
-        <p:spPr>
-          <a:xfrm>
-            <a:off x="6400800" y="3959352"/>
-            <a:ext cx="5212080" cy="1371600"/>
-          </a:xfrm>
-          <a:prstGeom prst="rect">
-            <a:avLst/>
-          </a:prstGeom>
-          <a:solidFill>
-            <a:srgbClr val="0D1220"/>
-          </a:solidFill>
-          <a:ln>
-            <a:noFill/>
-          </a:ln>
-        </p:spPr>
-        <p:style>
-          <a:lnRef idx="1">
-            <a:schemeClr val="accent1"/>
-          </a:lnRef>
-          <a:fillRef idx="3">
-            <a:schemeClr val="accent1"/>
-          </a:fillRef>
-          <a:effectRef idx="2">
-            <a:schemeClr val="accent1"/>
-          </a:effectRef>
-          <a:fontRef idx="minor">
-            <a:schemeClr val="lt1"/>
-          </a:fontRef>
-        </p:style>
-        <p:txBody>
-          <a:bodyPr rtlCol="0" anchor="ctr"/>
-          <a:lstStyle/>
-          <a:p>
-            <a:pPr algn="ctr"/>
-          </a:p>
-        </p:txBody>
-      </p:sp>
-      <p:sp>
-        <p:nvSpPr>
-          <p:cNvPr id="45" name="TextBox 44"/>
-          <p:cNvSpPr txBox="1"/>
-          <p:nvPr/>
-        </p:nvSpPr>
-        <p:spPr>
-          <a:xfrm>
-            <a:off x="6583680" y="4096512"/>
-            <a:ext cx="5212080" cy="228600"/>
-          </a:xfrm>
-          <a:prstGeom prst="rect">
-            <a:avLst/>
-          </a:prstGeom>
-          <a:noFill/>
-        </p:spPr>
-        <p:txBody>
-          <a:bodyPr wrap="square">
-            <a:spAutoFit/>
-          </a:bodyPr>
-          <a:lstStyle/>
-          <a:p>
-            <a:pPr algn="l"/>
-            <a:r>
-              <a:rPr sz="900" b="1" i="0">
-                <a:solidFill>
-                  <a:srgbClr val="60B8FF"/>
-                </a:solidFill>
-              </a:rPr>
-              <a:t>KEY INSIGHT</a:t>
-            </a:r>
-          </a:p>
-        </p:txBody>
-      </p:sp>
-      <p:sp>
-        <p:nvSpPr>
-          <p:cNvPr id="46" name="TextBox 45"/>
-          <p:cNvSpPr txBox="1"/>
-          <p:nvPr/>
-        </p:nvSpPr>
-        <p:spPr>
-          <a:xfrm>
-            <a:off x="6583680" y="4416552"/>
-            <a:ext cx="4937760" cy="777240"/>
-          </a:xfrm>
-          <a:prstGeom prst="rect">
-            <a:avLst/>
-          </a:prstGeom>
-          <a:noFill/>
-        </p:spPr>
-        <p:txBody>
-          <a:bodyPr wrap="square">
-            <a:spAutoFit/>
-          </a:bodyPr>
-          <a:lstStyle/>
-          <a:p>
-            <a:pPr algn="l"/>
-            <a:r>
-              <a:rPr sz="1200" b="0" i="0">
-                <a:solidFill>
-                  <a:srgbClr val="CCCCCC"/>
-                </a:solidFill>
-              </a:rPr>
-              <a:t>Transfer rates vary by architecture — not by patch placement. This rules out occlusion as the primary mechanism.</a:t>
+              <a:t>Adversarial patches concentrate signal in a dense region. Blur and compression suppress helpful clean texture while leaving the patch's dominant structure intact.</a:t>
             </a:r>
           </a:p>
         </p:txBody>
@@ -6842,8 +6919,8 @@
         </p:nvSpPr>
         <p:spPr>
           <a:xfrm>
-            <a:off x="822960" y="365760"/>
-            <a:ext cx="3657600" cy="320040"/>
+            <a:off x="822960" y="411480"/>
+            <a:ext cx="3657600" cy="256032"/>
           </a:xfrm>
           <a:prstGeom prst="rect">
             <a:avLst/>
@@ -6863,7 +6940,7 @@
                   <a:srgbClr val="60B8FF"/>
                 </a:solidFill>
               </a:rPr>
-              <a:t>LIVE DEMONSTRATION</a:t>
+              <a:t>ATTACK TRACK - ARCHITECTURAL FINDING</a:t>
             </a:r>
           </a:p>
         </p:txBody>
@@ -6876,133 +6953,53 @@
         </p:nvSpPr>
         <p:spPr>
           <a:xfrm>
-            <a:off x="822960" y="1097280"/>
-            <a:ext cx="5486400" cy="868680"/>
-          </a:xfrm>
-          <a:prstGeom prst="rect">
-            <a:avLst/>
-          </a:prstGeom>
-          <a:noFill/>
-        </p:spPr>
-        <p:txBody>
-          <a:bodyPr wrap="square">
-            <a:spAutoFit/>
-          </a:bodyPr>
-          <a:lstStyle/>
-          <a:p>
-            <a:pPr algn="l"/>
-            <a:r>
-              <a:rPr sz="4000" b="1" i="0">
-                <a:solidFill>
-                  <a:srgbClr val="3EFFA0"/>
-                </a:solidFill>
-              </a:rPr>
-              <a:t>Live Demo</a:t>
-            </a:r>
-          </a:p>
-        </p:txBody>
-      </p:sp>
-      <p:sp>
-        <p:nvSpPr>
-          <p:cNvPr id="4" name="TextBox 3"/>
-          <p:cNvSpPr txBox="1"/>
-          <p:nvPr/>
-        </p:nvSpPr>
-        <p:spPr>
-          <a:xfrm>
-            <a:off x="822960" y="2057400"/>
-            <a:ext cx="5943600" cy="731520"/>
-          </a:xfrm>
-          <a:prstGeom prst="rect">
-            <a:avLst/>
-          </a:prstGeom>
-          <a:noFill/>
-        </p:spPr>
-        <p:txBody>
-          <a:bodyPr wrap="square">
-            <a:spAutoFit/>
-          </a:bodyPr>
-          <a:lstStyle/>
-          <a:p>
-            <a:pPr algn="l"/>
-            <a:r>
-              <a:rPr sz="1400" b="0" i="0">
-                <a:solidFill>
-                  <a:srgbClr val="CCCCCC"/>
-                </a:solidFill>
-              </a:rPr>
-              <a:t>Split-screen: clean YOLO detections on the left,
-patch digitally overlaid on the right.</a:t>
-            </a:r>
-          </a:p>
-        </p:txBody>
-      </p:sp>
-      <p:sp>
-        <p:nvSpPr>
-          <p:cNvPr id="5" name="TextBox 4"/>
-          <p:cNvSpPr txBox="1"/>
-          <p:nvPr/>
-        </p:nvSpPr>
-        <p:spPr>
-          <a:xfrm>
-            <a:off x="822960" y="2926080"/>
-            <a:ext cx="5943600" cy="914400"/>
-          </a:xfrm>
-          <a:prstGeom prst="rect">
-            <a:avLst/>
-          </a:prstGeom>
-          <a:noFill/>
-        </p:spPr>
-        <p:txBody>
-          <a:bodyPr wrap="square">
-            <a:spAutoFit/>
-          </a:bodyPr>
-          <a:lstStyle/>
-          <a:p>
-            <a:pPr algn="l"/>
-            <a:r>
-              <a:rPr sz="1300" b="0">
-                <a:solidFill>
-                  <a:srgbClr val="3EFFA0"/>
-                </a:solidFill>
-              </a:rPr>
-              <a:t>• Patch: 100×100 px, YOLOv8n</a:t>
-            </a:r>
-          </a:p>
-          <a:p>
-            <a:pPr algn="l"/>
-            <a:r>
-              <a:rPr sz="1300" b="0">
-                <a:solidFill>
-                  <a:srgbClr val="CCCCCC"/>
-                </a:solidFill>
-              </a:rPr>
-              <a:t>• Placed on torso of largest detected person</a:t>
-            </a:r>
-          </a:p>
-          <a:p>
-            <a:pPr algn="l"/>
-            <a:r>
-              <a:rPr sz="1300" b="0">
-                <a:solidFill>
-                  <a:srgbClr val="CCCCCC"/>
-                </a:solidFill>
-              </a:rPr>
-              <a:t>• Rolling 30-frame suppression average</a:t>
-            </a:r>
-          </a:p>
-        </p:txBody>
-      </p:sp>
-      <p:sp>
-        <p:nvSpPr>
-          <p:cNvPr id="6" name="Rectangle 5"/>
+            <a:off x="822960" y="777240"/>
+            <a:ext cx="10241280" cy="1463040"/>
+          </a:xfrm>
+          <a:prstGeom prst="rect">
+            <a:avLst/>
+          </a:prstGeom>
+          <a:noFill/>
+        </p:spPr>
+        <p:txBody>
+          <a:bodyPr wrap="square">
+            <a:spAutoFit/>
+          </a:bodyPr>
+          <a:lstStyle/>
+          <a:p>
+            <a:pPr algn="l"/>
+            <a:r>
+              <a:rPr sz="3600" b="1" i="0">
+                <a:solidFill>
+                  <a:srgbClr val="E8E8F0"/>
+                </a:solidFill>
+              </a:rPr>
+              <a:t>The</a:t>
+            </a:r>
+          </a:p>
+          <a:p>
+            <a:pPr algn="l"/>
+            <a:r>
+              <a:rPr sz="3600" b="1" i="0">
+                <a:solidFill>
+                  <a:srgbClr val="FF6060"/>
+                </a:solidFill>
+              </a:rPr>
+              <a:t>v26n Paradox</a:t>
+            </a:r>
+          </a:p>
+        </p:txBody>
+      </p:sp>
+      <p:sp>
+        <p:nvSpPr>
+          <p:cNvPr id="4" name="Rectangle 3"/>
           <p:cNvSpPr/>
           <p:nvPr/>
         </p:nvSpPr>
         <p:spPr>
           <a:xfrm>
-            <a:off x="822960" y="3977639"/>
-            <a:ext cx="5943600" cy="1508760"/>
+            <a:off x="822960" y="1828800"/>
+            <a:ext cx="5212080" cy="1417320"/>
           </a:xfrm>
           <a:prstGeom prst="rect">
             <a:avLst/>
@@ -7038,14 +7035,14 @@
       </p:sp>
       <p:sp>
         <p:nvSpPr>
-          <p:cNvPr id="7" name="TextBox 6"/>
-          <p:cNvSpPr txBox="1"/>
-          <p:nvPr/>
-        </p:nvSpPr>
-        <p:spPr>
-          <a:xfrm>
-            <a:off x="1005840" y="4114800"/>
-            <a:ext cx="5486400" cy="228600"/>
+          <p:cNvPr id="5" name="TextBox 4"/>
+          <p:cNvSpPr txBox="1"/>
+          <p:nvPr/>
+        </p:nvSpPr>
+        <p:spPr>
+          <a:xfrm>
+            <a:off x="1005840" y="1965960"/>
+            <a:ext cx="5212080" cy="201168"/>
           </a:xfrm>
           <a:prstGeom prst="rect">
             <a:avLst/>
@@ -7065,8 +7062,107 @@
                   <a:srgbClr val="60B8FF"/>
                 </a:solidFill>
               </a:rPr>
-              <a:t>PHYSICAL PRINT</a:t>
-            </a:r>
+              <a:t>WHAT HAPPENED</a:t>
+            </a:r>
+          </a:p>
+        </p:txBody>
+      </p:sp>
+      <p:sp>
+        <p:nvSpPr>
+          <p:cNvPr id="6" name="TextBox 5"/>
+          <p:cNvSpPr txBox="1"/>
+          <p:nvPr/>
+        </p:nvSpPr>
+        <p:spPr>
+          <a:xfrm>
+            <a:off x="1005840" y="2267712"/>
+            <a:ext cx="4892040" cy="822960"/>
+          </a:xfrm>
+          <a:prstGeom prst="rect">
+            <a:avLst/>
+          </a:prstGeom>
+          <a:noFill/>
+        </p:spPr>
+        <p:txBody>
+          <a:bodyPr wrap="square">
+            <a:spAutoFit/>
+          </a:bodyPr>
+          <a:lstStyle/>
+          <a:p>
+            <a:pPr algn="l"/>
+            <a:r>
+              <a:rPr sz="1200" b="0" i="0">
+                <a:solidFill>
+                  <a:srgbClr val="CCCCCC"/>
+                </a:solidFill>
+              </a:rPr>
+              <a:t>The optimized objective converged on the scored head.</a:t>
+            </a:r>
+          </a:p>
+          <a:p>
+            <a:pPr algn="l"/>
+            <a:r>
+              <a:rPr sz="1200" b="0" i="0">
+                <a:solidFill>
+                  <a:srgbClr val="FF6060"/>
+                </a:solidFill>
+              </a:rPr>
+              <a:t>final_det_loss = 0.108 on the one2many path.</a:t>
+            </a:r>
+          </a:p>
+          <a:p>
+            <a:pPr algn="l"/>
+            <a:r>
+              <a:rPr sz="1200" b="0" i="0">
+                <a:solidFill>
+                  <a:srgbClr val="CCCCCC"/>
+                </a:solidFill>
+              </a:rPr>
+              <a:t>Suppression: only 16.3%.</a:t>
+            </a:r>
+          </a:p>
+        </p:txBody>
+      </p:sp>
+      <p:sp>
+        <p:nvSpPr>
+          <p:cNvPr id="7" name="Rectangle 6"/>
+          <p:cNvSpPr/>
+          <p:nvPr/>
+        </p:nvSpPr>
+        <p:spPr>
+          <a:xfrm>
+            <a:off x="822960" y="3337560"/>
+            <a:ext cx="5212080" cy="2148840"/>
+          </a:xfrm>
+          <a:prstGeom prst="rect">
+            <a:avLst/>
+          </a:prstGeom>
+          <a:solidFill>
+            <a:srgbClr val="0D1220"/>
+          </a:solidFill>
+          <a:ln>
+            <a:noFill/>
+          </a:ln>
+        </p:spPr>
+        <p:style>
+          <a:lnRef idx="1">
+            <a:schemeClr val="accent1"/>
+          </a:lnRef>
+          <a:fillRef idx="3">
+            <a:schemeClr val="accent1"/>
+          </a:fillRef>
+          <a:effectRef idx="2">
+            <a:schemeClr val="accent1"/>
+          </a:effectRef>
+          <a:fontRef idx="minor">
+            <a:schemeClr val="lt1"/>
+          </a:fontRef>
+        </p:style>
+        <p:txBody>
+          <a:bodyPr rtlCol="0" anchor="ctr"/>
+          <a:lstStyle/>
+          <a:p>
+            <a:pPr algn="ctr"/>
           </a:p>
         </p:txBody>
       </p:sp>
@@ -7078,109 +7174,407 @@
         </p:nvSpPr>
         <p:spPr>
           <a:xfrm>
-            <a:off x="1005840" y="4389120"/>
-            <a:ext cx="5669280" cy="914400"/>
-          </a:xfrm>
-          <a:prstGeom prst="rect">
-            <a:avLst/>
-          </a:prstGeom>
-          <a:noFill/>
-        </p:spPr>
-        <p:txBody>
-          <a:bodyPr wrap="square">
-            <a:spAutoFit/>
-          </a:bodyPr>
-          <a:lstStyle/>
-          <a:p>
-            <a:pPr algn="l"/>
-            <a:r>
-              <a:rPr sz="1200" b="0">
-                <a:solidFill>
-                  <a:srgbClr val="FFE066"/>
-                </a:solidFill>
-              </a:rPr>
-              <a:t>Patch exported at 300 DPI, 8"×8".</a:t>
-            </a:r>
-          </a:p>
-          <a:p>
-            <a:pPr algn="l"/>
-            <a:r>
-              <a:rPr sz="1200" b="0">
+            <a:off x="1005840" y="3474720"/>
+            <a:ext cx="5212080" cy="201168"/>
+          </a:xfrm>
+          <a:prstGeom prst="rect">
+            <a:avLst/>
+          </a:prstGeom>
+          <a:noFill/>
+        </p:spPr>
+        <p:txBody>
+          <a:bodyPr wrap="square">
+            <a:spAutoFit/>
+          </a:bodyPr>
+          <a:lstStyle/>
+          <a:p>
+            <a:pPr algn="l"/>
+            <a:r>
+              <a:rPr sz="900" b="1" i="0">
+                <a:solidFill>
+                  <a:srgbClr val="60B8FF"/>
+                </a:solidFill>
+              </a:rPr>
+              <a:t>ROOT CAUSE</a:t>
+            </a:r>
+          </a:p>
+        </p:txBody>
+      </p:sp>
+      <p:sp>
+        <p:nvSpPr>
+          <p:cNvPr id="9" name="TextBox 8"/>
+          <p:cNvSpPr txBox="1"/>
+          <p:nvPr/>
+        </p:nvSpPr>
+        <p:spPr>
+          <a:xfrm>
+            <a:off x="1005840" y="3730752"/>
+            <a:ext cx="4892040" cy="320040"/>
+          </a:xfrm>
+          <a:prstGeom prst="rect">
+            <a:avLst/>
+          </a:prstGeom>
+          <a:noFill/>
+        </p:spPr>
+        <p:txBody>
+          <a:bodyPr wrap="square">
+            <a:spAutoFit/>
+          </a:bodyPr>
+          <a:lstStyle/>
+          <a:p>
+            <a:pPr algn="l"/>
+            <a:r>
+              <a:rPr sz="1200" b="0" i="0">
                 <a:solidFill>
                   <a:srgbClr val="CCCCCC"/>
                 </a:solidFill>
               </a:rPr>
-              <a:t>Physical suppression ~30–60% (printer colour shift, lighting).</a:t>
-            </a:r>
-          </a:p>
-          <a:p>
-            <a:pPr algn="l"/>
-            <a:r>
-              <a:rPr sz="1200" b="0">
+              <a:t>YOLO26n uses end-to-end Hungarian matching (head_end2end: true).</a:t>
+            </a:r>
+          </a:p>
+        </p:txBody>
+      </p:sp>
+      <p:sp>
+        <p:nvSpPr>
+          <p:cNvPr id="10" name="TextBox 9"/>
+          <p:cNvSpPr txBox="1"/>
+          <p:nvPr/>
+        </p:nvSpPr>
+        <p:spPr>
+          <a:xfrm>
+            <a:off x="1005840" y="4160520"/>
+            <a:ext cx="4892040" cy="914400"/>
+          </a:xfrm>
+          <a:prstGeom prst="rect">
+            <a:avLst/>
+          </a:prstGeom>
+          <a:noFill/>
+        </p:spPr>
+        <p:txBody>
+          <a:bodyPr wrap="square">
+            <a:spAutoFit/>
+          </a:bodyPr>
+          <a:lstStyle/>
+          <a:p>
+            <a:pPr algn="l"/>
+            <a:r>
+              <a:rPr sz="1200" b="0" i="0">
                 <a:solidFill>
                   <a:srgbClr val="CCCCCC"/>
                 </a:solidFill>
               </a:rPr>
-              <a:t>NPS loss during training partially compensates.</a:t>
-            </a:r>
-          </a:p>
-        </p:txBody>
-      </p:sp>
-      <p:pic>
-        <p:nvPicPr>
-          <p:cNvPr id="9" name="Picture 8" descr="patch.png"/>
-          <p:cNvPicPr>
-            <a:picLocks noChangeAspect="1"/>
-          </p:cNvPicPr>
-          <p:nvPr/>
-        </p:nvPicPr>
-        <p:blipFill>
-          <a:blip r:embed="rId2"/>
-          <a:stretch>
-            <a:fillRect/>
-          </a:stretch>
-        </p:blipFill>
-        <p:spPr>
-          <a:xfrm>
-            <a:off x="7772400" y="1371600"/>
-            <a:ext cx="3200400" cy="3200400"/>
-          </a:xfrm>
-          <a:prstGeom prst="rect">
-            <a:avLst/>
-          </a:prstGeom>
-        </p:spPr>
-      </p:pic>
-      <p:sp>
-        <p:nvSpPr>
-          <p:cNvPr id="10" name="TextBox 9"/>
-          <p:cNvSpPr txBox="1"/>
-          <p:nvPr/>
-        </p:nvSpPr>
-        <p:spPr>
-          <a:xfrm>
-            <a:off x="7772400" y="4663440"/>
-            <a:ext cx="3200400" cy="640080"/>
-          </a:xfrm>
-          <a:prstGeom prst="rect">
-            <a:avLst/>
-          </a:prstGeom>
-          <a:noFill/>
-        </p:spPr>
-        <p:txBody>
-          <a:bodyPr wrap="square">
-            <a:spAutoFit/>
-          </a:bodyPr>
+              <a:t>- Training optimizes the one2many auxiliary head</a:t>
+            </a:r>
+          </a:p>
+          <a:p>
+            <a:pPr algn="l"/>
+            <a:r>
+              <a:rPr sz="1200" b="0" i="0">
+                <a:solidFill>
+                  <a:srgbClr val="CCCCCC"/>
+                </a:solidFill>
+              </a:rPr>
+              <a:t>- Inference uses the one2one head for final detections</a:t>
+            </a:r>
+          </a:p>
+          <a:p>
+            <a:pPr algn="l"/>
+            <a:r>
+              <a:rPr sz="1200" b="0" i="0">
+                <a:solidFill>
+                  <a:srgbClr val="CCCCCC"/>
+                </a:solidFill>
+              </a:rPr>
+              <a:t>- These heads are architecturally separate</a:t>
+            </a:r>
+          </a:p>
+        </p:txBody>
+      </p:sp>
+      <p:sp>
+        <p:nvSpPr>
+          <p:cNvPr id="11" name="Rectangle 10"/>
+          <p:cNvSpPr/>
+          <p:nvPr/>
+        </p:nvSpPr>
+        <p:spPr>
+          <a:xfrm>
+            <a:off x="6400800" y="1828800"/>
+            <a:ext cx="5212080" cy="1874519"/>
+          </a:xfrm>
+          <a:prstGeom prst="rect">
+            <a:avLst/>
+          </a:prstGeom>
+          <a:solidFill>
+            <a:srgbClr val="12121A"/>
+          </a:solidFill>
+          <a:ln>
+            <a:noFill/>
+          </a:ln>
+        </p:spPr>
+        <p:style>
+          <a:lnRef idx="1">
+            <a:schemeClr val="accent1"/>
+          </a:lnRef>
+          <a:fillRef idx="3">
+            <a:schemeClr val="accent1"/>
+          </a:fillRef>
+          <a:effectRef idx="2">
+            <a:schemeClr val="accent1"/>
+          </a:effectRef>
+          <a:fontRef idx="minor">
+            <a:schemeClr val="lt1"/>
+          </a:fontRef>
+        </p:style>
+        <p:txBody>
+          <a:bodyPr rtlCol="0" anchor="ctr"/>
           <a:lstStyle/>
           <a:p>
             <a:pPr algn="ctr"/>
+          </a:p>
+        </p:txBody>
+      </p:sp>
+      <p:sp>
+        <p:nvSpPr>
+          <p:cNvPr id="12" name="TextBox 11"/>
+          <p:cNvSpPr txBox="1"/>
+          <p:nvPr/>
+        </p:nvSpPr>
+        <p:spPr>
+          <a:xfrm>
+            <a:off x="6583680" y="1965960"/>
+            <a:ext cx="5212080" cy="201168"/>
+          </a:xfrm>
+          <a:prstGeom prst="rect">
+            <a:avLst/>
+          </a:prstGeom>
+          <a:noFill/>
+        </p:spPr>
+        <p:txBody>
+          <a:bodyPr wrap="square">
+            <a:spAutoFit/>
+          </a:bodyPr>
+          <a:lstStyle/>
+          <a:p>
+            <a:pPr algn="l"/>
+            <a:r>
+              <a:rPr sz="900" b="1" i="0">
+                <a:solidFill>
+                  <a:srgbClr val="60B8FF"/>
+                </a:solidFill>
+              </a:rPr>
+              <a:t>THREE EXPERIMENTS - SAME ANSWER</a:t>
+            </a:r>
+          </a:p>
+        </p:txBody>
+      </p:sp>
+      <p:sp>
+        <p:nvSpPr>
+          <p:cNvPr id="13" name="TextBox 12"/>
+          <p:cNvSpPr txBox="1"/>
+          <p:nvPr/>
+        </p:nvSpPr>
+        <p:spPr>
+          <a:xfrm>
+            <a:off x="6583680" y="2286000"/>
+            <a:ext cx="4892040" cy="1097280"/>
+          </a:xfrm>
+          <a:prstGeom prst="rect">
+            <a:avLst/>
+          </a:prstGeom>
+          <a:noFill/>
+        </p:spPr>
+        <p:txBody>
+          <a:bodyPr wrap="square">
+            <a:spAutoFit/>
+          </a:bodyPr>
+          <a:lstStyle/>
+          <a:p>
+            <a:pPr algn="l"/>
             <a:r>
               <a:rPr sz="1000" b="0" i="0">
                 <a:solidFill>
                   <a:srgbClr val="888888"/>
                 </a:solidFill>
               </a:rPr>
-              <a:t>YOLOv8n patch — 90% suppression
-100×100 px · shown 2×</a:t>
+              <a:t>Experiment                            Loss      Suppression</a:t>
+            </a:r>
+          </a:p>
+          <a:p>
+            <a:pPr algn="l"/>
+            <a:r>
+              <a:rPr sz="1200" b="0" i="0">
+                <a:solidFill>
+                  <a:srgbClr val="CCCCCC"/>
+                </a:solidFill>
+              </a:rPr>
+              <a:t>Cold start - one2many loss           0.108     16.3%</a:t>
+            </a:r>
+          </a:p>
+          <a:p>
+            <a:pPr algn="l"/>
+            <a:r>
+              <a:rPr sz="1200" b="0" i="0">
+                <a:solidFill>
+                  <a:srgbClr val="CCCCCC"/>
+                </a:solidFill>
+              </a:rPr>
+              <a:t>Warm start from v8n 90% patch        0.103     14.0%</a:t>
+            </a:r>
+          </a:p>
+          <a:p>
+            <a:pPr algn="l"/>
+            <a:r>
+              <a:rPr sz="1200" b="0" i="0">
+                <a:solidFill>
+                  <a:srgbClr val="CCCCCC"/>
+                </a:solidFill>
+              </a:rPr>
+              <a:t>Cold start - one2one loss            0.094     11.6%</a:t>
+            </a:r>
+          </a:p>
+        </p:txBody>
+      </p:sp>
+      <p:sp>
+        <p:nvSpPr>
+          <p:cNvPr id="14" name="TextBox 13"/>
+          <p:cNvSpPr txBox="1"/>
+          <p:nvPr/>
+        </p:nvSpPr>
+        <p:spPr>
+          <a:xfrm>
+            <a:off x="6583680" y="3401568"/>
+            <a:ext cx="4892040" cy="228600"/>
+          </a:xfrm>
+          <a:prstGeom prst="rect">
+            <a:avLst/>
+          </a:prstGeom>
+          <a:noFill/>
+        </p:spPr>
+        <p:txBody>
+          <a:bodyPr wrap="square">
+            <a:spAutoFit/>
+          </a:bodyPr>
+          <a:lstStyle/>
+          <a:p>
+            <a:pPr algn="l"/>
+            <a:r>
+              <a:rPr sz="1000" b="0" i="0">
+                <a:solidFill>
+                  <a:srgbClr val="888888"/>
+                </a:solidFill>
+              </a:rPr>
+              <a:t>Better objective convergence -&gt; less suppression. The relationship is inverted.</a:t>
+            </a:r>
+          </a:p>
+        </p:txBody>
+      </p:sp>
+      <p:sp>
+        <p:nvSpPr>
+          <p:cNvPr id="15" name="Rectangle 14"/>
+          <p:cNvSpPr/>
+          <p:nvPr/>
+        </p:nvSpPr>
+        <p:spPr>
+          <a:xfrm>
+            <a:off x="6400800" y="3840480"/>
+            <a:ext cx="5212080" cy="1645920"/>
+          </a:xfrm>
+          <a:prstGeom prst="rect">
+            <a:avLst/>
+          </a:prstGeom>
+          <a:solidFill>
+            <a:srgbClr val="0D1A12"/>
+          </a:solidFill>
+          <a:ln>
+            <a:noFill/>
+          </a:ln>
+        </p:spPr>
+        <p:style>
+          <a:lnRef idx="1">
+            <a:schemeClr val="accent1"/>
+          </a:lnRef>
+          <a:fillRef idx="3">
+            <a:schemeClr val="accent1"/>
+          </a:fillRef>
+          <a:effectRef idx="2">
+            <a:schemeClr val="accent1"/>
+          </a:effectRef>
+          <a:fontRef idx="minor">
+            <a:schemeClr val="lt1"/>
+          </a:fontRef>
+        </p:style>
+        <p:txBody>
+          <a:bodyPr rtlCol="0" anchor="ctr"/>
+          <a:lstStyle/>
+          <a:p>
+            <a:pPr algn="ctr"/>
+          </a:p>
+        </p:txBody>
+      </p:sp>
+      <p:sp>
+        <p:nvSpPr>
+          <p:cNvPr id="16" name="TextBox 15"/>
+          <p:cNvSpPr txBox="1"/>
+          <p:nvPr/>
+        </p:nvSpPr>
+        <p:spPr>
+          <a:xfrm>
+            <a:off x="6583680" y="3977639"/>
+            <a:ext cx="5212080" cy="201168"/>
+          </a:xfrm>
+          <a:prstGeom prst="rect">
+            <a:avLst/>
+          </a:prstGeom>
+          <a:noFill/>
+        </p:spPr>
+        <p:txBody>
+          <a:bodyPr wrap="square">
+            <a:spAutoFit/>
+          </a:bodyPr>
+          <a:lstStyle/>
+          <a:p>
+            <a:pPr algn="l"/>
+            <a:r>
+              <a:rPr sz="900" b="1" i="0">
+                <a:solidFill>
+                  <a:srgbClr val="60B8FF"/>
+                </a:solidFill>
+              </a:rPr>
+              <a:t>CONCLUSION</a:t>
+            </a:r>
+          </a:p>
+        </p:txBody>
+      </p:sp>
+      <p:sp>
+        <p:nvSpPr>
+          <p:cNvPr id="17" name="TextBox 16"/>
+          <p:cNvSpPr txBox="1"/>
+          <p:nvPr/>
+        </p:nvSpPr>
+        <p:spPr>
+          <a:xfrm>
+            <a:off x="6583680" y="4279392"/>
+            <a:ext cx="4892040" cy="914400"/>
+          </a:xfrm>
+          <a:prstGeom prst="rect">
+            <a:avLst/>
+          </a:prstGeom>
+          <a:noFill/>
+        </p:spPr>
+        <p:txBody>
+          <a:bodyPr wrap="square">
+            <a:spAutoFit/>
+          </a:bodyPr>
+          <a:lstStyle/>
+          <a:p>
+            <a:pPr algn="l"/>
+            <a:r>
+              <a:rPr sz="1200" b="0" i="0">
+                <a:solidFill>
+                  <a:srgbClr val="CCCCCC"/>
+                </a:solidFill>
+              </a:rPr>
+              <a:t>YOLO26n shows strong resistance to this attack class in the current setup. The matching architecture decouples the optimized objective from the inference path, so targeting either head in isolation did not break through.</a:t>
             </a:r>
           </a:p>
         </p:txBody>
@@ -7219,8 +7613,8 @@
         </p:nvSpPr>
         <p:spPr>
           <a:xfrm>
-            <a:off x="822960" y="365760"/>
-            <a:ext cx="3657600" cy="320040"/>
+            <a:off x="822960" y="411480"/>
+            <a:ext cx="3657600" cy="256032"/>
           </a:xfrm>
           <a:prstGeom prst="rect">
             <a:avLst/>
@@ -7240,7 +7634,7 @@
                   <a:srgbClr val="60B8FF"/>
                 </a:solidFill>
               </a:rPr>
-              <a:t>CONCLUSIONS</a:t>
+              <a:t>DEFENSE TRACK - FINDINGS</a:t>
             </a:r>
           </a:p>
         </p:txBody>
@@ -7254,56 +7648,352 @@
         <p:spPr>
           <a:xfrm>
             <a:off x="822960" y="777240"/>
-            <a:ext cx="10058400" cy="1463040"/>
-          </a:xfrm>
-          <a:prstGeom prst="rect">
-            <a:avLst/>
-          </a:prstGeom>
-          <a:noFill/>
-        </p:spPr>
-        <p:txBody>
-          <a:bodyPr wrap="square">
-            <a:spAutoFit/>
-          </a:bodyPr>
-          <a:lstStyle/>
-          <a:p>
-            <a:pPr algn="l"/>
-            <a:r>
-              <a:rPr sz="3800" b="1">
+            <a:ext cx="10241280" cy="1463040"/>
+          </a:xfrm>
+          <a:prstGeom prst="rect">
+            <a:avLst/>
+          </a:prstGeom>
+          <a:noFill/>
+        </p:spPr>
+        <p:txBody>
+          <a:bodyPr wrap="square">
+            <a:spAutoFit/>
+          </a:bodyPr>
+          <a:lstStyle/>
+          <a:p>
+            <a:pPr algn="l"/>
+            <a:r>
+              <a:rPr sz="3800" b="1" i="0">
                 <a:solidFill>
                   <a:srgbClr val="E8E8F0"/>
                 </a:solidFill>
               </a:rPr>
-              <a:t>What We</a:t>
-            </a:r>
-          </a:p>
-          <a:p>
-            <a:pPr algn="l">
-              <a:spcBef>
-                <a:spcPts val="200"/>
-              </a:spcBef>
-            </a:pPr>
-            <a:r>
-              <a:rPr sz="3800" b="1">
+              <a:t>Automated</a:t>
+            </a:r>
+          </a:p>
+          <a:p>
+            <a:pPr algn="l"/>
+            <a:r>
+              <a:rPr sz="3800" b="1" i="0">
+                <a:solidFill>
+                  <a:srgbClr val="60B8FF"/>
+                </a:solidFill>
+              </a:rPr>
+              <a:t>Arms Race</a:t>
+            </a:r>
+          </a:p>
+        </p:txBody>
+      </p:sp>
+      <p:sp>
+        <p:nvSpPr>
+          <p:cNvPr id="4" name="TextBox 3"/>
+          <p:cNvSpPr txBox="1"/>
+          <p:nvPr/>
+        </p:nvSpPr>
+        <p:spPr>
+          <a:xfrm>
+            <a:off x="822960" y="1828800"/>
+            <a:ext cx="5303520" cy="731520"/>
+          </a:xfrm>
+          <a:prstGeom prst="rect">
+            <a:avLst/>
+          </a:prstGeom>
+          <a:noFill/>
+        </p:spPr>
+        <p:txBody>
+          <a:bodyPr wrap="square">
+            <a:spAutoFit/>
+          </a:bodyPr>
+          <a:lstStyle/>
+          <a:p>
+            <a:pPr algn="l"/>
+            <a:r>
+              <a:rPr sz="1300" b="0" i="0">
+                <a:solidFill>
+                  <a:srgbClr val="CCCCCC"/>
+                </a:solidFill>
+              </a:rPr>
+              <a:t>YOLO-Bad-Triangle framework: 22 automated cycles of optimized attacks versus optimized defenses. Attacks: square, DeepFool, dispersion reduction. Defenses: JPEG, median filter, bit-depth reduction, c_dog.</a:t>
+            </a:r>
+          </a:p>
+        </p:txBody>
+      </p:sp>
+      <p:sp>
+        <p:nvSpPr>
+          <p:cNvPr id="5" name="Rectangle 4"/>
+          <p:cNvSpPr/>
+          <p:nvPr/>
+        </p:nvSpPr>
+        <p:spPr>
+          <a:xfrm>
+            <a:off x="822960" y="2651760"/>
+            <a:ext cx="5303520" cy="1554480"/>
+          </a:xfrm>
+          <a:prstGeom prst="rect">
+            <a:avLst/>
+          </a:prstGeom>
+          <a:solidFill>
+            <a:srgbClr val="12121A"/>
+          </a:solidFill>
+          <a:ln>
+            <a:noFill/>
+          </a:ln>
+        </p:spPr>
+        <p:style>
+          <a:lnRef idx="1">
+            <a:schemeClr val="accent1"/>
+          </a:lnRef>
+          <a:fillRef idx="3">
+            <a:schemeClr val="accent1"/>
+          </a:fillRef>
+          <a:effectRef idx="2">
+            <a:schemeClr val="accent1"/>
+          </a:effectRef>
+          <a:fontRef idx="minor">
+            <a:schemeClr val="lt1"/>
+          </a:fontRef>
+        </p:style>
+        <p:txBody>
+          <a:bodyPr rtlCol="0" anchor="ctr"/>
+          <a:lstStyle/>
+          <a:p>
+            <a:pPr algn="ctr"/>
+          </a:p>
+        </p:txBody>
+      </p:sp>
+      <p:sp>
+        <p:nvSpPr>
+          <p:cNvPr id="6" name="TextBox 5"/>
+          <p:cNvSpPr txBox="1"/>
+          <p:nvPr/>
+        </p:nvSpPr>
+        <p:spPr>
+          <a:xfrm>
+            <a:off x="1005840" y="2926080"/>
+            <a:ext cx="4937760" cy="914400"/>
+          </a:xfrm>
+          <a:prstGeom prst="rect">
+            <a:avLst/>
+          </a:prstGeom>
+          <a:noFill/>
+        </p:spPr>
+        <p:txBody>
+          <a:bodyPr wrap="square">
+            <a:spAutoFit/>
+          </a:bodyPr>
+          <a:lstStyle/>
+          <a:p>
+            <a:pPr algn="l"/>
+            <a:r>
+              <a:rPr sz="1000" b="0" i="0">
+                <a:solidFill>
+                  <a:srgbClr val="888888"/>
+                </a:solidFill>
+              </a:rPr>
+              <a:t>Config                                   mAP50      vs clean</a:t>
+            </a:r>
+          </a:p>
+          <a:p>
+            <a:pPr algn="l"/>
+            <a:r>
+              <a:rPr sz="1200" b="0" i="0">
                 <a:solidFill>
                   <a:srgbClr val="3EFFA0"/>
                 </a:solidFill>
               </a:rPr>
-              <a:t>Learned</a:t>
-            </a:r>
-          </a:p>
-        </p:txBody>
-      </p:sp>
-      <p:sp>
-        <p:nvSpPr>
-          <p:cNvPr id="4" name="Rectangle 3"/>
+              <a:t>Clean baseline                           0.600      -</a:t>
+            </a:r>
+          </a:p>
+          <a:p>
+            <a:pPr algn="l"/>
+            <a:r>
+              <a:rPr sz="1200" b="0" i="0">
+                <a:solidFill>
+                  <a:srgbClr val="FF6060"/>
+                </a:solidFill>
+              </a:rPr>
+              <a:t>Best attack   dispersion_reduction       0.238      -60%</a:t>
+            </a:r>
+          </a:p>
+          <a:p>
+            <a:pPr algn="l"/>
+            <a:r>
+              <a:rPr sz="1200" b="0" i="0">
+                <a:solidFill>
+                  <a:srgbClr val="FFE066"/>
+                </a:solidFill>
+              </a:rPr>
+              <a:t>Best defense  square + c_dog             0.394      -34%</a:t>
+            </a:r>
+          </a:p>
+        </p:txBody>
+      </p:sp>
+      <p:sp>
+        <p:nvSpPr>
+          <p:cNvPr id="7" name="Rectangle 6"/>
           <p:cNvSpPr/>
           <p:nvPr/>
         </p:nvSpPr>
         <p:spPr>
           <a:xfrm>
-            <a:off x="822960" y="2286000"/>
-            <a:ext cx="3291840" cy="2194560"/>
+            <a:off x="6537960" y="1828800"/>
+            <a:ext cx="4800600" cy="1920240"/>
+          </a:xfrm>
+          <a:prstGeom prst="rect">
+            <a:avLst/>
+          </a:prstGeom>
+          <a:solidFill>
+            <a:srgbClr val="0D1220"/>
+          </a:solidFill>
+          <a:ln>
+            <a:noFill/>
+          </a:ln>
+        </p:spPr>
+        <p:style>
+          <a:lnRef idx="1">
+            <a:schemeClr val="accent1"/>
+          </a:lnRef>
+          <a:fillRef idx="3">
+            <a:schemeClr val="accent1"/>
+          </a:fillRef>
+          <a:effectRef idx="2">
+            <a:schemeClr val="accent1"/>
+          </a:effectRef>
+          <a:fontRef idx="minor">
+            <a:schemeClr val="lt1"/>
+          </a:fontRef>
+        </p:style>
+        <p:txBody>
+          <a:bodyPr rtlCol="0" anchor="ctr"/>
+          <a:lstStyle/>
+          <a:p>
+            <a:pPr algn="ctr"/>
+          </a:p>
+        </p:txBody>
+      </p:sp>
+      <p:sp>
+        <p:nvSpPr>
+          <p:cNvPr id="8" name="TextBox 7"/>
+          <p:cNvSpPr txBox="1"/>
+          <p:nvPr/>
+        </p:nvSpPr>
+        <p:spPr>
+          <a:xfrm>
+            <a:off x="6720840" y="1965960"/>
+            <a:ext cx="4389120" cy="201168"/>
+          </a:xfrm>
+          <a:prstGeom prst="rect">
+            <a:avLst/>
+          </a:prstGeom>
+          <a:noFill/>
+        </p:spPr>
+        <p:txBody>
+          <a:bodyPr wrap="square">
+            <a:spAutoFit/>
+          </a:bodyPr>
+          <a:lstStyle/>
+          <a:p>
+            <a:pPr algn="l"/>
+            <a:r>
+              <a:rPr sz="900" b="1" i="0">
+                <a:solidFill>
+                  <a:srgbClr val="60B8FF"/>
+                </a:solidFill>
+              </a:rPr>
+              <a:t>ADVERSARIAL FINETUNING</a:t>
+            </a:r>
+          </a:p>
+        </p:txBody>
+      </p:sp>
+      <p:sp>
+        <p:nvSpPr>
+          <p:cNvPr id="9" name="TextBox 8"/>
+          <p:cNvSpPr txBox="1"/>
+          <p:nvPr/>
+        </p:nvSpPr>
+        <p:spPr>
+          <a:xfrm>
+            <a:off x="6720840" y="2267712"/>
+            <a:ext cx="4480560" cy="731520"/>
+          </a:xfrm>
+          <a:prstGeom prst="rect">
+            <a:avLst/>
+          </a:prstGeom>
+          <a:noFill/>
+        </p:spPr>
+        <p:txBody>
+          <a:bodyPr wrap="square">
+            <a:spAutoFit/>
+          </a:bodyPr>
+          <a:lstStyle/>
+          <a:p>
+            <a:pPr algn="l"/>
+            <a:r>
+              <a:rPr sz="1200" b="0" i="0">
+                <a:solidFill>
+                  <a:srgbClr val="CCCCCC"/>
+                </a:solidFill>
+              </a:rPr>
+              <a:t>DPC-UNet detector finetuned on adversarial examples (square x5 oversample + DeepFool + blur pairs). Deployed only after the clean A/B gate.</a:t>
+            </a:r>
+          </a:p>
+        </p:txBody>
+      </p:sp>
+      <p:sp>
+        <p:nvSpPr>
+          <p:cNvPr id="10" name="TextBox 9"/>
+          <p:cNvSpPr txBox="1"/>
+          <p:nvPr/>
+        </p:nvSpPr>
+        <p:spPr>
+          <a:xfrm>
+            <a:off x="6720840" y="3063240"/>
+            <a:ext cx="4480560" cy="502920"/>
+          </a:xfrm>
+          <a:prstGeom prst="rect">
+            <a:avLst/>
+          </a:prstGeom>
+          <a:noFill/>
+        </p:spPr>
+        <p:txBody>
+          <a:bodyPr wrap="square">
+            <a:spAutoFit/>
+          </a:bodyPr>
+          <a:lstStyle/>
+          <a:p>
+            <a:pPr algn="l"/>
+            <a:r>
+              <a:rPr sz="1200" b="0" i="0">
+                <a:solidFill>
+                  <a:srgbClr val="CCCCCC"/>
+                </a:solidFill>
+              </a:rPr>
+              <a:t>- Clean performance: +0.003 mAP50 - no regression</a:t>
+            </a:r>
+          </a:p>
+          <a:p>
+            <a:pPr algn="l"/>
+            <a:r>
+              <a:rPr sz="1200" b="0" i="0">
+                <a:solidFill>
+                  <a:srgbClr val="CCCCCC"/>
+                </a:solidFill>
+              </a:rPr>
+              <a:t>- Attack resistance: delta within noise - no measurable gain yet</a:t>
+            </a:r>
+          </a:p>
+        </p:txBody>
+      </p:sp>
+      <p:sp>
+        <p:nvSpPr>
+          <p:cNvPr id="11" name="Rectangle 10"/>
+          <p:cNvSpPr/>
+          <p:nvPr/>
+        </p:nvSpPr>
+        <p:spPr>
+          <a:xfrm>
+            <a:off x="6537960" y="4069080"/>
+            <a:ext cx="4800600" cy="1417320"/>
           </a:xfrm>
           <a:prstGeom prst="rect">
             <a:avLst/>
@@ -7339,14 +8029,14 @@
       </p:sp>
       <p:sp>
         <p:nvSpPr>
-          <p:cNvPr id="5" name="TextBox 4"/>
-          <p:cNvSpPr txBox="1"/>
-          <p:nvPr/>
-        </p:nvSpPr>
-        <p:spPr>
-          <a:xfrm>
-            <a:off x="1005840" y="2468880"/>
-            <a:ext cx="3291840" cy="228600"/>
+          <p:cNvPr id="12" name="TextBox 11"/>
+          <p:cNvSpPr txBox="1"/>
+          <p:nvPr/>
+        </p:nvSpPr>
+        <p:spPr>
+          <a:xfrm>
+            <a:off x="6720840" y="4206240"/>
+            <a:ext cx="4389120" cy="201168"/>
           </a:xfrm>
           <a:prstGeom prst="rect">
             <a:avLst/>
@@ -7366,55 +8056,160 @@
                   <a:srgbClr val="60B8FF"/>
                 </a:solidFill>
               </a:rPr>
-              <a:t>PATCHES WORK</a:t>
-            </a:r>
-          </a:p>
-        </p:txBody>
-      </p:sp>
-      <p:sp>
-        <p:nvSpPr>
-          <p:cNvPr id="6" name="TextBox 5"/>
-          <p:cNvSpPr txBox="1"/>
-          <p:nvPr/>
-        </p:nvSpPr>
-        <p:spPr>
-          <a:xfrm>
-            <a:off x="1005840" y="2834640"/>
-            <a:ext cx="3017520" cy="1463040"/>
-          </a:xfrm>
-          <a:prstGeom prst="rect">
-            <a:avLst/>
-          </a:prstGeom>
-          <a:noFill/>
-        </p:spPr>
-        <p:txBody>
-          <a:bodyPr wrap="square">
-            <a:spAutoFit/>
-          </a:bodyPr>
-          <a:lstStyle/>
-          <a:p>
-            <a:pPr algn="l"/>
-            <a:r>
-              <a:rPr sz="1300" b="0" i="0">
+              <a:t>STATE OF PLAY</a:t>
+            </a:r>
+          </a:p>
+        </p:txBody>
+      </p:sp>
+      <p:sp>
+        <p:nvSpPr>
+          <p:cNvPr id="13" name="TextBox 12"/>
+          <p:cNvSpPr txBox="1"/>
+          <p:nvPr/>
+        </p:nvSpPr>
+        <p:spPr>
+          <a:xfrm>
+            <a:off x="6720840" y="4507992"/>
+            <a:ext cx="4480560" cy="749808"/>
+          </a:xfrm>
+          <a:prstGeom prst="rect">
+            <a:avLst/>
+          </a:prstGeom>
+          <a:noFill/>
+        </p:spPr>
+        <p:txBody>
+          <a:bodyPr wrap="square">
+            <a:spAutoFit/>
+          </a:bodyPr>
+          <a:lstStyle/>
+          <a:p>
+            <a:pPr algn="l"/>
+            <a:r>
+              <a:rPr sz="1200" b="0" i="0">
                 <a:solidFill>
                   <a:srgbClr val="CCCCCC"/>
                 </a:solidFill>
               </a:rPr>
-              <a:t>A 2.4% image patch suppresses YOLOv8n person detection by 90%. The effect transfers across model families at 10–50%.</a:t>
-            </a:r>
-          </a:p>
-        </p:txBody>
-      </p:sp>
-      <p:sp>
-        <p:nvSpPr>
-          <p:cNvPr id="7" name="Rectangle 6"/>
+              <a:t>Defenses partially recover attacked performance - from -60% to -34%. Finetuning is clean-safe but has not moved the needle on robustness yet. The arms race is still live.</a:t>
+            </a:r>
+          </a:p>
+        </p:txBody>
+      </p:sp>
+    </p:spTree>
+  </p:cSld>
+  <p:clrMapOvr>
+    <a:masterClrMapping/>
+  </p:clrMapOvr>
+</p:sld>
+</file>
+
+<file path=ppt/slides/slide8.xml><?xml version="1.0" encoding="utf-8"?>
+<p:sld xmlns:a="http://schemas.openxmlformats.org/drawingml/2006/main" xmlns:p="http://schemas.openxmlformats.org/presentationml/2006/main" xmlns:r="http://schemas.openxmlformats.org/officeDocument/2006/relationships">
+  <p:cSld>
+    <p:bg>
+      <p:bgPr>
+        <a:solidFill>
+          <a:srgbClr val="0A0A0F"/>
+        </a:solidFill>
+        <a:effectLst/>
+      </p:bgPr>
+    </p:bg>
+    <p:spTree>
+      <p:nvGrpSpPr>
+        <p:cNvPr id="1" name=""/>
+        <p:cNvGrpSpPr/>
+        <p:nvPr/>
+      </p:nvGrpSpPr>
+      <p:grpSpPr/>
+      <p:sp>
+        <p:nvSpPr>
+          <p:cNvPr id="2" name="TextBox 1"/>
+          <p:cNvSpPr txBox="1"/>
+          <p:nvPr/>
+        </p:nvSpPr>
+        <p:spPr>
+          <a:xfrm>
+            <a:off x="822960" y="411480"/>
+            <a:ext cx="3657600" cy="256032"/>
+          </a:xfrm>
+          <a:prstGeom prst="rect">
+            <a:avLst/>
+          </a:prstGeom>
+          <a:noFill/>
+        </p:spPr>
+        <p:txBody>
+          <a:bodyPr wrap="square">
+            <a:spAutoFit/>
+          </a:bodyPr>
+          <a:lstStyle/>
+          <a:p>
+            <a:pPr algn="l"/>
+            <a:r>
+              <a:rPr sz="900" b="1" i="0">
+                <a:solidFill>
+                  <a:srgbClr val="60B8FF"/>
+                </a:solidFill>
+              </a:rPr>
+              <a:t>DEFENSE TRACK - METHODOLOGY</a:t>
+            </a:r>
+          </a:p>
+        </p:txBody>
+      </p:sp>
+      <p:sp>
+        <p:nvSpPr>
+          <p:cNvPr id="3" name="TextBox 2"/>
+          <p:cNvSpPr txBox="1"/>
+          <p:nvPr/>
+        </p:nvSpPr>
+        <p:spPr>
+          <a:xfrm>
+            <a:off x="822960" y="777240"/>
+            <a:ext cx="10241280" cy="1463040"/>
+          </a:xfrm>
+          <a:prstGeom prst="rect">
+            <a:avLst/>
+          </a:prstGeom>
+          <a:noFill/>
+        </p:spPr>
+        <p:txBody>
+          <a:bodyPr wrap="square">
+            <a:spAutoFit/>
+          </a:bodyPr>
+          <a:lstStyle/>
+          <a:p>
+            <a:pPr algn="l"/>
+            <a:r>
+              <a:rPr sz="3800" b="1" i="0">
+                <a:solidFill>
+                  <a:srgbClr val="E8E8F0"/>
+                </a:solidFill>
+              </a:rPr>
+              <a:t>Arms Race</a:t>
+            </a:r>
+          </a:p>
+          <a:p>
+            <a:pPr algn="l"/>
+            <a:r>
+              <a:rPr sz="3800" b="1" i="0">
+                <a:solidFill>
+                  <a:srgbClr val="60B8FF"/>
+                </a:solidFill>
+              </a:rPr>
+              <a:t>Engineering</a:t>
+            </a:r>
+          </a:p>
+        </p:txBody>
+      </p:sp>
+      <p:sp>
+        <p:nvSpPr>
+          <p:cNvPr id="4" name="Rectangle 3"/>
           <p:cNvSpPr/>
           <p:nvPr/>
         </p:nvSpPr>
         <p:spPr>
           <a:xfrm>
-            <a:off x="4480560" y="2286000"/>
-            <a:ext cx="3291840" cy="2194560"/>
+            <a:off x="822960" y="1828800"/>
+            <a:ext cx="5303520" cy="3840480"/>
           </a:xfrm>
           <a:prstGeom prst="rect">
             <a:avLst/>
@@ -7450,88 +8245,348 @@
       </p:sp>
       <p:sp>
         <p:nvSpPr>
+          <p:cNvPr id="5" name="TextBox 4"/>
+          <p:cNvSpPr txBox="1"/>
+          <p:nvPr/>
+        </p:nvSpPr>
+        <p:spPr>
+          <a:xfrm>
+            <a:off x="1005840" y="1965960"/>
+            <a:ext cx="4937760" cy="201168"/>
+          </a:xfrm>
+          <a:prstGeom prst="rect">
+            <a:avLst/>
+          </a:prstGeom>
+          <a:noFill/>
+        </p:spPr>
+        <p:txBody>
+          <a:bodyPr wrap="square">
+            <a:spAutoFit/>
+          </a:bodyPr>
+          <a:lstStyle/>
+          <a:p>
+            <a:pPr algn="l"/>
+            <a:r>
+              <a:rPr sz="900" b="1" i="0">
+                <a:solidFill>
+                  <a:srgbClr val="60B8FF"/>
+                </a:solidFill>
+              </a:rPr>
+              <a:t>22-CYCLE AUTOMATION PIPELINE</a:t>
+            </a:r>
+          </a:p>
+        </p:txBody>
+      </p:sp>
+      <p:sp>
+        <p:nvSpPr>
+          <p:cNvPr id="6" name="TextBox 5"/>
+          <p:cNvSpPr txBox="1"/>
+          <p:nvPr/>
+        </p:nvSpPr>
+        <p:spPr>
+          <a:xfrm>
+            <a:off x="1005840" y="2331720"/>
+            <a:ext cx="4937760" cy="1645920"/>
+          </a:xfrm>
+          <a:prstGeom prst="rect">
+            <a:avLst/>
+          </a:prstGeom>
+          <a:noFill/>
+        </p:spPr>
+        <p:txBody>
+          <a:bodyPr wrap="square">
+            <a:spAutoFit/>
+          </a:bodyPr>
+          <a:lstStyle/>
+          <a:p>
+            <a:pPr algn="l"/>
+            <a:r>
+              <a:rPr sz="1200" b="0" i="0">
+                <a:solidFill>
+                  <a:srgbClr val="CCCCCC"/>
+                </a:solidFill>
+              </a:rPr>
+              <a:t>- Phase 1 - Attack: optimize patch hyperparameters against the current model; record mAP50 drop</a:t>
+            </a:r>
+          </a:p>
+          <a:p>
+            <a:pPr algn="l"/>
+            <a:r>
+              <a:rPr sz="1200" b="0" i="0">
+                <a:solidFill>
+                  <a:srgbClr val="CCCCCC"/>
+                </a:solidFill>
+              </a:rPr>
+              <a:t>- Phase 2 - Defense: tune preprocessing or learned denoiser against the best attack; record mAP50 recovery</a:t>
+            </a:r>
+          </a:p>
+          <a:p>
+            <a:pPr algn="l"/>
+            <a:r>
+              <a:rPr sz="1200" b="0" i="0">
+                <a:solidFill>
+                  <a:srgbClr val="CCCCCC"/>
+                </a:solidFill>
+              </a:rPr>
+              <a:t>- Phase 3 - Gate + report: deploy only if clean mAP50 stays at or above baseline; emit schema-enforced JSON</a:t>
+            </a:r>
+          </a:p>
+        </p:txBody>
+      </p:sp>
+      <p:sp>
+        <p:nvSpPr>
+          <p:cNvPr id="7" name="TextBox 6"/>
+          <p:cNvSpPr txBox="1"/>
+          <p:nvPr/>
+        </p:nvSpPr>
+        <p:spPr>
+          <a:xfrm>
+            <a:off x="1005840" y="4069080"/>
+            <a:ext cx="4937760" cy="411480"/>
+          </a:xfrm>
+          <a:prstGeom prst="rect">
+            <a:avLst/>
+          </a:prstGeom>
+          <a:noFill/>
+        </p:spPr>
+        <p:txBody>
+          <a:bodyPr wrap="square">
+            <a:spAutoFit/>
+          </a:bodyPr>
+          <a:lstStyle/>
+          <a:p>
+            <a:pPr algn="l"/>
+            <a:r>
+              <a:rPr sz="1200" b="0" i="0">
+                <a:solidFill>
+                  <a:srgbClr val="CCCCCC"/>
+                </a:solidFill>
+              </a:rPr>
+              <a:t>Each cycle produces a provenance-tracked artifact: attack config, defense config, before/after mAP50. No manual bookkeeping.</a:t>
+            </a:r>
+          </a:p>
+        </p:txBody>
+      </p:sp>
+      <p:sp>
+        <p:nvSpPr>
           <p:cNvPr id="8" name="TextBox 7"/>
           <p:cNvSpPr txBox="1"/>
           <p:nvPr/>
         </p:nvSpPr>
         <p:spPr>
           <a:xfrm>
-            <a:off x="4663440" y="2468880"/>
-            <a:ext cx="3291840" cy="228600"/>
-          </a:xfrm>
-          <a:prstGeom prst="rect">
-            <a:avLst/>
-          </a:prstGeom>
-          <a:noFill/>
-        </p:spPr>
-        <p:txBody>
-          <a:bodyPr wrap="square">
-            <a:spAutoFit/>
-          </a:bodyPr>
-          <a:lstStyle/>
-          <a:p>
-            <a:pPr algn="l"/>
-            <a:r>
-              <a:rPr sz="900" b="1" i="0">
+            <a:off x="1188720" y="4754880"/>
+            <a:ext cx="914400" cy="365760"/>
+          </a:xfrm>
+          <a:prstGeom prst="rect">
+            <a:avLst/>
+          </a:prstGeom>
+          <a:noFill/>
+        </p:spPr>
+        <p:txBody>
+          <a:bodyPr wrap="square">
+            <a:spAutoFit/>
+          </a:bodyPr>
+          <a:lstStyle/>
+          <a:p>
+            <a:pPr algn="ctr"/>
+            <a:r>
+              <a:rPr sz="2400" b="1" i="0">
+                <a:solidFill>
+                  <a:srgbClr val="3EFFA0"/>
+                </a:solidFill>
+              </a:rPr>
+              <a:t>22</a:t>
+            </a:r>
+          </a:p>
+        </p:txBody>
+      </p:sp>
+      <p:sp>
+        <p:nvSpPr>
+          <p:cNvPr id="9" name="TextBox 8"/>
+          <p:cNvSpPr txBox="1"/>
+          <p:nvPr/>
+        </p:nvSpPr>
+        <p:spPr>
+          <a:xfrm>
+            <a:off x="2788920" y="4754880"/>
+            <a:ext cx="914400" cy="365760"/>
+          </a:xfrm>
+          <a:prstGeom prst="rect">
+            <a:avLst/>
+          </a:prstGeom>
+          <a:noFill/>
+        </p:spPr>
+        <p:txBody>
+          <a:bodyPr wrap="square">
+            <a:spAutoFit/>
+          </a:bodyPr>
+          <a:lstStyle/>
+          <a:p>
+            <a:pPr algn="ctr"/>
+            <a:r>
+              <a:rPr sz="2400" b="1" i="0">
                 <a:solidFill>
                   <a:srgbClr val="60B8FF"/>
                 </a:solidFill>
               </a:rPr>
-              <a:t>ARCHITECTURE MATTERS</a:t>
-            </a:r>
-          </a:p>
-        </p:txBody>
-      </p:sp>
-      <p:sp>
-        <p:nvSpPr>
-          <p:cNvPr id="9" name="TextBox 8"/>
-          <p:cNvSpPr txBox="1"/>
-          <p:nvPr/>
-        </p:nvSpPr>
-        <p:spPr>
-          <a:xfrm>
-            <a:off x="4663440" y="2834640"/>
-            <a:ext cx="3017520" cy="1463040"/>
-          </a:xfrm>
-          <a:prstGeom prst="rect">
-            <a:avLst/>
-          </a:prstGeom>
-          <a:noFill/>
-        </p:spPr>
-        <p:txBody>
-          <a:bodyPr wrap="square">
-            <a:spAutoFit/>
-          </a:bodyPr>
-          <a:lstStyle/>
-          <a:p>
-            <a:pPr algn="l"/>
-            <a:r>
-              <a:rPr sz="1300" b="0" i="0">
-                <a:solidFill>
-                  <a:srgbClr val="CCCCCC"/>
-                </a:solidFill>
-              </a:rPr>
-              <a:t>YOLO26n's end-to-end Hungarian matching head creates a structural barrier. Loss convergence does not equal detection suppression.</a:t>
-            </a:r>
-          </a:p>
-        </p:txBody>
-      </p:sp>
-      <p:sp>
-        <p:nvSpPr>
-          <p:cNvPr id="10" name="Rectangle 9"/>
+              <a:t>4</a:t>
+            </a:r>
+          </a:p>
+        </p:txBody>
+      </p:sp>
+      <p:sp>
+        <p:nvSpPr>
+          <p:cNvPr id="10" name="TextBox 9"/>
+          <p:cNvSpPr txBox="1"/>
+          <p:nvPr/>
+        </p:nvSpPr>
+        <p:spPr>
+          <a:xfrm>
+            <a:off x="4343400" y="4754880"/>
+            <a:ext cx="914400" cy="365760"/>
+          </a:xfrm>
+          <a:prstGeom prst="rect">
+            <a:avLst/>
+          </a:prstGeom>
+          <a:noFill/>
+        </p:spPr>
+        <p:txBody>
+          <a:bodyPr wrap="square">
+            <a:spAutoFit/>
+          </a:bodyPr>
+          <a:lstStyle/>
+          <a:p>
+            <a:pPr algn="ctr"/>
+            <a:r>
+              <a:rPr sz="2400" b="1" i="0">
+                <a:solidFill>
+                  <a:srgbClr val="FFE066"/>
+                </a:solidFill>
+              </a:rPr>
+              <a:t>3</a:t>
+            </a:r>
+          </a:p>
+        </p:txBody>
+      </p:sp>
+      <p:sp>
+        <p:nvSpPr>
+          <p:cNvPr id="11" name="TextBox 10"/>
+          <p:cNvSpPr txBox="1"/>
+          <p:nvPr/>
+        </p:nvSpPr>
+        <p:spPr>
+          <a:xfrm>
+            <a:off x="1143000" y="5102352"/>
+            <a:ext cx="1005840" cy="182880"/>
+          </a:xfrm>
+          <a:prstGeom prst="rect">
+            <a:avLst/>
+          </a:prstGeom>
+          <a:noFill/>
+        </p:spPr>
+        <p:txBody>
+          <a:bodyPr wrap="square">
+            <a:spAutoFit/>
+          </a:bodyPr>
+          <a:lstStyle/>
+          <a:p>
+            <a:pPr algn="ctr"/>
+            <a:r>
+              <a:rPr sz="900" b="0" i="0">
+                <a:solidFill>
+                  <a:srgbClr val="888888"/>
+                </a:solidFill>
+              </a:rPr>
+              <a:t>cycles run</a:t>
+            </a:r>
+          </a:p>
+        </p:txBody>
+      </p:sp>
+      <p:sp>
+        <p:nvSpPr>
+          <p:cNvPr id="12" name="TextBox 11"/>
+          <p:cNvSpPr txBox="1"/>
+          <p:nvPr/>
+        </p:nvSpPr>
+        <p:spPr>
+          <a:xfrm>
+            <a:off x="2606040" y="5102352"/>
+            <a:ext cx="1280160" cy="182880"/>
+          </a:xfrm>
+          <a:prstGeom prst="rect">
+            <a:avLst/>
+          </a:prstGeom>
+          <a:noFill/>
+        </p:spPr>
+        <p:txBody>
+          <a:bodyPr wrap="square">
+            <a:spAutoFit/>
+          </a:bodyPr>
+          <a:lstStyle/>
+          <a:p>
+            <a:pPr algn="ctr"/>
+            <a:r>
+              <a:rPr sz="900" b="0" i="0">
+                <a:solidFill>
+                  <a:srgbClr val="888888"/>
+                </a:solidFill>
+              </a:rPr>
+              <a:t>defense types</a:t>
+            </a:r>
+          </a:p>
+        </p:txBody>
+      </p:sp>
+      <p:sp>
+        <p:nvSpPr>
+          <p:cNvPr id="13" name="TextBox 12"/>
+          <p:cNvSpPr txBox="1"/>
+          <p:nvPr/>
+        </p:nvSpPr>
+        <p:spPr>
+          <a:xfrm>
+            <a:off x="4206240" y="5102352"/>
+            <a:ext cx="1188720" cy="182880"/>
+          </a:xfrm>
+          <a:prstGeom prst="rect">
+            <a:avLst/>
+          </a:prstGeom>
+          <a:noFill/>
+        </p:spPr>
+        <p:txBody>
+          <a:bodyPr wrap="square">
+            <a:spAutoFit/>
+          </a:bodyPr>
+          <a:lstStyle/>
+          <a:p>
+            <a:pPr algn="ctr"/>
+            <a:r>
+              <a:rPr sz="900" b="0" i="0">
+                <a:solidFill>
+                  <a:srgbClr val="888888"/>
+                </a:solidFill>
+              </a:rPr>
+              <a:t>attack types</a:t>
+            </a:r>
+          </a:p>
+        </p:txBody>
+      </p:sp>
+      <p:sp>
+        <p:nvSpPr>
+          <p:cNvPr id="14" name="Rectangle 13"/>
           <p:cNvSpPr/>
           <p:nvPr/>
         </p:nvSpPr>
         <p:spPr>
           <a:xfrm>
-            <a:off x="8138160" y="2286000"/>
-            <a:ext cx="3291840" cy="2194560"/>
+            <a:off x="6537960" y="1828800"/>
+            <a:ext cx="4800600" cy="1645920"/>
           </a:xfrm>
           <a:prstGeom prst="rect">
             <a:avLst/>
           </a:prstGeom>
           <a:solidFill>
-            <a:srgbClr val="1A180D"/>
+            <a:srgbClr val="0D1A12"/>
           </a:solidFill>
           <a:ln>
             <a:noFill/>
@@ -7561,14 +8616,14 @@
       </p:sp>
       <p:sp>
         <p:nvSpPr>
-          <p:cNvPr id="11" name="TextBox 10"/>
-          <p:cNvSpPr txBox="1"/>
-          <p:nvPr/>
-        </p:nvSpPr>
-        <p:spPr>
-          <a:xfrm>
-            <a:off x="8321040" y="2468880"/>
-            <a:ext cx="3291840" cy="228600"/>
+          <p:cNvPr id="15" name="TextBox 14"/>
+          <p:cNvSpPr txBox="1"/>
+          <p:nvPr/>
+        </p:nvSpPr>
+        <p:spPr>
+          <a:xfrm>
+            <a:off x="6720840" y="1965960"/>
+            <a:ext cx="4389120" cy="201168"/>
           </a:xfrm>
           <a:prstGeom prst="rect">
             <a:avLst/>
@@ -7588,21 +8643,415 @@
                   <a:srgbClr val="60B8FF"/>
                 </a:solidFill>
               </a:rPr>
-              <a:t>NEXT STEPS</a:t>
-            </a:r>
-          </a:p>
-        </p:txBody>
-      </p:sp>
-      <p:sp>
-        <p:nvSpPr>
-          <p:cNvPr id="12" name="TextBox 11"/>
-          <p:cNvSpPr txBox="1"/>
-          <p:nvPr/>
-        </p:nvSpPr>
-        <p:spPr>
-          <a:xfrm>
-            <a:off x="8321040" y="2834640"/>
-            <a:ext cx="3017520" cy="1463040"/>
+              <a:t>c_dog - BEST DEFENSE</a:t>
+            </a:r>
+          </a:p>
+        </p:txBody>
+      </p:sp>
+      <p:sp>
+        <p:nvSpPr>
+          <p:cNvPr id="16" name="TextBox 15"/>
+          <p:cNvSpPr txBox="1"/>
+          <p:nvPr/>
+        </p:nvSpPr>
+        <p:spPr>
+          <a:xfrm>
+            <a:off x="6720840" y="2267712"/>
+            <a:ext cx="4480560" cy="868680"/>
+          </a:xfrm>
+          <a:prstGeom prst="rect">
+            <a:avLst/>
+          </a:prstGeom>
+          <a:noFill/>
+        </p:spPr>
+        <p:txBody>
+          <a:bodyPr wrap="square">
+            <a:spAutoFit/>
+          </a:bodyPr>
+          <a:lstStyle/>
+          <a:p>
+            <a:pPr algn="l"/>
+            <a:r>
+              <a:rPr sz="1200" b="0" i="0">
+                <a:solidFill>
+                  <a:srgbClr val="CCCCCC"/>
+                </a:solidFill>
+              </a:rPr>
+              <a:t>A small convolutional denoiser trained to strip adversarial structure from inputs before they reach the detector. It adapts to patch patterns rather than blindly smoothing.</a:t>
+            </a:r>
+          </a:p>
+        </p:txBody>
+      </p:sp>
+      <p:sp>
+        <p:nvSpPr>
+          <p:cNvPr id="17" name="TextBox 16"/>
+          <p:cNvSpPr txBox="1"/>
+          <p:nvPr/>
+        </p:nvSpPr>
+        <p:spPr>
+          <a:xfrm>
+            <a:off x="6720840" y="3246120"/>
+            <a:ext cx="4480560" cy="228600"/>
+          </a:xfrm>
+          <a:prstGeom prst="rect">
+            <a:avLst/>
+          </a:prstGeom>
+          <a:noFill/>
+        </p:spPr>
+        <p:txBody>
+          <a:bodyPr wrap="square">
+            <a:spAutoFit/>
+          </a:bodyPr>
+          <a:lstStyle/>
+          <a:p>
+            <a:pPr algn="l"/>
+            <a:r>
+              <a:rPr sz="1200" b="0" i="0">
+                <a:solidFill>
+                  <a:srgbClr val="FFE066"/>
+                </a:solidFill>
+              </a:rPr>
+              <a:t>square + c_dog: mAP50  0.238 -&gt; 0.394   (+65% recovery)</a:t>
+            </a:r>
+          </a:p>
+        </p:txBody>
+      </p:sp>
+      <p:sp>
+        <p:nvSpPr>
+          <p:cNvPr id="18" name="Rectangle 17"/>
+          <p:cNvSpPr/>
+          <p:nvPr/>
+        </p:nvSpPr>
+        <p:spPr>
+          <a:xfrm>
+            <a:off x="6537960" y="3749039"/>
+            <a:ext cx="4800600" cy="1783080"/>
+          </a:xfrm>
+          <a:prstGeom prst="rect">
+            <a:avLst/>
+          </a:prstGeom>
+          <a:solidFill>
+            <a:srgbClr val="12121A"/>
+          </a:solidFill>
+          <a:ln>
+            <a:noFill/>
+          </a:ln>
+        </p:spPr>
+        <p:style>
+          <a:lnRef idx="1">
+            <a:schemeClr val="accent1"/>
+          </a:lnRef>
+          <a:fillRef idx="3">
+            <a:schemeClr val="accent1"/>
+          </a:fillRef>
+          <a:effectRef idx="2">
+            <a:schemeClr val="accent1"/>
+          </a:effectRef>
+          <a:fontRef idx="minor">
+            <a:schemeClr val="lt1"/>
+          </a:fontRef>
+        </p:style>
+        <p:txBody>
+          <a:bodyPr rtlCol="0" anchor="ctr"/>
+          <a:lstStyle/>
+          <a:p>
+            <a:pPr algn="ctr"/>
+          </a:p>
+        </p:txBody>
+      </p:sp>
+      <p:sp>
+        <p:nvSpPr>
+          <p:cNvPr id="19" name="TextBox 18"/>
+          <p:cNvSpPr txBox="1"/>
+          <p:nvPr/>
+        </p:nvSpPr>
+        <p:spPr>
+          <a:xfrm>
+            <a:off x="6720840" y="3886200"/>
+            <a:ext cx="4389120" cy="201168"/>
+          </a:xfrm>
+          <a:prstGeom prst="rect">
+            <a:avLst/>
+          </a:prstGeom>
+          <a:noFill/>
+        </p:spPr>
+        <p:txBody>
+          <a:bodyPr wrap="square">
+            <a:spAutoFit/>
+          </a:bodyPr>
+          <a:lstStyle/>
+          <a:p>
+            <a:pPr algn="l"/>
+            <a:r>
+              <a:rPr sz="900" b="1" i="0">
+                <a:solidFill>
+                  <a:srgbClr val="60B8FF"/>
+                </a:solidFill>
+              </a:rPr>
+              <a:t>ADVERSARIAL FINETUNING</a:t>
+            </a:r>
+          </a:p>
+        </p:txBody>
+      </p:sp>
+      <p:sp>
+        <p:nvSpPr>
+          <p:cNvPr id="20" name="TextBox 19"/>
+          <p:cNvSpPr txBox="1"/>
+          <p:nvPr/>
+        </p:nvSpPr>
+        <p:spPr>
+          <a:xfrm>
+            <a:off x="6720840" y="4187952"/>
+            <a:ext cx="4480560" cy="1143000"/>
+          </a:xfrm>
+          <a:prstGeom prst="rect">
+            <a:avLst/>
+          </a:prstGeom>
+          <a:noFill/>
+        </p:spPr>
+        <p:txBody>
+          <a:bodyPr wrap="square">
+            <a:spAutoFit/>
+          </a:bodyPr>
+          <a:lstStyle/>
+          <a:p>
+            <a:pPr algn="l"/>
+            <a:r>
+              <a:rPr sz="1100" b="0" i="0">
+                <a:solidFill>
+                  <a:srgbClr val="CCCCCC"/>
+                </a:solidFill>
+              </a:rPr>
+              <a:t>- Architecture: DPC-UNet detector</a:t>
+            </a:r>
+          </a:p>
+          <a:p>
+            <a:pPr algn="l"/>
+            <a:r>
+              <a:rPr sz="1100" b="0" i="0">
+                <a:solidFill>
+                  <a:srgbClr val="CCCCCC"/>
+                </a:solidFill>
+              </a:rPr>
+              <a:t>- Mix: square x5 oversample + DeepFool + blur pairs</a:t>
+            </a:r>
+          </a:p>
+          <a:p>
+            <a:pPr algn="l"/>
+            <a:r>
+              <a:rPr sz="1100" b="0" i="0">
+                <a:solidFill>
+                  <a:srgbClr val="CCCCCC"/>
+                </a:solidFill>
+              </a:rPr>
+              <a:t>- Gate: deploy only if clean mAP50 &gt;= 0.600</a:t>
+            </a:r>
+          </a:p>
+          <a:p>
+            <a:pPr algn="l"/>
+            <a:r>
+              <a:rPr sz="1100" b="0" i="0">
+                <a:solidFill>
+                  <a:srgbClr val="CCCCCC"/>
+                </a:solidFill>
+              </a:rPr>
+              <a:t>- Result: +0.003 clean mAP50 - gate passed</a:t>
+            </a:r>
+          </a:p>
+          <a:p>
+            <a:pPr algn="l"/>
+            <a:r>
+              <a:rPr sz="1100" b="0" i="0">
+                <a:solidFill>
+                  <a:srgbClr val="CCCCCC"/>
+                </a:solidFill>
+              </a:rPr>
+              <a:t>- Attack resistance: delta within noise - open problem</a:t>
+            </a:r>
+          </a:p>
+        </p:txBody>
+      </p:sp>
+    </p:spTree>
+  </p:cSld>
+  <p:clrMapOvr>
+    <a:masterClrMapping/>
+  </p:clrMapOvr>
+</p:sld>
+</file>
+
+<file path=ppt/slides/slide9.xml><?xml version="1.0" encoding="utf-8"?>
+<p:sld xmlns:a="http://schemas.openxmlformats.org/drawingml/2006/main" xmlns:p="http://schemas.openxmlformats.org/presentationml/2006/main" xmlns:r="http://schemas.openxmlformats.org/officeDocument/2006/relationships">
+  <p:cSld>
+    <p:bg>
+      <p:bgPr>
+        <a:solidFill>
+          <a:srgbClr val="0A0A0F"/>
+        </a:solidFill>
+        <a:effectLst/>
+      </p:bgPr>
+    </p:bg>
+    <p:spTree>
+      <p:nvGrpSpPr>
+        <p:cNvPr id="1" name=""/>
+        <p:cNvGrpSpPr/>
+        <p:nvPr/>
+      </p:nvGrpSpPr>
+      <p:grpSpPr/>
+      <p:sp>
+        <p:nvSpPr>
+          <p:cNvPr id="2" name="TextBox 1"/>
+          <p:cNvSpPr txBox="1"/>
+          <p:nvPr/>
+        </p:nvSpPr>
+        <p:spPr>
+          <a:xfrm>
+            <a:off x="822960" y="411480"/>
+            <a:ext cx="3657600" cy="256032"/>
+          </a:xfrm>
+          <a:prstGeom prst="rect">
+            <a:avLst/>
+          </a:prstGeom>
+          <a:noFill/>
+        </p:spPr>
+        <p:txBody>
+          <a:bodyPr wrap="square">
+            <a:spAutoFit/>
+          </a:bodyPr>
+          <a:lstStyle/>
+          <a:p>
+            <a:pPr algn="l"/>
+            <a:r>
+              <a:rPr sz="900" b="1" i="0">
+                <a:solidFill>
+                  <a:srgbClr val="60B8FF"/>
+                </a:solidFill>
+              </a:rPr>
+              <a:t>LIVE DEMONSTRATION</a:t>
+            </a:r>
+          </a:p>
+        </p:txBody>
+      </p:sp>
+      <p:sp>
+        <p:nvSpPr>
+          <p:cNvPr id="3" name="TextBox 2"/>
+          <p:cNvSpPr txBox="1"/>
+          <p:nvPr/>
+        </p:nvSpPr>
+        <p:spPr>
+          <a:xfrm>
+            <a:off x="822960" y="1143000"/>
+            <a:ext cx="5029200" cy="731520"/>
+          </a:xfrm>
+          <a:prstGeom prst="rect">
+            <a:avLst/>
+          </a:prstGeom>
+          <a:noFill/>
+        </p:spPr>
+        <p:txBody>
+          <a:bodyPr wrap="square">
+            <a:spAutoFit/>
+          </a:bodyPr>
+          <a:lstStyle/>
+          <a:p>
+            <a:pPr algn="l"/>
+            <a:r>
+              <a:rPr sz="4000" b="1" i="0">
+                <a:solidFill>
+                  <a:srgbClr val="3EFFA0"/>
+                </a:solidFill>
+              </a:rPr>
+              <a:t>Live Demo</a:t>
+            </a:r>
+          </a:p>
+        </p:txBody>
+      </p:sp>
+      <p:sp>
+        <p:nvSpPr>
+          <p:cNvPr id="4" name="TextBox 3"/>
+          <p:cNvSpPr txBox="1"/>
+          <p:nvPr/>
+        </p:nvSpPr>
+        <p:spPr>
+          <a:xfrm>
+            <a:off x="822960" y="2011680"/>
+            <a:ext cx="5669280" cy="502920"/>
+          </a:xfrm>
+          <a:prstGeom prst="rect">
+            <a:avLst/>
+          </a:prstGeom>
+          <a:noFill/>
+        </p:spPr>
+        <p:txBody>
+          <a:bodyPr wrap="square">
+            <a:spAutoFit/>
+          </a:bodyPr>
+          <a:lstStyle/>
+          <a:p>
+            <a:pPr algn="l"/>
+            <a:r>
+              <a:rPr sz="1400" b="0" i="0">
+                <a:solidFill>
+                  <a:srgbClr val="CCCCCC"/>
+                </a:solidFill>
+              </a:rPr>
+              <a:t>Split-screen: clean YOLO detections on the left, patch digitally overlaid on the right.</a:t>
+            </a:r>
+          </a:p>
+        </p:txBody>
+      </p:sp>
+      <p:sp>
+        <p:nvSpPr>
+          <p:cNvPr id="5" name="Rectangle 4"/>
+          <p:cNvSpPr/>
+          <p:nvPr/>
+        </p:nvSpPr>
+        <p:spPr>
+          <a:xfrm>
+            <a:off x="822960" y="2651760"/>
+            <a:ext cx="3840480" cy="18288"/>
+          </a:xfrm>
+          <a:prstGeom prst="rect">
+            <a:avLst/>
+          </a:prstGeom>
+          <a:solidFill>
+            <a:srgbClr val="1E1E28"/>
+          </a:solidFill>
+          <a:ln>
+            <a:noFill/>
+          </a:ln>
+        </p:spPr>
+        <p:style>
+          <a:lnRef idx="1">
+            <a:schemeClr val="accent1"/>
+          </a:lnRef>
+          <a:fillRef idx="3">
+            <a:schemeClr val="accent1"/>
+          </a:fillRef>
+          <a:effectRef idx="2">
+            <a:schemeClr val="accent1"/>
+          </a:effectRef>
+          <a:fontRef idx="minor">
+            <a:schemeClr val="lt1"/>
+          </a:fontRef>
+        </p:style>
+        <p:txBody>
+          <a:bodyPr rtlCol="0" anchor="ctr"/>
+          <a:lstStyle/>
+          <a:p>
+            <a:pPr algn="ctr"/>
+          </a:p>
+        </p:txBody>
+      </p:sp>
+      <p:sp>
+        <p:nvSpPr>
+          <p:cNvPr id="6" name="TextBox 5"/>
+          <p:cNvSpPr txBox="1"/>
+          <p:nvPr/>
+        </p:nvSpPr>
+        <p:spPr>
+          <a:xfrm>
+            <a:off x="822960" y="2834640"/>
+            <a:ext cx="5669280" cy="868680"/>
           </a:xfrm>
           <a:prstGeom prst="rect">
             <a:avLst/>
@@ -7622,8 +9071,273 @@
                   <a:srgbClr val="CCCCCC"/>
                 </a:solidFill>
               </a:rPr>
-              <a:t>Route gradients through the one2one head (Wang et al. 2026). Adversarial training as a defense. Physical robustness evaluation.</a:t>
-            </a:r>
+              <a:t>- Patch: 100 x 100 px, YOLOv8n</a:t>
+            </a:r>
+          </a:p>
+          <a:p>
+            <a:pPr algn="l"/>
+            <a:r>
+              <a:rPr sz="1300" b="0" i="0">
+                <a:solidFill>
+                  <a:srgbClr val="CCCCCC"/>
+                </a:solidFill>
+              </a:rPr>
+              <a:t>- Placed on the torso of the largest detected person</a:t>
+            </a:r>
+          </a:p>
+          <a:p>
+            <a:pPr algn="l"/>
+            <a:r>
+              <a:rPr sz="1300" b="0" i="0">
+                <a:solidFill>
+                  <a:srgbClr val="CCCCCC"/>
+                </a:solidFill>
+              </a:rPr>
+              <a:t>- Rolling 30-frame suppression average</a:t>
+            </a:r>
+          </a:p>
+        </p:txBody>
+      </p:sp>
+      <p:sp>
+        <p:nvSpPr>
+          <p:cNvPr id="7" name="Rectangle 6"/>
+          <p:cNvSpPr/>
+          <p:nvPr/>
+        </p:nvSpPr>
+        <p:spPr>
+          <a:xfrm>
+            <a:off x="822960" y="3822191"/>
+            <a:ext cx="3840480" cy="18288"/>
+          </a:xfrm>
+          <a:prstGeom prst="rect">
+            <a:avLst/>
+          </a:prstGeom>
+          <a:solidFill>
+            <a:srgbClr val="1E1E28"/>
+          </a:solidFill>
+          <a:ln>
+            <a:noFill/>
+          </a:ln>
+        </p:spPr>
+        <p:style>
+          <a:lnRef idx="1">
+            <a:schemeClr val="accent1"/>
+          </a:lnRef>
+          <a:fillRef idx="3">
+            <a:schemeClr val="accent1"/>
+          </a:fillRef>
+          <a:effectRef idx="2">
+            <a:schemeClr val="accent1"/>
+          </a:effectRef>
+          <a:fontRef idx="minor">
+            <a:schemeClr val="lt1"/>
+          </a:fontRef>
+        </p:style>
+        <p:txBody>
+          <a:bodyPr rtlCol="0" anchor="ctr"/>
+          <a:lstStyle/>
+          <a:p>
+            <a:pPr algn="ctr"/>
+          </a:p>
+        </p:txBody>
+      </p:sp>
+      <p:sp>
+        <p:nvSpPr>
+          <p:cNvPr id="8" name="Rectangle 7"/>
+          <p:cNvSpPr/>
+          <p:nvPr/>
+        </p:nvSpPr>
+        <p:spPr>
+          <a:xfrm>
+            <a:off x="822960" y="4069080"/>
+            <a:ext cx="5852160" cy="1463040"/>
+          </a:xfrm>
+          <a:prstGeom prst="rect">
+            <a:avLst/>
+          </a:prstGeom>
+          <a:solidFill>
+            <a:srgbClr val="1A0D0D"/>
+          </a:solidFill>
+          <a:ln>
+            <a:noFill/>
+          </a:ln>
+        </p:spPr>
+        <p:style>
+          <a:lnRef idx="1">
+            <a:schemeClr val="accent1"/>
+          </a:lnRef>
+          <a:fillRef idx="3">
+            <a:schemeClr val="accent1"/>
+          </a:fillRef>
+          <a:effectRef idx="2">
+            <a:schemeClr val="accent1"/>
+          </a:effectRef>
+          <a:fontRef idx="minor">
+            <a:schemeClr val="lt1"/>
+          </a:fontRef>
+        </p:style>
+        <p:txBody>
+          <a:bodyPr rtlCol="0" anchor="ctr"/>
+          <a:lstStyle/>
+          <a:p>
+            <a:pPr algn="ctr"/>
+          </a:p>
+        </p:txBody>
+      </p:sp>
+      <p:sp>
+        <p:nvSpPr>
+          <p:cNvPr id="9" name="TextBox 8"/>
+          <p:cNvSpPr txBox="1"/>
+          <p:nvPr/>
+        </p:nvSpPr>
+        <p:spPr>
+          <a:xfrm>
+            <a:off x="1005840" y="4187952"/>
+            <a:ext cx="5486400" cy="201168"/>
+          </a:xfrm>
+          <a:prstGeom prst="rect">
+            <a:avLst/>
+          </a:prstGeom>
+          <a:noFill/>
+        </p:spPr>
+        <p:txBody>
+          <a:bodyPr wrap="square">
+            <a:spAutoFit/>
+          </a:bodyPr>
+          <a:lstStyle/>
+          <a:p>
+            <a:pPr algn="l"/>
+            <a:r>
+              <a:rPr sz="900" b="1" i="0">
+                <a:solidFill>
+                  <a:srgbClr val="60B8FF"/>
+                </a:solidFill>
+              </a:rPr>
+              <a:t>PHYSICAL PRINT</a:t>
+            </a:r>
+          </a:p>
+        </p:txBody>
+      </p:sp>
+      <p:sp>
+        <p:nvSpPr>
+          <p:cNvPr id="10" name="TextBox 9"/>
+          <p:cNvSpPr txBox="1"/>
+          <p:nvPr/>
+        </p:nvSpPr>
+        <p:spPr>
+          <a:xfrm>
+            <a:off x="1005840" y="4462272"/>
+            <a:ext cx="5486400" cy="822960"/>
+          </a:xfrm>
+          <a:prstGeom prst="rect">
+            <a:avLst/>
+          </a:prstGeom>
+          <a:noFill/>
+        </p:spPr>
+        <p:txBody>
+          <a:bodyPr wrap="square">
+            <a:spAutoFit/>
+          </a:bodyPr>
+          <a:lstStyle/>
+          <a:p>
+            <a:pPr algn="l"/>
+            <a:r>
+              <a:rPr sz="1200" b="0" i="0">
+                <a:solidFill>
+                  <a:srgbClr val="FFE066"/>
+                </a:solidFill>
+              </a:rPr>
+              <a:t>Patch exported at 300 DPI, 8 x 8 inches.</a:t>
+            </a:r>
+          </a:p>
+          <a:p>
+            <a:pPr algn="l"/>
+            <a:r>
+              <a:rPr sz="1200" b="0" i="0">
+                <a:solidFill>
+                  <a:srgbClr val="CCCCCC"/>
+                </a:solidFill>
+              </a:rPr>
+              <a:t>Physical suppression is roughly 30-60% because printers, lighting, and angle perturb the patch.</a:t>
+            </a:r>
+          </a:p>
+          <a:p>
+            <a:pPr algn="l"/>
+            <a:r>
+              <a:rPr sz="1200" b="0" i="0">
+                <a:solidFill>
+                  <a:srgbClr val="CCCCCC"/>
+                </a:solidFill>
+              </a:rPr>
+              <a:t>NPS loss during training partially compensates.</a:t>
+            </a:r>
+          </a:p>
+        </p:txBody>
+      </p:sp>
+      <p:pic>
+        <p:nvPicPr>
+          <p:cNvPr id="11" name="Picture 10" descr="patch.png"/>
+          <p:cNvPicPr>
+            <a:picLocks noChangeAspect="1"/>
+          </p:cNvPicPr>
+          <p:nvPr/>
+        </p:nvPicPr>
+        <p:blipFill>
+          <a:blip r:embed="rId2"/>
+          <a:stretch>
+            <a:fillRect/>
+          </a:stretch>
+        </p:blipFill>
+        <p:spPr>
+          <a:xfrm>
+            <a:off x="7818120" y="1463040"/>
+            <a:ext cx="2743200" cy="2743200"/>
+          </a:xfrm>
+          <a:prstGeom prst="rect">
+            <a:avLst/>
+          </a:prstGeom>
+        </p:spPr>
+      </p:pic>
+      <p:sp>
+        <p:nvSpPr>
+          <p:cNvPr id="12" name="Rectangle 11"/>
+          <p:cNvSpPr/>
+          <p:nvPr/>
+        </p:nvSpPr>
+        <p:spPr>
+          <a:xfrm>
+            <a:off x="7863840" y="4434840"/>
+            <a:ext cx="2651760" cy="640080"/>
+          </a:xfrm>
+          <a:prstGeom prst="rect">
+            <a:avLst/>
+          </a:prstGeom>
+          <a:solidFill>
+            <a:srgbClr val="12121A"/>
+          </a:solidFill>
+          <a:ln>
+            <a:noFill/>
+          </a:ln>
+        </p:spPr>
+        <p:style>
+          <a:lnRef idx="1">
+            <a:schemeClr val="accent1"/>
+          </a:lnRef>
+          <a:fillRef idx="3">
+            <a:schemeClr val="accent1"/>
+          </a:fillRef>
+          <a:effectRef idx="2">
+            <a:schemeClr val="accent1"/>
+          </a:effectRef>
+          <a:fontRef idx="minor">
+            <a:schemeClr val="lt1"/>
+          </a:fontRef>
+        </p:style>
+        <p:txBody>
+          <a:bodyPr rtlCol="0" anchor="ctr"/>
+          <a:lstStyle/>
+          <a:p>
+            <a:pPr algn="ctr"/>
           </a:p>
         </p:txBody>
       </p:sp>
@@ -7635,28 +9349,29 @@
         </p:nvSpPr>
         <p:spPr>
           <a:xfrm>
-            <a:off x="822960" y="5943600"/>
-            <a:ext cx="10515600" cy="411480"/>
-          </a:xfrm>
-          <a:prstGeom prst="rect">
-            <a:avLst/>
-          </a:prstGeom>
-          <a:noFill/>
-        </p:spPr>
-        <p:txBody>
-          <a:bodyPr wrap="square">
-            <a:spAutoFit/>
-          </a:bodyPr>
-          <a:lstStyle/>
-          <a:p>
-            <a:pPr algn="l"/>
-            <a:r>
-              <a:rPr sz="1200" b="0" i="0">
-                <a:solidFill>
-                  <a:srgbClr val="60B8FF"/>
-                </a:solidFill>
-              </a:rPr>
-              <a:t>Training script · Colab notebook · Live demo · All results  →  github.com/Cmaddock99/Patch_Yolo</a:t>
+            <a:off x="7955280" y="4572000"/>
+            <a:ext cx="2468880" cy="365760"/>
+          </a:xfrm>
+          <a:prstGeom prst="rect">
+            <a:avLst/>
+          </a:prstGeom>
+          <a:noFill/>
+        </p:spPr>
+        <p:txBody>
+          <a:bodyPr wrap="square">
+            <a:spAutoFit/>
+          </a:bodyPr>
+          <a:lstStyle/>
+          <a:p>
+            <a:pPr algn="ctr"/>
+            <a:r>
+              <a:rPr sz="1000" b="0" i="0">
+                <a:solidFill>
+                  <a:srgbClr val="888888"/>
+                </a:solidFill>
+              </a:rPr>
+              <a:t>YOLOv8n patch - 90% suppression
+100 x 100 px - shown 2x</a:t>
             </a:r>
           </a:p>
         </p:txBody>

--- a/presentation.pptx
+++ b/presentation.pptx
@@ -3213,7 +3213,7 @@
                   <a:srgbClr val="888888"/>
                 </a:solidFill>
               </a:rPr>
-              <a:t>A two-track pipeline for systematic attack and defense evaluation across YOLO model generations</a:t>
+              <a:t>Two complementary tracks for attack analysis and defense-cycle evaluation across YOLO generations</a:t>
             </a:r>
           </a:p>
         </p:txBody>
@@ -3409,7 +3409,7 @@
         <p:spPr>
           <a:xfrm>
             <a:off x="822960" y="2148840"/>
-            <a:ext cx="3291840" cy="2240280"/>
+            <a:ext cx="3291840" cy="2468880"/>
           </a:xfrm>
           <a:prstGeom prst="rect">
             <a:avLst/>
@@ -3486,27 +3486,27 @@
         <p:spPr>
           <a:xfrm>
             <a:off x="1005840" y="2651760"/>
-            <a:ext cx="3017520" cy="1417320"/>
-          </a:xfrm>
-          <a:prstGeom prst="rect">
-            <a:avLst/>
-          </a:prstGeom>
-          <a:noFill/>
-        </p:spPr>
-        <p:txBody>
-          <a:bodyPr wrap="square">
-            <a:spAutoFit/>
-          </a:bodyPr>
-          <a:lstStyle/>
-          <a:p>
-            <a:pPr algn="l"/>
-            <a:r>
-              <a:rPr sz="1300" b="0" i="0">
+            <a:ext cx="3017520" cy="1737360"/>
+          </a:xfrm>
+          <a:prstGeom prst="rect">
+            <a:avLst/>
+          </a:prstGeom>
+          <a:noFill/>
+        </p:spPr>
+        <p:txBody>
+          <a:bodyPr wrap="square">
+            <a:spAutoFit/>
+          </a:bodyPr>
+          <a:lstStyle/>
+          <a:p>
+            <a:pPr algn="l"/>
+            <a:r>
+              <a:rPr sz="1200" b="0" i="0">
                 <a:solidFill>
                   <a:srgbClr val="CCCCCC"/>
                 </a:solidFill>
               </a:rPr>
-              <a:t>A reproducible two-track pipeline producing schema-enforced results across 3 YOLO generations, 3 attack types, 4 defense types, and 22 automated cycles.</a:t>
+              <a:t>Two complementary repos, not one merged pipeline: Adversarial_Patch reports cross-generation patch training and transfer on YOLOv8n, YOLO11n, and YOLO26n; YOLO-Bad-Triangle reports 22 recorded defense-cycle artifacts, with current canonical trends taken from the post-switch series.</a:t>
             </a:r>
           </a:p>
         </p:txBody>
@@ -3520,7 +3520,7 @@
         <p:spPr>
           <a:xfrm>
             <a:off x="4480560" y="2148840"/>
-            <a:ext cx="3291840" cy="2240280"/>
+            <a:ext cx="3291840" cy="2468880"/>
           </a:xfrm>
           <a:prstGeom prst="rect">
             <a:avLst/>
@@ -3597,22 +3597,22 @@
         <p:spPr>
           <a:xfrm>
             <a:off x="4663440" y="2651760"/>
-            <a:ext cx="3017520" cy="1417320"/>
-          </a:xfrm>
-          <a:prstGeom prst="rect">
-            <a:avLst/>
-          </a:prstGeom>
-          <a:noFill/>
-        </p:spPr>
-        <p:txBody>
-          <a:bodyPr wrap="square">
-            <a:spAutoFit/>
-          </a:bodyPr>
-          <a:lstStyle/>
-          <a:p>
-            <a:pPr algn="l"/>
-            <a:r>
-              <a:rPr sz="1300" b="0" i="0">
+            <a:ext cx="3017520" cy="1737360"/>
+          </a:xfrm>
+          <a:prstGeom prst="rect">
+            <a:avLst/>
+          </a:prstGeom>
+          <a:noFill/>
+        </p:spPr>
+        <p:txBody>
+          <a:bodyPr wrap="square">
+            <a:spAutoFit/>
+          </a:bodyPr>
+          <a:lstStyle/>
+          <a:p>
+            <a:pPr algn="l"/>
+            <a:r>
+              <a:rPr sz="1200" b="0" i="0">
                 <a:solidFill>
                   <a:srgbClr val="CCCCCC"/>
                 </a:solidFill>
@@ -3631,7 +3631,7 @@
         <p:spPr>
           <a:xfrm>
             <a:off x="8138160" y="2148840"/>
-            <a:ext cx="3291840" cy="2240280"/>
+            <a:ext cx="3291840" cy="2468880"/>
           </a:xfrm>
           <a:prstGeom prst="rect">
             <a:avLst/>
@@ -3708,22 +3708,22 @@
         <p:spPr>
           <a:xfrm>
             <a:off x="8321040" y="2651760"/>
-            <a:ext cx="3017520" cy="1417320"/>
-          </a:xfrm>
-          <a:prstGeom prst="rect">
-            <a:avLst/>
-          </a:prstGeom>
-          <a:noFill/>
-        </p:spPr>
-        <p:txBody>
-          <a:bodyPr wrap="square">
-            <a:spAutoFit/>
-          </a:bodyPr>
-          <a:lstStyle/>
-          <a:p>
-            <a:pPr algn="l"/>
-            <a:r>
-              <a:rPr sz="1300" b="0" i="0">
+            <a:ext cx="3017520" cy="1737360"/>
+          </a:xfrm>
+          <a:prstGeom prst="rect">
+            <a:avLst/>
+          </a:prstGeom>
+          <a:noFill/>
+        </p:spPr>
+        <p:txBody>
+          <a:bodyPr wrap="square">
+            <a:spAutoFit/>
+          </a:bodyPr>
+          <a:lstStyle/>
+          <a:p>
+            <a:pPr algn="l"/>
+            <a:r>
+              <a:rPr sz="1200" b="0" i="0">
                 <a:solidFill>
                   <a:srgbClr val="CCCCCC"/>
                 </a:solidFill>
@@ -3785,27 +3785,28 @@
         <p:spPr>
           <a:xfrm>
             <a:off x="822960" y="5440680"/>
-            <a:ext cx="10515600" cy="365760"/>
-          </a:xfrm>
-          <a:prstGeom prst="rect">
-            <a:avLst/>
-          </a:prstGeom>
-          <a:noFill/>
-        </p:spPr>
-        <p:txBody>
-          <a:bodyPr wrap="square">
-            <a:spAutoFit/>
-          </a:bodyPr>
-          <a:lstStyle/>
-          <a:p>
-            <a:pPr algn="l"/>
-            <a:r>
-              <a:rPr sz="1200" b="0" i="0">
+            <a:ext cx="10515600" cy="548640"/>
+          </a:xfrm>
+          <a:prstGeom prst="rect">
+            <a:avLst/>
+          </a:prstGeom>
+          <a:noFill/>
+        </p:spPr>
+        <p:txBody>
+          <a:bodyPr wrap="square">
+            <a:spAutoFit/>
+          </a:bodyPr>
+          <a:lstStyle/>
+          <a:p>
+            <a:pPr algn="l"/>
+            <a:r>
+              <a:rPr sz="1100" b="0" i="0">
                 <a:solidFill>
                   <a:srgbClr val="60B8FF"/>
                 </a:solidFill>
               </a:rPr>
-              <a:t>Training script | Colab notebook | Live demo | All results -&gt; github.com/Cmaddock99/Patch_Yolo</a:t>
+              <a:t>Attack repo -&gt; github.com/Cmaddock99/Patch_Yolo
+Defense repo -&gt; github.com/Cmaddock99/YOLO-Bad-Triangle</a:t>
             </a:r>
           </a:p>
         </p:txBody>
@@ -3899,7 +3900,7 @@
                   <a:srgbClr val="E8E8F0"/>
                 </a:solidFill>
               </a:rPr>
-              <a:t>Two-Track</a:t>
+              <a:t>Two Complementary</a:t>
             </a:r>
           </a:p>
           <a:p>
@@ -3910,7 +3911,7 @@
                   <a:srgbClr val="60B8FF"/>
                 </a:solidFill>
               </a:rPr>
-              <a:t>Pipeline</a:t>
+              <a:t>Tracks</a:t>
             </a:r>
           </a:p>
         </p:txBody>
@@ -4086,7 +4087,7 @@
                   <a:srgbClr val="CCCCCC"/>
                 </a:solidFill>
               </a:rPr>
-              <a:t>- Cross-architecture transfer evaluation</a:t>
+              <a:t>- Cross-model transfer evaluation across YOLO generations</a:t>
             </a:r>
           </a:p>
           <a:p>
@@ -4273,7 +4274,7 @@
                   <a:srgbClr val="CCCCCC"/>
                 </a:solidFill>
               </a:rPr>
-              <a:t>- 22 automated hyperparameter-optimization cycles</a:t>
+              <a:t>- 22 recorded automated cycles in the defense repo</a:t>
             </a:r>
           </a:p>
           <a:p>
@@ -4284,7 +4285,7 @@
                   <a:srgbClr val="CCCCCC"/>
                 </a:solidFill>
               </a:rPr>
-              <a:t>- Adversarial finetuning with a clean A/B deployment gate</a:t>
+              <a:t>- DPC-UNet checkpoint finetuning with clean A/B deployment gate</a:t>
             </a:r>
           </a:p>
           <a:p>
@@ -4320,27 +4321,27 @@
         <p:spPr>
           <a:xfrm>
             <a:off x="822960" y="4983480"/>
-            <a:ext cx="10424160" cy="548640"/>
-          </a:xfrm>
-          <a:prstGeom prst="rect">
-            <a:avLst/>
-          </a:prstGeom>
-          <a:noFill/>
-        </p:spPr>
-        <p:txBody>
-          <a:bodyPr wrap="square">
-            <a:spAutoFit/>
-          </a:bodyPr>
-          <a:lstStyle/>
-          <a:p>
-            <a:pPr algn="l"/>
-            <a:r>
-              <a:rPr sz="1300" b="0" i="0">
+            <a:ext cx="10424160" cy="731520"/>
+          </a:xfrm>
+          <a:prstGeom prst="rect">
+            <a:avLst/>
+          </a:prstGeom>
+          <a:noFill/>
+        </p:spPr>
+        <p:txBody>
+          <a:bodyPr wrap="square">
+            <a:spAutoFit/>
+          </a:bodyPr>
+          <a:lstStyle/>
+          <a:p>
+            <a:pPr algn="l"/>
+            <a:r>
+              <a:rPr sz="1200" b="0" i="0">
                 <a:solidFill>
                   <a:srgbClr val="888888"/>
                 </a:solidFill>
               </a:rPr>
-              <a:t>Both tracks share a common image set and produce structured artifacts. Findings from each cycle inform the next.</a:t>
+              <a:t>These are complementary sibling repos, not one shared-image runtime loop: the attack track uses a 48-image common manifest, while the defense track runs automated cycles on a COCO subset and writes its own reports.</a:t>
             </a:r>
           </a:p>
         </p:txBody>
@@ -5470,7 +5471,7 @@
                   <a:srgbClr val="FFE066"/>
                 </a:solidFill>
               </a:rPr>
-              <a:t>36.4%</a:t>
+              <a:t>33.3%</a:t>
             </a:r>
           </a:p>
         </p:txBody>
@@ -5504,7 +5505,7 @@
                   <a:srgbClr val="FF6060"/>
                 </a:solidFill>
               </a:rPr>
-              <a:t>11.6%</a:t>
+              <a:t>14.0%</a:t>
             </a:r>
           </a:p>
         </p:txBody>
@@ -6098,28 +6099,28 @@
         <p:spPr>
           <a:xfrm>
             <a:off x="7635240" y="2578608"/>
-            <a:ext cx="3520440" cy="822960"/>
-          </a:xfrm>
-          <a:prstGeom prst="rect">
-            <a:avLst/>
-          </a:prstGeom>
-          <a:noFill/>
-        </p:spPr>
-        <p:txBody>
-          <a:bodyPr wrap="square">
-            <a:spAutoFit/>
-          </a:bodyPr>
-          <a:lstStyle/>
-          <a:p>
-            <a:pPr algn="l"/>
-            <a:r>
-              <a:rPr sz="1200" b="0" i="0">
+            <a:ext cx="3520440" cy="914400"/>
+          </a:xfrm>
+          <a:prstGeom prst="rect">
+            <a:avLst/>
+          </a:prstGeom>
+          <a:noFill/>
+        </p:spPr>
+        <p:txBody>
+          <a:bodyPr wrap="square">
+            <a:spAutoFit/>
+          </a:bodyPr>
+          <a:lstStyle/>
+          <a:p>
+            <a:pPr algn="l"/>
+            <a:r>
+              <a:rPr sz="1100" b="0" i="0">
                 <a:solidFill>
                   <a:srgbClr val="CCCCCC"/>
                 </a:solidFill>
               </a:rPr>
-              <a:t>v11n -&gt; v8n = 50%  &gt;  v8n -&gt; v11n = 36.4%
-Newer-generation patches reach backward better than older patches reach forward.</a:t>
+              <a:t>v11n -&gt; v8n = 50.0%  &gt;  v8n -&gt; v11n = 33.3%
+The asymmetry remains in the current v2 artifacts: newer-generation patches still reach backward better than older patches reach forward.</a:t>
             </a:r>
           </a:p>
         </p:txBody>
@@ -6133,7 +6134,7 @@
         <p:spPr>
           <a:xfrm>
             <a:off x="7452360" y="3657600"/>
-            <a:ext cx="3886200" cy="1828800"/>
+            <a:ext cx="3886200" cy="1874519"/>
           </a:xfrm>
           <a:prstGeom prst="rect">
             <a:avLst/>
@@ -6210,29 +6211,28 @@
         <p:spPr>
           <a:xfrm>
             <a:off x="7635240" y="4087368"/>
-            <a:ext cx="3520440" cy="1280160"/>
-          </a:xfrm>
-          <a:prstGeom prst="rect">
-            <a:avLst/>
-          </a:prstGeom>
-          <a:noFill/>
-        </p:spPr>
-        <p:txBody>
-          <a:bodyPr wrap="square">
-            <a:spAutoFit/>
-          </a:bodyPr>
-          <a:lstStyle/>
-          <a:p>
-            <a:pPr algn="l"/>
-            <a:r>
-              <a:rPr sz="1200" b="0" i="0">
+            <a:ext cx="3520440" cy="1325880"/>
+          </a:xfrm>
+          <a:prstGeom prst="rect">
+            <a:avLst/>
+          </a:prstGeom>
+          <a:noFill/>
+        </p:spPr>
+        <p:txBody>
+          <a:bodyPr wrap="square">
+            <a:spAutoFit/>
+          </a:bodyPr>
+          <a:lstStyle/>
+          <a:p>
+            <a:pPr algn="l"/>
+            <a:r>
+              <a:rPr sz="1100" b="0" i="0">
                 <a:solidFill>
                   <a:srgbClr val="CCCCCC"/>
                 </a:solidFill>
               </a:rPr>
-              <a:t>v26n is the hardest target in this matrix - nothing exceeds 18.6% against it.
-Its own patch still transfers out at 45% and 24.2%.
-In this setup, resistance as a target did not stop it from producing transferable adversarial structure.</a:t>
+              <a:t>v26n remains the hardest target in this study. Nothing in the direct matrix exceeds 16.3% against it, and even the best joint patch only reaches 18.6%.
+Yet the v26n patch still transfers out at 45.0% and 24.2%.</a:t>
             </a:r>
           </a:p>
         </p:txBody>
@@ -6594,27 +6594,27 @@
         <p:spPr>
           <a:xfrm>
             <a:off x="1005840" y="5321808"/>
-            <a:ext cx="4983480" cy="411480"/>
-          </a:xfrm>
-          <a:prstGeom prst="rect">
-            <a:avLst/>
-          </a:prstGeom>
-          <a:noFill/>
-        </p:spPr>
-        <p:txBody>
-          <a:bodyPr wrap="square">
-            <a:spAutoFit/>
-          </a:bodyPr>
-          <a:lstStyle/>
-          <a:p>
-            <a:pPr algn="l"/>
-            <a:r>
-              <a:rPr sz="1100" b="0" i="0">
+            <a:ext cx="4983480" cy="548640"/>
+          </a:xfrm>
+          <a:prstGeom prst="rect">
+            <a:avLst/>
+          </a:prstGeom>
+          <a:noFill/>
+        </p:spPr>
+        <p:txBody>
+          <a:bodyPr wrap="square">
+            <a:spAutoFit/>
+          </a:bodyPr>
+          <a:lstStyle/>
+          <a:p>
+            <a:pPr algn="l"/>
+            <a:r>
+              <a:rPr sz="1000" b="0" i="0">
                 <a:solidFill>
                   <a:srgbClr val="CCCCCC"/>
                 </a:solidFill>
               </a:rPr>
-              <a:t>High variance across seeds. No consistent reduction at 95% or 90% retention. Occasional reductions at 85% retention were unreliable and costly to clean detection rate.</a:t>
+              <a:t>High variance across seeds. At 95% and 90% retention there is no reliable benefit. Some 85% retention and isolated 90% retention seeds reduce suppression, but the effect is unstable and often trades off against clean detections.</a:t>
             </a:r>
           </a:p>
         </p:txBody>
@@ -7693,27 +7693,27 @@
         <p:spPr>
           <a:xfrm>
             <a:off x="822960" y="1828800"/>
-            <a:ext cx="5303520" cy="731520"/>
-          </a:xfrm>
-          <a:prstGeom prst="rect">
-            <a:avLst/>
-          </a:prstGeom>
-          <a:noFill/>
-        </p:spPr>
-        <p:txBody>
-          <a:bodyPr wrap="square">
-            <a:spAutoFit/>
-          </a:bodyPr>
-          <a:lstStyle/>
-          <a:p>
-            <a:pPr algn="l"/>
-            <a:r>
-              <a:rPr sz="1300" b="0" i="0">
+            <a:ext cx="5303520" cy="1051560"/>
+          </a:xfrm>
+          <a:prstGeom prst="rect">
+            <a:avLst/>
+          </a:prstGeom>
+          <a:noFill/>
+        </p:spPr>
+        <p:txBody>
+          <a:bodyPr wrap="square">
+            <a:spAutoFit/>
+          </a:bodyPr>
+          <a:lstStyle/>
+          <a:p>
+            <a:pPr algn="l"/>
+            <a:r>
+              <a:rPr sz="1200" b="0" i="0">
                 <a:solidFill>
                   <a:srgbClr val="CCCCCC"/>
                 </a:solidFill>
               </a:rPr>
-              <a:t>YOLO-Bad-Triangle framework: 22 automated cycles of optimized attacks versus optimized defenses. Attacks: square, DeepFool, dispersion reduction. Defenses: JPEG, median filter, bit-depth reduction, c_dog.</a:t>
+              <a:t>This slide uses the latest canonical cycle from YOLO-Bad-Triangle. The repo records 22 cycles overall, but this snapshot is cycle 22 from the current attack_then_defense series. Latest validated attacks: DeepFool, dispersion reduction, and square. Active defenses: JPEG, median filter, bit-depth reduction, and c_dog.</a:t>
             </a:r>
           </a:p>
         </p:txBody>
@@ -7726,7 +7726,7 @@
         </p:nvSpPr>
         <p:spPr>
           <a:xfrm>
-            <a:off x="822960" y="2651760"/>
+            <a:off x="822960" y="2834640"/>
             <a:ext cx="5303520" cy="1554480"/>
           </a:xfrm>
           <a:prstGeom prst="rect">
@@ -7769,7 +7769,7 @@
         </p:nvSpPr>
         <p:spPr>
           <a:xfrm>
-            <a:off x="1005840" y="2926080"/>
+            <a:off x="1005840" y="3090672"/>
             <a:ext cx="4937760" cy="914400"/>
           </a:xfrm>
           <a:prstGeom prst="rect">
@@ -7807,23 +7807,23 @@
           <a:p>
             <a:pPr algn="l"/>
             <a:r>
-              <a:rPr sz="1200" b="0" i="0">
+              <a:rPr sz="1100" b="0" i="0">
                 <a:solidFill>
                   <a:srgbClr val="FF6060"/>
                 </a:solidFill>
               </a:rPr>
-              <a:t>Best attack   dispersion_reduction       0.238      -60%</a:t>
-            </a:r>
-          </a:p>
-          <a:p>
-            <a:pPr algn="l"/>
-            <a:r>
-              <a:rPr sz="1200" b="0" i="0">
+              <a:t>Worst latest-cycle attack   dispersion_reduction    0.238   -60%</a:t>
+            </a:r>
+          </a:p>
+          <a:p>
+            <a:pPr algn="l"/>
+            <a:r>
+              <a:rPr sz="1100" b="0" i="0">
                 <a:solidFill>
                   <a:srgbClr val="FFE066"/>
                 </a:solidFill>
               </a:rPr>
-              <a:t>Best defense  square + c_dog             0.394      -34%</a:t>
+              <a:t>Best latest-cycle defended config  square + c_dog  0.394   -34%</a:t>
             </a:r>
           </a:p>
         </p:txBody>
@@ -7837,7 +7837,7 @@
         <p:spPr>
           <a:xfrm>
             <a:off x="6537960" y="1828800"/>
-            <a:ext cx="4800600" cy="1920240"/>
+            <a:ext cx="4800600" cy="2148840"/>
           </a:xfrm>
           <a:prstGeom prst="rect">
             <a:avLst/>
@@ -7914,27 +7914,27 @@
         <p:spPr>
           <a:xfrm>
             <a:off x="6720840" y="2267712"/>
-            <a:ext cx="4480560" cy="731520"/>
-          </a:xfrm>
-          <a:prstGeom prst="rect">
-            <a:avLst/>
-          </a:prstGeom>
-          <a:noFill/>
-        </p:spPr>
-        <p:txBody>
-          <a:bodyPr wrap="square">
-            <a:spAutoFit/>
-          </a:bodyPr>
-          <a:lstStyle/>
-          <a:p>
-            <a:pPr algn="l"/>
-            <a:r>
-              <a:rPr sz="1200" b="0" i="0">
+            <a:ext cx="4480560" cy="914400"/>
+          </a:xfrm>
+          <a:prstGeom prst="rect">
+            <a:avLst/>
+          </a:prstGeom>
+          <a:noFill/>
+        </p:spPr>
+        <p:txBody>
+          <a:bodyPr wrap="square">
+            <a:spAutoFit/>
+          </a:bodyPr>
+          <a:lstStyle/>
+          <a:p>
+            <a:pPr algn="l"/>
+            <a:r>
+              <a:rPr sz="1100" b="0" i="0">
                 <a:solidFill>
                   <a:srgbClr val="CCCCCC"/>
                 </a:solidFill>
               </a:rPr>
-              <a:t>DPC-UNet detector finetuned on adversarial examples (square x5 oversample + DeepFool + blur pairs). Deployed only after the clean A/B gate.</a:t>
+              <a:t>DPC-UNet denoiser checkpoint finetuned on adversarial image pairs (square x5 oversample + DeepFool + blur + square pairs). Candidate deployed only after clean A/B comparison against the current c_dog checkpoint.</a:t>
             </a:r>
           </a:p>
         </p:txBody>
@@ -7947,34 +7947,34 @@
         </p:nvSpPr>
         <p:spPr>
           <a:xfrm>
-            <a:off x="6720840" y="3063240"/>
-            <a:ext cx="4480560" cy="502920"/>
-          </a:xfrm>
-          <a:prstGeom prst="rect">
-            <a:avLst/>
-          </a:prstGeom>
-          <a:noFill/>
-        </p:spPr>
-        <p:txBody>
-          <a:bodyPr wrap="square">
-            <a:spAutoFit/>
-          </a:bodyPr>
-          <a:lstStyle/>
-          <a:p>
-            <a:pPr algn="l"/>
-            <a:r>
-              <a:rPr sz="1200" b="0" i="0">
+            <a:off x="6720840" y="3200400"/>
+            <a:ext cx="4480560" cy="594360"/>
+          </a:xfrm>
+          <a:prstGeom prst="rect">
+            <a:avLst/>
+          </a:prstGeom>
+          <a:noFill/>
+        </p:spPr>
+        <p:txBody>
+          <a:bodyPr wrap="square">
+            <a:spAutoFit/>
+          </a:bodyPr>
+          <a:lstStyle/>
+          <a:p>
+            <a:pPr algn="l"/>
+            <a:r>
+              <a:rPr sz="1100" b="0" i="0">
                 <a:solidFill>
                   <a:srgbClr val="CCCCCC"/>
                 </a:solidFill>
               </a:rPr>
-              <a:t>- Clean performance: +0.003 mAP50 - no regression</a:t>
-            </a:r>
-          </a:p>
-          <a:p>
-            <a:pPr algn="l"/>
-            <a:r>
-              <a:rPr sz="1200" b="0" i="0">
+              <a:t>- Clean performance: +0.0025 mAP50 versus previous checkpoint - no regression</a:t>
+            </a:r>
+          </a:p>
+          <a:p>
+            <a:pPr algn="l"/>
+            <a:r>
+              <a:rPr sz="1100" b="0" i="0">
                 <a:solidFill>
                   <a:srgbClr val="CCCCCC"/>
                 </a:solidFill>
@@ -7992,8 +7992,8 @@
         </p:nvSpPr>
         <p:spPr>
           <a:xfrm>
-            <a:off x="6537960" y="4069080"/>
-            <a:ext cx="4800600" cy="1417320"/>
+            <a:off x="6537960" y="4160520"/>
+            <a:ext cx="4800600" cy="1325880"/>
           </a:xfrm>
           <a:prstGeom prst="rect">
             <a:avLst/>
@@ -8069,28 +8069,28 @@
         </p:nvSpPr>
         <p:spPr>
           <a:xfrm>
-            <a:off x="6720840" y="4507992"/>
-            <a:ext cx="4480560" cy="749808"/>
-          </a:xfrm>
-          <a:prstGeom prst="rect">
-            <a:avLst/>
-          </a:prstGeom>
-          <a:noFill/>
-        </p:spPr>
-        <p:txBody>
-          <a:bodyPr wrap="square">
-            <a:spAutoFit/>
-          </a:bodyPr>
-          <a:lstStyle/>
-          <a:p>
-            <a:pPr algn="l"/>
-            <a:r>
-              <a:rPr sz="1200" b="0" i="0">
+            <a:off x="6720840" y="4480560"/>
+            <a:ext cx="4480560" cy="822960"/>
+          </a:xfrm>
+          <a:prstGeom prst="rect">
+            <a:avLst/>
+          </a:prstGeom>
+          <a:noFill/>
+        </p:spPr>
+        <p:txBody>
+          <a:bodyPr wrap="square">
+            <a:spAutoFit/>
+          </a:bodyPr>
+          <a:lstStyle/>
+          <a:p>
+            <a:pPr algn="l"/>
+            <a:r>
+              <a:rPr sz="1100" b="0" i="0">
                 <a:solidFill>
                   <a:srgbClr val="CCCCCC"/>
                 </a:solidFill>
               </a:rPr>
-              <a:t>Defenses partially recover attacked performance - from -60% to -34%. Finetuning is clean-safe but has not moved the needle on robustness yet. The arms race is still live.</a:t>
+              <a:t>No universal defense has emerged. In the current canonical series, c_dog is strongest on square, while median preprocessing is stronger on deepfool. Finetuning is clean-safe but has not yet produced a measurable robustness gain.</a:t>
             </a:r>
           </a:p>
         </p:txBody>
@@ -8272,7 +8272,7 @@
                   <a:srgbClr val="60B8FF"/>
                 </a:solidFill>
               </a:rPr>
-              <a:t>22-CYCLE AUTOMATION PIPELINE</a:t>
+              <a:t>4-PHASE AUTOMATION PIPELINE</a:t>
             </a:r>
           </a:p>
         </p:txBody>
@@ -8286,49 +8286,60 @@
         <p:spPr>
           <a:xfrm>
             <a:off x="1005840" y="2331720"/>
-            <a:ext cx="4937760" cy="1645920"/>
-          </a:xfrm>
-          <a:prstGeom prst="rect">
-            <a:avLst/>
-          </a:prstGeom>
-          <a:noFill/>
-        </p:spPr>
-        <p:txBody>
-          <a:bodyPr wrap="square">
-            <a:spAutoFit/>
-          </a:bodyPr>
-          <a:lstStyle/>
-          <a:p>
-            <a:pPr algn="l"/>
-            <a:r>
-              <a:rPr sz="1200" b="0" i="0">
+            <a:ext cx="4937760" cy="1874519"/>
+          </a:xfrm>
+          <a:prstGeom prst="rect">
+            <a:avLst/>
+          </a:prstGeom>
+          <a:noFill/>
+        </p:spPr>
+        <p:txBody>
+          <a:bodyPr wrap="square">
+            <a:spAutoFit/>
+          </a:bodyPr>
+          <a:lstStyle/>
+          <a:p>
+            <a:pPr algn="l"/>
+            <a:r>
+              <a:rPr sz="1100" b="0" i="0">
                 <a:solidFill>
                   <a:srgbClr val="CCCCCC"/>
                 </a:solidFill>
               </a:rPr>
-              <a:t>- Phase 1 - Attack: optimize patch hyperparameters against the current model; record mAP50 drop</a:t>
-            </a:r>
-          </a:p>
-          <a:p>
-            <a:pPr algn="l"/>
-            <a:r>
-              <a:rPr sz="1200" b="0" i="0">
+              <a:t>- Phase 1 - Characterize: smoke-rank candidate attacks</a:t>
+            </a:r>
+          </a:p>
+          <a:p>
+            <a:pPr algn="l"/>
+            <a:r>
+              <a:rPr sz="1100" b="0" i="0">
                 <a:solidFill>
                   <a:srgbClr val="CCCCCC"/>
                 </a:solidFill>
               </a:rPr>
-              <a:t>- Phase 2 - Defense: tune preprocessing or learned denoiser against the best attack; record mAP50 recovery</a:t>
-            </a:r>
-          </a:p>
-          <a:p>
-            <a:pPr algn="l"/>
-            <a:r>
-              <a:rPr sz="1200" b="0" i="0">
+              <a:t>- Phase 2 - Matrix: smoke-rank candidate defenses against top attacks</a:t>
+            </a:r>
+          </a:p>
+          <a:p>
+            <a:pPr algn="l"/>
+            <a:r>
+              <a:rPr sz="1100" b="0" i="0">
                 <a:solidFill>
                   <a:srgbClr val="CCCCCC"/>
                 </a:solidFill>
               </a:rPr>
-              <a:t>- Phase 3 - Gate + report: deploy only if clean mAP50 stays at or above baseline; emit schema-enforced JSON</a:t>
+              <a:t>- Phase 3 - Tune: coordinate-descent best attack and defense params</a:t>
+            </a:r>
+          </a:p>
+          <a:p>
+            <a:pPr algn="l"/>
+            <a:r>
+              <a:rPr sz="1100" b="0" i="0">
+                <a:solidFill>
+                  <a:srgbClr val="CCCCCC"/>
+                </a:solidFill>
+              </a:rPr>
+              <a:t>- Phase 4 - Validate + report: full-dataset mAP50 validation and artifact/report generation</a:t>
             </a:r>
           </a:p>
         </p:txBody>
@@ -8341,28 +8352,28 @@
         </p:nvSpPr>
         <p:spPr>
           <a:xfrm>
-            <a:off x="1005840" y="4069080"/>
-            <a:ext cx="4937760" cy="411480"/>
-          </a:xfrm>
-          <a:prstGeom prst="rect">
-            <a:avLst/>
-          </a:prstGeom>
-          <a:noFill/>
-        </p:spPr>
-        <p:txBody>
-          <a:bodyPr wrap="square">
-            <a:spAutoFit/>
-          </a:bodyPr>
-          <a:lstStyle/>
-          <a:p>
-            <a:pPr algn="l"/>
-            <a:r>
-              <a:rPr sz="1200" b="0" i="0">
+            <a:off x="1005840" y="4224528"/>
+            <a:ext cx="4937760" cy="502920"/>
+          </a:xfrm>
+          <a:prstGeom prst="rect">
+            <a:avLst/>
+          </a:prstGeom>
+          <a:noFill/>
+        </p:spPr>
+        <p:txBody>
+          <a:bodyPr wrap="square">
+            <a:spAutoFit/>
+          </a:bodyPr>
+          <a:lstStyle/>
+          <a:p>
+            <a:pPr algn="l"/>
+            <a:r>
+              <a:rPr sz="1100" b="0" i="0">
                 <a:solidFill>
                   <a:srgbClr val="CCCCCC"/>
                 </a:solidFill>
               </a:rPr>
-              <a:t>Each cycle produces a provenance-tracked artifact: attack config, defense config, before/after mAP50. No manual bookkeeping.</a:t>
+              <a:t>Checkpoint promotion is a separate clean A/B step for the c_dog denoiser: deploy only if the candidate does not regress versus the current checkpoint.</a:t>
             </a:r>
           </a:p>
         </p:txBody>
@@ -8375,7 +8386,7 @@
         </p:nvSpPr>
         <p:spPr>
           <a:xfrm>
-            <a:off x="1188720" y="4754880"/>
+            <a:off x="1188720" y="4892040"/>
             <a:ext cx="914400" cy="365760"/>
           </a:xfrm>
           <a:prstGeom prst="rect">
@@ -8409,7 +8420,7 @@
         </p:nvSpPr>
         <p:spPr>
           <a:xfrm>
-            <a:off x="2788920" y="4754880"/>
+            <a:off x="2788920" y="4892040"/>
             <a:ext cx="914400" cy="365760"/>
           </a:xfrm>
           <a:prstGeom prst="rect">
@@ -8443,7 +8454,7 @@
         </p:nvSpPr>
         <p:spPr>
           <a:xfrm>
-            <a:off x="4343400" y="4754880"/>
+            <a:off x="4343400" y="4892040"/>
             <a:ext cx="914400" cy="365760"/>
           </a:xfrm>
           <a:prstGeom prst="rect">
@@ -8464,7 +8475,7 @@
                   <a:srgbClr val="FFE066"/>
                 </a:solidFill>
               </a:rPr>
-              <a:t>3</a:t>
+              <a:t>5</a:t>
             </a:r>
           </a:p>
         </p:txBody>
@@ -8477,8 +8488,8 @@
         </p:nvSpPr>
         <p:spPr>
           <a:xfrm>
-            <a:off x="1143000" y="5102352"/>
-            <a:ext cx="1005840" cy="182880"/>
+            <a:off x="1005840" y="5239512"/>
+            <a:ext cx="1280160" cy="182880"/>
           </a:xfrm>
           <a:prstGeom prst="rect">
             <a:avLst/>
@@ -8498,7 +8509,7 @@
                   <a:srgbClr val="888888"/>
                 </a:solidFill>
               </a:rPr>
-              <a:t>cycles run</a:t>
+              <a:t>recorded cycles</a:t>
             </a:r>
           </a:p>
         </p:txBody>
@@ -8511,8 +8522,8 @@
         </p:nvSpPr>
         <p:spPr>
           <a:xfrm>
-            <a:off x="2606040" y="5102352"/>
-            <a:ext cx="1280160" cy="182880"/>
+            <a:off x="2468880" y="5239512"/>
+            <a:ext cx="1554480" cy="182880"/>
           </a:xfrm>
           <a:prstGeom prst="rect">
             <a:avLst/>
@@ -8532,7 +8543,7 @@
                   <a:srgbClr val="888888"/>
                 </a:solidFill>
               </a:rPr>
-              <a:t>defense types</a:t>
+              <a:t>active defenses</a:t>
             </a:r>
           </a:p>
         </p:txBody>
@@ -8545,8 +8556,8 @@
         </p:nvSpPr>
         <p:spPr>
           <a:xfrm>
-            <a:off x="4206240" y="5102352"/>
-            <a:ext cx="1188720" cy="182880"/>
+            <a:off x="3749040" y="5239512"/>
+            <a:ext cx="2103120" cy="182880"/>
           </a:xfrm>
           <a:prstGeom prst="rect">
             <a:avLst/>
@@ -8561,12 +8572,12 @@
           <a:p>
             <a:pPr algn="ctr"/>
             <a:r>
-              <a:rPr sz="900" b="0" i="0">
+              <a:rPr sz="800" b="0" i="0">
                 <a:solidFill>
                   <a:srgbClr val="888888"/>
                 </a:solidFill>
               </a:rPr>
-              <a:t>attack types</a:t>
+              <a:t>canonical post-switch cycles</a:t>
             </a:r>
           </a:p>
         </p:txBody>
@@ -8580,7 +8591,7 @@
         <p:spPr>
           <a:xfrm>
             <a:off x="6537960" y="1828800"/>
-            <a:ext cx="4800600" cy="1645920"/>
+            <a:ext cx="4800600" cy="1783080"/>
           </a:xfrm>
           <a:prstGeom prst="rect">
             <a:avLst/>
@@ -8643,7 +8654,7 @@
                   <a:srgbClr val="60B8FF"/>
                 </a:solidFill>
               </a:rPr>
-              <a:t>c_dog - BEST DEFENSE</a:t>
+              <a:t>c_dog - STRONGEST SQUARE DEFENSE IN CYCLE 22</a:t>
             </a:r>
           </a:p>
         </p:txBody>
@@ -8657,27 +8668,27 @@
         <p:spPr>
           <a:xfrm>
             <a:off x="6720840" y="2267712"/>
-            <a:ext cx="4480560" cy="868680"/>
-          </a:xfrm>
-          <a:prstGeom prst="rect">
-            <a:avLst/>
-          </a:prstGeom>
-          <a:noFill/>
-        </p:spPr>
-        <p:txBody>
-          <a:bodyPr wrap="square">
-            <a:spAutoFit/>
-          </a:bodyPr>
-          <a:lstStyle/>
-          <a:p>
-            <a:pPr algn="l"/>
-            <a:r>
-              <a:rPr sz="1200" b="0" i="0">
+            <a:ext cx="4480560" cy="960120"/>
+          </a:xfrm>
+          <a:prstGeom prst="rect">
+            <a:avLst/>
+          </a:prstGeom>
+          <a:noFill/>
+        </p:spPr>
+        <p:txBody>
+          <a:bodyPr wrap="square">
+            <a:spAutoFit/>
+          </a:bodyPr>
+          <a:lstStyle/>
+          <a:p>
+            <a:pPr algn="l"/>
+            <a:r>
+              <a:rPr sz="1100" b="0" i="0">
                 <a:solidFill>
                   <a:srgbClr val="CCCCCC"/>
                 </a:solidFill>
               </a:rPr>
-              <a:t>A small convolutional denoiser trained to strip adversarial structure from inputs before they reach the detector. It adapts to patch patterns rather than blindly smoothing.</a:t>
+              <a:t>A DPC-UNet denoiser that preprocesses inputs before YOLO inference. In cycle 22, square + c_dog improves mAP50 from 0.363 to 0.394. It is not the strongest defense on every attack.</a:t>
             </a:r>
           </a:p>
         </p:txBody>
@@ -8690,28 +8701,28 @@
         </p:nvSpPr>
         <p:spPr>
           <a:xfrm>
-            <a:off x="6720840" y="3246120"/>
-            <a:ext cx="4480560" cy="228600"/>
-          </a:xfrm>
-          <a:prstGeom prst="rect">
-            <a:avLst/>
-          </a:prstGeom>
-          <a:noFill/>
-        </p:spPr>
-        <p:txBody>
-          <a:bodyPr wrap="square">
-            <a:spAutoFit/>
-          </a:bodyPr>
-          <a:lstStyle/>
-          <a:p>
-            <a:pPr algn="l"/>
-            <a:r>
-              <a:rPr sz="1200" b="0" i="0">
+            <a:off x="6720840" y="3310128"/>
+            <a:ext cx="4480560" cy="274320"/>
+          </a:xfrm>
+          <a:prstGeom prst="rect">
+            <a:avLst/>
+          </a:prstGeom>
+          <a:noFill/>
+        </p:spPr>
+        <p:txBody>
+          <a:bodyPr wrap="square">
+            <a:spAutoFit/>
+          </a:bodyPr>
+          <a:lstStyle/>
+          <a:p>
+            <a:pPr algn="l"/>
+            <a:r>
+              <a:rPr sz="1100" b="0" i="0">
                 <a:solidFill>
                   <a:srgbClr val="FFE066"/>
                 </a:solidFill>
               </a:rPr>
-              <a:t>square + c_dog: mAP50  0.238 -&gt; 0.394   (+65% recovery)</a:t>
+              <a:t>Current snapshot: square attack 0.363 -&gt; square + c_dog 0.394</a:t>
             </a:r>
           </a:p>
         </p:txBody>
@@ -8724,8 +8735,8 @@
         </p:nvSpPr>
         <p:spPr>
           <a:xfrm>
-            <a:off x="6537960" y="3749039"/>
-            <a:ext cx="4800600" cy="1783080"/>
+            <a:off x="6537960" y="3822191"/>
+            <a:ext cx="4800600" cy="1828800"/>
           </a:xfrm>
           <a:prstGeom prst="rect">
             <a:avLst/>
@@ -8802,66 +8813,66 @@
         <p:spPr>
           <a:xfrm>
             <a:off x="6720840" y="4187952"/>
-            <a:ext cx="4480560" cy="1143000"/>
-          </a:xfrm>
-          <a:prstGeom prst="rect">
-            <a:avLst/>
-          </a:prstGeom>
-          <a:noFill/>
-        </p:spPr>
-        <p:txBody>
-          <a:bodyPr wrap="square">
-            <a:spAutoFit/>
-          </a:bodyPr>
-          <a:lstStyle/>
-          <a:p>
-            <a:pPr algn="l"/>
-            <a:r>
-              <a:rPr sz="1100" b="0" i="0">
+            <a:ext cx="4480560" cy="1325880"/>
+          </a:xfrm>
+          <a:prstGeom prst="rect">
+            <a:avLst/>
+          </a:prstGeom>
+          <a:noFill/>
+        </p:spPr>
+        <p:txBody>
+          <a:bodyPr wrap="square">
+            <a:spAutoFit/>
+          </a:bodyPr>
+          <a:lstStyle/>
+          <a:p>
+            <a:pPr algn="l"/>
+            <a:r>
+              <a:rPr sz="1000" b="0" i="0">
                 <a:solidFill>
                   <a:srgbClr val="CCCCCC"/>
                 </a:solidFill>
               </a:rPr>
-              <a:t>- Architecture: DPC-UNet detector</a:t>
-            </a:r>
-          </a:p>
-          <a:p>
-            <a:pPr algn="l"/>
-            <a:r>
-              <a:rPr sz="1100" b="0" i="0">
+              <a:t>- Architecture: DPC-UNet denoiser checkpoint</a:t>
+            </a:r>
+          </a:p>
+          <a:p>
+            <a:pPr algn="l"/>
+            <a:r>
+              <a:rPr sz="1000" b="0" i="0">
                 <a:solidFill>
                   <a:srgbClr val="CCCCCC"/>
                 </a:solidFill>
               </a:rPr>
-              <a:t>- Mix: square x5 oversample + DeepFool + blur pairs</a:t>
-            </a:r>
-          </a:p>
-          <a:p>
-            <a:pPr algn="l"/>
-            <a:r>
-              <a:rPr sz="1100" b="0" i="0">
+              <a:t>- Mix: square x5 oversample + DeepFool + blur + square pairs</a:t>
+            </a:r>
+          </a:p>
+          <a:p>
+            <a:pPr algn="l"/>
+            <a:r>
+              <a:rPr sz="1000" b="0" i="0">
                 <a:solidFill>
                   <a:srgbClr val="CCCCCC"/>
                 </a:solidFill>
               </a:rPr>
-              <a:t>- Gate: deploy only if clean mAP50 &gt;= 0.600</a:t>
-            </a:r>
-          </a:p>
-          <a:p>
-            <a:pPr algn="l"/>
-            <a:r>
-              <a:rPr sz="1100" b="0" i="0">
+              <a:t>- Gate: deploy only if clean A/B does not regress vs current checkpoint</a:t>
+            </a:r>
+          </a:p>
+          <a:p>
+            <a:pPr algn="l"/>
+            <a:r>
+              <a:rPr sz="1000" b="0" i="0">
                 <a:solidFill>
                   <a:srgbClr val="CCCCCC"/>
                 </a:solidFill>
               </a:rPr>
-              <a:t>- Result: +0.003 clean mAP50 - gate passed</a:t>
-            </a:r>
-          </a:p>
-          <a:p>
-            <a:pPr algn="l"/>
-            <a:r>
-              <a:rPr sz="1100" b="0" i="0">
+              <a:t>- Result: +0.0025 clean mAP50 vs previous checkpoint - gate passed</a:t>
+            </a:r>
+          </a:p>
+          <a:p>
+            <a:pPr algn="l"/>
+            <a:r>
+              <a:rPr sz="1000" b="0" i="0">
                 <a:solidFill>
                   <a:srgbClr val="CCCCCC"/>
                 </a:solidFill>
@@ -9258,7 +9269,7 @@
                   <a:srgbClr val="CCCCCC"/>
                 </a:solidFill>
               </a:rPr>
-              <a:t>Physical suppression is roughly 30-60% because printers, lighting, and angle perturb the patch.</a:t>
+              <a:t>Physical demos underperform digital because printer color shift, lighting, and view angle perturb the patch.</a:t>
             </a:r>
           </a:p>
           <a:p>
